--- a/Adapter Design Pattern.pptx
+++ b/Adapter Design Pattern.pptx
@@ -8,22 +8,23 @@
     <p:sldId id="256" r:id="rId2"/>
     <p:sldId id="257" r:id="rId3"/>
     <p:sldId id="275" r:id="rId4"/>
-    <p:sldId id="273" r:id="rId5"/>
-    <p:sldId id="274" r:id="rId6"/>
-    <p:sldId id="264" r:id="rId7"/>
-    <p:sldId id="265" r:id="rId8"/>
-    <p:sldId id="258" r:id="rId9"/>
-    <p:sldId id="267" r:id="rId10"/>
-    <p:sldId id="268" r:id="rId11"/>
-    <p:sldId id="269" r:id="rId12"/>
-    <p:sldId id="271" r:id="rId13"/>
-    <p:sldId id="259" r:id="rId14"/>
-    <p:sldId id="260" r:id="rId15"/>
-    <p:sldId id="261" r:id="rId16"/>
-    <p:sldId id="262" r:id="rId17"/>
-    <p:sldId id="263" r:id="rId18"/>
-    <p:sldId id="270" r:id="rId19"/>
-    <p:sldId id="272" r:id="rId20"/>
+    <p:sldId id="276" r:id="rId5"/>
+    <p:sldId id="273" r:id="rId6"/>
+    <p:sldId id="274" r:id="rId7"/>
+    <p:sldId id="264" r:id="rId8"/>
+    <p:sldId id="265" r:id="rId9"/>
+    <p:sldId id="258" r:id="rId10"/>
+    <p:sldId id="267" r:id="rId11"/>
+    <p:sldId id="268" r:id="rId12"/>
+    <p:sldId id="269" r:id="rId13"/>
+    <p:sldId id="271" r:id="rId14"/>
+    <p:sldId id="259" r:id="rId15"/>
+    <p:sldId id="260" r:id="rId16"/>
+    <p:sldId id="261" r:id="rId17"/>
+    <p:sldId id="262" r:id="rId18"/>
+    <p:sldId id="263" r:id="rId19"/>
+    <p:sldId id="270" r:id="rId20"/>
+    <p:sldId id="272" r:id="rId21"/>
   </p:sldIdLst>
   <p:sldSz cx="12192000" cy="6858000"/>
   <p:notesSz cx="6858000" cy="9144000"/>
@@ -3604,6 +3605,104 @@
         </p:nvSpPr>
         <p:spPr>
           <a:xfrm>
+            <a:off x="644434" y="121920"/>
+            <a:ext cx="5286106" cy="966652"/>
+          </a:xfrm>
+        </p:spPr>
+        <p:txBody>
+          <a:bodyPr anchor="ctr">
+            <a:noAutofit/>
+          </a:bodyPr>
+          <a:lstStyle/>
+          <a:p>
+            <a:pPr algn="ctr"/>
+            <a:r>
+              <a:rPr lang="en-IN" sz="4000" b="1" u="sng" dirty="0" smtClean="0"/>
+              <a:t>Structure Diagram</a:t>
+            </a:r>
+            <a:endParaRPr lang="en-IN" sz="4800" b="1" u="sng" dirty="0"/>
+          </a:p>
+        </p:txBody>
+      </p:sp>
+      <p:pic>
+        <p:nvPicPr>
+          <p:cNvPr id="3" name="Picture 2"/>
+          <p:cNvPicPr>
+            <a:picLocks noChangeAspect="1"/>
+          </p:cNvPicPr>
+          <p:nvPr/>
+        </p:nvPicPr>
+        <p:blipFill>
+          <a:blip r:embed="rId2">
+            <a:extLst>
+              <a:ext uri="{28A0092B-C50C-407E-A947-70E740481C1C}">
+                <a14:useLocalDpi xmlns:a14="http://schemas.microsoft.com/office/drawing/2010/main" val="0"/>
+              </a:ext>
+            </a:extLst>
+          </a:blip>
+          <a:stretch>
+            <a:fillRect/>
+          </a:stretch>
+        </p:blipFill>
+        <p:spPr>
+          <a:xfrm>
+            <a:off x="801189" y="1280160"/>
+            <a:ext cx="11059885" cy="5303520"/>
+          </a:xfrm>
+          <a:prstGeom prst="rect">
+            <a:avLst/>
+          </a:prstGeom>
+        </p:spPr>
+      </p:pic>
+    </p:spTree>
+    <p:extLst>
+      <p:ext uri="{BB962C8B-B14F-4D97-AF65-F5344CB8AC3E}">
+        <p14:creationId xmlns:p14="http://schemas.microsoft.com/office/powerpoint/2010/main" val="3954714818"/>
+      </p:ext>
+    </p:extLst>
+  </p:cSld>
+  <p:clrMapOvr>
+    <a:masterClrMapping/>
+  </p:clrMapOvr>
+  <p:timing>
+    <p:tnLst>
+      <p:par>
+        <p:cTn id="1" dur="indefinite" restart="never" nodeType="tmRoot"/>
+      </p:par>
+    </p:tnLst>
+  </p:timing>
+</p:sld>
+</file>
+
+<file path=ppt/slides/slide11.xml><?xml version="1.0" encoding="utf-8"?>
+<p:sld xmlns:a="http://schemas.openxmlformats.org/drawingml/2006/main" xmlns:r="http://schemas.openxmlformats.org/officeDocument/2006/relationships" xmlns:p="http://schemas.openxmlformats.org/presentationml/2006/main">
+  <p:cSld>
+    <p:spTree>
+      <p:nvGrpSpPr>
+        <p:cNvPr id="1" name=""/>
+        <p:cNvGrpSpPr/>
+        <p:nvPr/>
+      </p:nvGrpSpPr>
+      <p:grpSpPr>
+        <a:xfrm>
+          <a:off x="0" y="0"/>
+          <a:ext cx="0" cy="0"/>
+          <a:chOff x="0" y="0"/>
+          <a:chExt cx="0" cy="0"/>
+        </a:xfrm>
+      </p:grpSpPr>
+      <p:sp>
+        <p:nvSpPr>
+          <p:cNvPr id="2" name="Title 1"/>
+          <p:cNvSpPr>
+            <a:spLocks noGrp="1"/>
+          </p:cNvSpPr>
+          <p:nvPr>
+            <p:ph type="ctrTitle"/>
+          </p:nvPr>
+        </p:nvSpPr>
+        <p:spPr>
+          <a:xfrm>
             <a:off x="862150" y="-104501"/>
             <a:ext cx="3997237" cy="966652"/>
           </a:xfrm>
@@ -3673,7 +3772,7 @@
 </p:sld>
 </file>
 
-<file path=ppt/slides/slide11.xml><?xml version="1.0" encoding="utf-8"?>
+<file path=ppt/slides/slide12.xml><?xml version="1.0" encoding="utf-8"?>
 <p:sld xmlns:a="http://schemas.openxmlformats.org/drawingml/2006/main" xmlns:r="http://schemas.openxmlformats.org/officeDocument/2006/relationships" xmlns:p="http://schemas.openxmlformats.org/presentationml/2006/main">
   <p:cSld>
     <p:spTree>
@@ -4375,197 +4474,6 @@
 </p:sld>
 </file>
 
-<file path=ppt/slides/slide12.xml><?xml version="1.0" encoding="utf-8"?>
-<p:sld xmlns:a="http://schemas.openxmlformats.org/drawingml/2006/main" xmlns:r="http://schemas.openxmlformats.org/officeDocument/2006/relationships" xmlns:p="http://schemas.openxmlformats.org/presentationml/2006/main">
-  <p:cSld>
-    <p:spTree>
-      <p:nvGrpSpPr>
-        <p:cNvPr id="1" name=""/>
-        <p:cNvGrpSpPr/>
-        <p:nvPr/>
-      </p:nvGrpSpPr>
-      <p:grpSpPr>
-        <a:xfrm>
-          <a:off x="0" y="0"/>
-          <a:ext cx="0" cy="0"/>
-          <a:chOff x="0" y="0"/>
-          <a:chExt cx="0" cy="0"/>
-        </a:xfrm>
-      </p:grpSpPr>
-      <p:sp>
-        <p:nvSpPr>
-          <p:cNvPr id="2" name="Title 1"/>
-          <p:cNvSpPr>
-            <a:spLocks noGrp="1"/>
-          </p:cNvSpPr>
-          <p:nvPr>
-            <p:ph type="ctrTitle"/>
-          </p:nvPr>
-        </p:nvSpPr>
-        <p:spPr>
-          <a:xfrm>
-            <a:off x="618311" y="217714"/>
-            <a:ext cx="4929050" cy="748938"/>
-          </a:xfrm>
-        </p:spPr>
-        <p:txBody>
-          <a:bodyPr anchor="ctr">
-            <a:noAutofit/>
-          </a:bodyPr>
-          <a:lstStyle/>
-          <a:p>
-            <a:r>
-              <a:rPr lang="en-IN" sz="4400" u="sng" dirty="0"/>
-              <a:t>How to Implement</a:t>
-            </a:r>
-          </a:p>
-        </p:txBody>
-      </p:sp>
-      <p:sp>
-        <p:nvSpPr>
-          <p:cNvPr id="3" name="TextBox 2"/>
-          <p:cNvSpPr txBox="1"/>
-          <p:nvPr/>
-        </p:nvSpPr>
-        <p:spPr>
-          <a:xfrm>
-            <a:off x="618310" y="1175657"/>
-            <a:ext cx="11112136" cy="5632311"/>
-          </a:xfrm>
-          <a:prstGeom prst="rect">
-            <a:avLst/>
-          </a:prstGeom>
-          <a:noFill/>
-        </p:spPr>
-        <p:txBody>
-          <a:bodyPr wrap="square" rtlCol="0">
-            <a:spAutoFit/>
-          </a:bodyPr>
-          <a:lstStyle/>
-          <a:p>
-            <a:pPr marL="342900" indent="-342900" algn="just">
-              <a:buFont typeface="+mj-lt"/>
-              <a:buAutoNum type="arabicPeriod"/>
-            </a:pPr>
-            <a:r>
-              <a:rPr lang="en-US" sz="2000" b="1" dirty="0"/>
-              <a:t>Identify Incompatibility: Have a service class with an incompatible interface that the client cannot use directly.</a:t>
-            </a:r>
-          </a:p>
-          <a:p>
-            <a:pPr marL="342900" indent="-342900" algn="just">
-              <a:buFont typeface="+mj-lt"/>
-              <a:buAutoNum type="arabicPeriod"/>
-            </a:pPr>
-            <a:endParaRPr lang="en-US" sz="2000" b="1" dirty="0"/>
-          </a:p>
-          <a:p>
-            <a:pPr marL="342900" indent="-342900" algn="just">
-              <a:buFont typeface="+mj-lt"/>
-              <a:buAutoNum type="arabicPeriod"/>
-            </a:pPr>
-            <a:r>
-              <a:rPr lang="en-US" sz="2000" b="1" dirty="0"/>
-              <a:t>Define Client Interface: Create an interface that represents how the client expects to interact with the service.</a:t>
-            </a:r>
-          </a:p>
-          <a:p>
-            <a:pPr marL="342900" indent="-342900" algn="just">
-              <a:buFont typeface="+mj-lt"/>
-              <a:buAutoNum type="arabicPeriod"/>
-            </a:pPr>
-            <a:endParaRPr lang="en-US" sz="2000" b="1" dirty="0"/>
-          </a:p>
-          <a:p>
-            <a:pPr marL="342900" indent="-342900" algn="just">
-              <a:buFont typeface="+mj-lt"/>
-              <a:buAutoNum type="arabicPeriod"/>
-            </a:pPr>
-            <a:r>
-              <a:rPr lang="en-US" sz="2000" b="1" dirty="0"/>
-              <a:t>Create Adapter Class: Implement the client interface in an adapter class, initially leaving methods unimplemented.</a:t>
-            </a:r>
-          </a:p>
-          <a:p>
-            <a:pPr marL="342900" indent="-342900" algn="just">
-              <a:buFont typeface="+mj-lt"/>
-              <a:buAutoNum type="arabicPeriod"/>
-            </a:pPr>
-            <a:endParaRPr lang="en-US" sz="2000" b="1" dirty="0"/>
-          </a:p>
-          <a:p>
-            <a:pPr marL="342900" indent="-342900" algn="just">
-              <a:buFont typeface="+mj-lt"/>
-              <a:buAutoNum type="arabicPeriod"/>
-            </a:pPr>
-            <a:r>
-              <a:rPr lang="en-US" sz="2000" b="1" dirty="0"/>
-              <a:t>Store Service Reference: Add a field in the adapter to hold a reference to the service class, typically set via the constructor.</a:t>
-            </a:r>
-          </a:p>
-          <a:p>
-            <a:pPr marL="342900" indent="-342900" algn="just">
-              <a:buFont typeface="+mj-lt"/>
-              <a:buAutoNum type="arabicPeriod"/>
-            </a:pPr>
-            <a:endParaRPr lang="en-US" sz="2000" b="1" dirty="0"/>
-          </a:p>
-          <a:p>
-            <a:pPr marL="342900" indent="-342900" algn="just">
-              <a:buFont typeface="+mj-lt"/>
-              <a:buAutoNum type="arabicPeriod"/>
-            </a:pPr>
-            <a:r>
-              <a:rPr lang="en-US" sz="2000" b="1" dirty="0"/>
-              <a:t>Implement Adaptation Logic: In the adapter, translate client interface calls into equivalent service calls, handling data or interface conversion as needed.</a:t>
-            </a:r>
-          </a:p>
-          <a:p>
-            <a:pPr marL="342900" indent="-342900" algn="just">
-              <a:buFont typeface="+mj-lt"/>
-              <a:buAutoNum type="arabicPeriod"/>
-            </a:pPr>
-            <a:endParaRPr lang="en-US" sz="2000" b="1" dirty="0"/>
-          </a:p>
-          <a:p>
-            <a:pPr marL="342900" indent="-342900" algn="just">
-              <a:buFont typeface="+mj-lt"/>
-              <a:buAutoNum type="arabicPeriod"/>
-            </a:pPr>
-            <a:r>
-              <a:rPr lang="en-US" sz="2000" b="1" dirty="0"/>
-              <a:t>Client Uses Adapter: The client interacts only with the adapter via the client interface, ensuring flexibility and decoupling from the actual service class.</a:t>
-            </a:r>
-          </a:p>
-          <a:p>
-            <a:pPr marL="342900" indent="-342900" algn="just">
-              <a:buFont typeface="+mj-lt"/>
-              <a:buAutoNum type="arabicPeriod"/>
-            </a:pPr>
-            <a:endParaRPr lang="en-IN" sz="2000" b="1" dirty="0"/>
-          </a:p>
-        </p:txBody>
-      </p:sp>
-    </p:spTree>
-    <p:extLst>
-      <p:ext uri="{BB962C8B-B14F-4D97-AF65-F5344CB8AC3E}">
-        <p14:creationId xmlns:p14="http://schemas.microsoft.com/office/powerpoint/2010/main" val="3376716967"/>
-      </p:ext>
-    </p:extLst>
-  </p:cSld>
-  <p:clrMapOvr>
-    <a:masterClrMapping/>
-  </p:clrMapOvr>
-  <p:timing>
-    <p:tnLst>
-      <p:par>
-        <p:cTn id="1" dur="indefinite" restart="never" nodeType="tmRoot"/>
-      </p:par>
-    </p:tnLst>
-  </p:timing>
-</p:sld>
-</file>
-
 <file path=ppt/slides/slide13.xml><?xml version="1.0" encoding="utf-8"?>
 <p:sld xmlns:a="http://schemas.openxmlformats.org/drawingml/2006/main" xmlns:r="http://schemas.openxmlformats.org/officeDocument/2006/relationships" xmlns:p="http://schemas.openxmlformats.org/presentationml/2006/main">
   <p:cSld>
@@ -4595,503 +4503,152 @@
         </p:nvSpPr>
         <p:spPr>
           <a:xfrm>
-            <a:off x="592181" y="0"/>
-            <a:ext cx="4101740" cy="966652"/>
+            <a:off x="618311" y="217714"/>
+            <a:ext cx="4929050" cy="748938"/>
           </a:xfrm>
         </p:spPr>
         <p:txBody>
-          <a:bodyPr>
-            <a:normAutofit fontScale="90000"/>
-          </a:bodyPr>
-          <a:lstStyle/>
-          <a:p>
-            <a:r>
-              <a:rPr lang="en-IN" sz="5300" u="sng" dirty="0"/>
-              <a:t>Collaboration</a:t>
-            </a:r>
-            <a:endParaRPr lang="en-IN" sz="6000" u="sng" dirty="0"/>
-          </a:p>
-        </p:txBody>
-      </p:sp>
-      <p:sp>
-        <p:nvSpPr>
-          <p:cNvPr id="3" name="Subtitle 2"/>
-          <p:cNvSpPr>
-            <a:spLocks noGrp="1"/>
-          </p:cNvSpPr>
-          <p:nvPr>
-            <p:ph type="subTitle" idx="1"/>
-          </p:nvPr>
-        </p:nvSpPr>
-        <p:spPr>
-          <a:xfrm>
-            <a:off x="984065" y="1383300"/>
-            <a:ext cx="10624457" cy="2378512"/>
-          </a:xfrm>
-        </p:spPr>
-        <p:txBody>
-          <a:bodyPr>
+          <a:bodyPr anchor="ctr">
             <a:noAutofit/>
           </a:bodyPr>
           <a:lstStyle/>
           <a:p>
-            <a:pPr marL="342900" indent="-342900" algn="just">
-              <a:buClr>
-                <a:schemeClr val="tx1"/>
-              </a:buClr>
-              <a:buSzPct val="119000"/>
-              <a:buFont typeface="Arial" panose="020B0604020202020204" pitchFamily="34" charset="0"/>
-              <a:buChar char="•"/>
-            </a:pPr>
-            <a:r>
-              <a:rPr lang="en-US" b="1" dirty="0" smtClean="0">
-                <a:solidFill>
-                  <a:schemeClr val="tx1"/>
-                </a:solidFill>
-              </a:rPr>
-              <a:t>Client </a:t>
-            </a:r>
-            <a:r>
-              <a:rPr lang="en-US" b="1" dirty="0">
-                <a:solidFill>
-                  <a:schemeClr val="tx1"/>
-                </a:solidFill>
-              </a:rPr>
-              <a:t>calls Adapter </a:t>
-            </a:r>
-            <a:r>
-              <a:rPr lang="en-US" b="1" dirty="0" smtClean="0">
-                <a:solidFill>
-                  <a:schemeClr val="tx1"/>
-                </a:solidFill>
-              </a:rPr>
-              <a:t>using </a:t>
-            </a:r>
-            <a:r>
-              <a:rPr lang="en-US" b="1" dirty="0">
-                <a:solidFill>
-                  <a:schemeClr val="tx1"/>
-                </a:solidFill>
-              </a:rPr>
-              <a:t>Target Interface.</a:t>
-            </a:r>
-          </a:p>
-          <a:p>
-            <a:pPr marL="342900" indent="-342900" algn="just">
-              <a:buClr>
-                <a:schemeClr val="tx1"/>
-              </a:buClr>
-              <a:buSzPct val="119000"/>
-              <a:buFont typeface="Arial" panose="020B0604020202020204" pitchFamily="34" charset="0"/>
-              <a:buChar char="•"/>
-            </a:pPr>
-            <a:r>
-              <a:rPr lang="en-US" b="1" dirty="0">
-                <a:solidFill>
-                  <a:schemeClr val="tx1"/>
-                </a:solidFill>
-              </a:rPr>
-              <a:t>Adapter class translates this request and delegates it to adaptee using one/multiple method calls using Adaptee </a:t>
-            </a:r>
-            <a:r>
-              <a:rPr lang="en-US" b="1" dirty="0" smtClean="0">
-                <a:solidFill>
-                  <a:schemeClr val="tx1"/>
-                </a:solidFill>
-              </a:rPr>
-              <a:t>Interface.</a:t>
-            </a:r>
-          </a:p>
-          <a:p>
-            <a:pPr marL="342900" indent="-342900" algn="just">
-              <a:buClr>
-                <a:schemeClr val="tx1"/>
-              </a:buClr>
-              <a:buSzPct val="119000"/>
-              <a:buFont typeface="Arial" panose="020B0604020202020204" pitchFamily="34" charset="0"/>
-              <a:buChar char="•"/>
-            </a:pPr>
-            <a:r>
-              <a:rPr lang="en-US" b="1" dirty="0">
-                <a:solidFill>
-                  <a:schemeClr val="tx1"/>
-                </a:solidFill>
-              </a:rPr>
-              <a:t>Adaptee returns response to Adapter class as defined in Adaptee Interface and then Adapter transforms this response before returning it to Client as defined in Target Interface</a:t>
-            </a:r>
-            <a:r>
-              <a:rPr lang="en-US" b="1" dirty="0" smtClean="0">
-                <a:solidFill>
-                  <a:schemeClr val="tx1"/>
-                </a:solidFill>
-              </a:rPr>
-              <a:t>.</a:t>
-            </a:r>
-            <a:endParaRPr lang="en-US" b="1" dirty="0">
-              <a:solidFill>
-                <a:schemeClr val="tx1"/>
-              </a:solidFill>
-            </a:endParaRPr>
-          </a:p>
-        </p:txBody>
-      </p:sp>
-      <p:sp>
-        <p:nvSpPr>
-          <p:cNvPr id="4" name="Title 1"/>
-          <p:cNvSpPr txBox="1">
-            <a:spLocks/>
-          </p:cNvSpPr>
+            <a:r>
+              <a:rPr lang="en-IN" sz="4400" u="sng" dirty="0"/>
+              <a:t>How to Implement</a:t>
+            </a:r>
+          </a:p>
+        </p:txBody>
+      </p:sp>
+      <p:sp>
+        <p:nvSpPr>
+          <p:cNvPr id="3" name="TextBox 2"/>
+          <p:cNvSpPr txBox="1"/>
           <p:nvPr/>
         </p:nvSpPr>
         <p:spPr>
           <a:xfrm>
-            <a:off x="592181" y="4178460"/>
-            <a:ext cx="4763592" cy="966652"/>
+            <a:off x="618310" y="1175657"/>
+            <a:ext cx="11112136" cy="5632311"/>
           </a:xfrm>
           <a:prstGeom prst="rect">
             <a:avLst/>
           </a:prstGeom>
+          <a:noFill/>
         </p:spPr>
         <p:txBody>
-          <a:bodyPr vert="horz" lIns="91440" tIns="45720" rIns="91440" bIns="45720" rtlCol="0" anchor="b">
-            <a:normAutofit/>
+          <a:bodyPr wrap="square" rtlCol="0">
+            <a:spAutoFit/>
           </a:bodyPr>
-          <a:lstStyle>
-            <a:lvl1pPr algn="l" defTabSz="914400" rtl="0" eaLnBrk="1" latinLnBrk="0" hangingPunct="1">
-              <a:lnSpc>
-                <a:spcPct val="85000"/>
-              </a:lnSpc>
-              <a:spcBef>
-                <a:spcPct val="0"/>
-              </a:spcBef>
-              <a:buNone/>
-              <a:defRPr sz="7200" kern="1200" spc="-50" baseline="0">
-                <a:solidFill>
-                  <a:schemeClr val="tx1"/>
-                </a:solidFill>
-                <a:latin typeface="+mj-lt"/>
-                <a:ea typeface="+mj-ea"/>
-                <a:cs typeface="+mj-cs"/>
-              </a:defRPr>
-            </a:lvl1pPr>
-          </a:lstStyle>
-          <a:p>
-            <a:r>
-              <a:rPr lang="en-IN" sz="4800" u="sng" dirty="0"/>
-              <a:t>Also Known As</a:t>
-            </a:r>
-            <a:endParaRPr lang="en-IN" sz="6000" u="sng" dirty="0"/>
-          </a:p>
-        </p:txBody>
-      </p:sp>
-      <p:sp>
-        <p:nvSpPr>
-          <p:cNvPr id="10" name="Subtitle 2"/>
-          <p:cNvSpPr txBox="1">
-            <a:spLocks/>
-          </p:cNvSpPr>
-          <p:nvPr/>
-        </p:nvSpPr>
-        <p:spPr>
-          <a:xfrm>
-            <a:off x="984066" y="5601761"/>
-            <a:ext cx="10624457" cy="520365"/>
-          </a:xfrm>
-          <a:prstGeom prst="rect">
-            <a:avLst/>
-          </a:prstGeom>
-        </p:spPr>
-        <p:txBody>
-          <a:bodyPr vert="horz" lIns="91440" tIns="45720" rIns="91440" bIns="45720" rtlCol="0">
-            <a:noAutofit/>
-          </a:bodyPr>
-          <a:lstStyle>
-            <a:lvl1pPr marL="0" indent="0" algn="l" defTabSz="914400" rtl="0" eaLnBrk="1" latinLnBrk="0" hangingPunct="1">
-              <a:lnSpc>
-                <a:spcPct val="95000"/>
-              </a:lnSpc>
-              <a:spcBef>
-                <a:spcPts val="1400"/>
-              </a:spcBef>
-              <a:spcAft>
-                <a:spcPts val="200"/>
-              </a:spcAft>
-              <a:buClr>
-                <a:schemeClr val="accent1"/>
-              </a:buClr>
-              <a:buSzPct val="80000"/>
-              <a:buFont typeface="Arial" pitchFamily="34" charset="0"/>
-              <a:buNone/>
-              <a:defRPr sz="2200" kern="1200" spc="10" baseline="0">
-                <a:solidFill>
-                  <a:schemeClr val="tx1">
-                    <a:lumMod val="75000"/>
-                  </a:schemeClr>
-                </a:solidFill>
-                <a:latin typeface="+mn-lt"/>
-                <a:ea typeface="+mn-ea"/>
-                <a:cs typeface="+mn-cs"/>
-              </a:defRPr>
-            </a:lvl1pPr>
-            <a:lvl2pPr marL="457200" indent="0" algn="ctr" defTabSz="914400" rtl="0" eaLnBrk="1" latinLnBrk="0" hangingPunct="1">
-              <a:lnSpc>
-                <a:spcPct val="90000"/>
-              </a:lnSpc>
-              <a:spcBef>
-                <a:spcPts val="300"/>
-              </a:spcBef>
-              <a:spcAft>
-                <a:spcPts val="300"/>
-              </a:spcAft>
-              <a:buClr>
-                <a:schemeClr val="accent1"/>
-              </a:buClr>
-              <a:buFont typeface="Wingdings 2" pitchFamily="18" charset="2"/>
-              <a:buNone/>
-              <a:defRPr sz="2200" kern="1200">
-                <a:solidFill>
-                  <a:schemeClr val="tx1">
-                    <a:lumMod val="85000"/>
-                    <a:lumOff val="15000"/>
-                  </a:schemeClr>
-                </a:solidFill>
-                <a:latin typeface="+mn-lt"/>
-                <a:ea typeface="+mn-ea"/>
-                <a:cs typeface="+mn-cs"/>
-              </a:defRPr>
-            </a:lvl2pPr>
-            <a:lvl3pPr marL="914400" indent="0" algn="ctr" defTabSz="914400" rtl="0" eaLnBrk="1" latinLnBrk="0" hangingPunct="1">
-              <a:lnSpc>
-                <a:spcPct val="90000"/>
-              </a:lnSpc>
-              <a:spcBef>
-                <a:spcPts val="300"/>
-              </a:spcBef>
-              <a:spcAft>
-                <a:spcPts val="300"/>
-              </a:spcAft>
-              <a:buClr>
-                <a:schemeClr val="accent1"/>
-              </a:buClr>
-              <a:buFont typeface="Wingdings 2" pitchFamily="18" charset="2"/>
-              <a:buNone/>
-              <a:defRPr sz="2200" kern="1200">
-                <a:solidFill>
-                  <a:schemeClr val="tx1">
-                    <a:lumMod val="85000"/>
-                    <a:lumOff val="15000"/>
-                  </a:schemeClr>
-                </a:solidFill>
-                <a:latin typeface="+mn-lt"/>
-                <a:ea typeface="+mn-ea"/>
-                <a:cs typeface="+mn-cs"/>
-              </a:defRPr>
-            </a:lvl3pPr>
-            <a:lvl4pPr marL="1371600" indent="0" algn="ctr" defTabSz="914400" rtl="0" eaLnBrk="1" latinLnBrk="0" hangingPunct="1">
-              <a:lnSpc>
-                <a:spcPct val="90000"/>
-              </a:lnSpc>
-              <a:spcBef>
-                <a:spcPts val="300"/>
-              </a:spcBef>
-              <a:spcAft>
-                <a:spcPts val="300"/>
-              </a:spcAft>
-              <a:buClr>
-                <a:schemeClr val="accent1"/>
-              </a:buClr>
-              <a:buFont typeface="Wingdings 2" pitchFamily="18" charset="2"/>
-              <a:buNone/>
-              <a:defRPr sz="2000" kern="1200">
-                <a:solidFill>
-                  <a:schemeClr val="tx1">
-                    <a:lumMod val="85000"/>
-                    <a:lumOff val="15000"/>
-                  </a:schemeClr>
-                </a:solidFill>
-                <a:latin typeface="+mn-lt"/>
-                <a:ea typeface="+mn-ea"/>
-                <a:cs typeface="+mn-cs"/>
-              </a:defRPr>
-            </a:lvl4pPr>
-            <a:lvl5pPr marL="1828800" indent="0" algn="ctr" defTabSz="914400" rtl="0" eaLnBrk="1" latinLnBrk="0" hangingPunct="1">
-              <a:lnSpc>
-                <a:spcPct val="90000"/>
-              </a:lnSpc>
-              <a:spcBef>
-                <a:spcPts val="300"/>
-              </a:spcBef>
-              <a:spcAft>
-                <a:spcPts val="300"/>
-              </a:spcAft>
-              <a:buClr>
-                <a:schemeClr val="accent1"/>
-              </a:buClr>
-              <a:buFont typeface="Wingdings 2" pitchFamily="18" charset="2"/>
-              <a:buNone/>
-              <a:defRPr sz="2000" kern="1200">
-                <a:solidFill>
-                  <a:schemeClr val="tx1">
-                    <a:lumMod val="85000"/>
-                    <a:lumOff val="15000"/>
-                  </a:schemeClr>
-                </a:solidFill>
-                <a:latin typeface="+mn-lt"/>
-                <a:ea typeface="+mn-ea"/>
-                <a:cs typeface="+mn-cs"/>
-              </a:defRPr>
-            </a:lvl5pPr>
-            <a:lvl6pPr marL="2286000" indent="0" algn="ctr" defTabSz="914400" rtl="0" eaLnBrk="1" latinLnBrk="0" hangingPunct="1">
-              <a:lnSpc>
-                <a:spcPct val="90000"/>
-              </a:lnSpc>
-              <a:spcBef>
-                <a:spcPts val="300"/>
-              </a:spcBef>
-              <a:spcAft>
-                <a:spcPts val="300"/>
-              </a:spcAft>
-              <a:buClr>
-                <a:schemeClr val="accent1"/>
-              </a:buClr>
-              <a:buFont typeface="Wingdings 2" pitchFamily="18" charset="2"/>
-              <a:buNone/>
-              <a:defRPr sz="2000" kern="1200">
-                <a:solidFill>
-                  <a:schemeClr val="tx1">
-                    <a:lumMod val="85000"/>
-                    <a:lumOff val="15000"/>
-                  </a:schemeClr>
-                </a:solidFill>
-                <a:latin typeface="+mn-lt"/>
-                <a:ea typeface="+mn-ea"/>
-                <a:cs typeface="+mn-cs"/>
-              </a:defRPr>
-            </a:lvl6pPr>
-            <a:lvl7pPr marL="2743200" indent="0" algn="ctr" defTabSz="914400" rtl="0" eaLnBrk="1" latinLnBrk="0" hangingPunct="1">
-              <a:lnSpc>
-                <a:spcPct val="90000"/>
-              </a:lnSpc>
-              <a:spcBef>
-                <a:spcPts val="300"/>
-              </a:spcBef>
-              <a:spcAft>
-                <a:spcPts val="300"/>
-              </a:spcAft>
-              <a:buClr>
-                <a:schemeClr val="accent1"/>
-              </a:buClr>
-              <a:buFont typeface="Wingdings 2" pitchFamily="18" charset="2"/>
-              <a:buNone/>
-              <a:defRPr sz="2000" kern="1200">
-                <a:solidFill>
-                  <a:schemeClr val="tx1">
-                    <a:lumMod val="85000"/>
-                    <a:lumOff val="15000"/>
-                  </a:schemeClr>
-                </a:solidFill>
-                <a:latin typeface="+mn-lt"/>
-                <a:ea typeface="+mn-ea"/>
-                <a:cs typeface="+mn-cs"/>
-              </a:defRPr>
-            </a:lvl7pPr>
-            <a:lvl8pPr marL="3200400" indent="0" algn="ctr" defTabSz="914400" rtl="0" eaLnBrk="1" latinLnBrk="0" hangingPunct="1">
-              <a:lnSpc>
-                <a:spcPct val="90000"/>
-              </a:lnSpc>
-              <a:spcBef>
-                <a:spcPts val="300"/>
-              </a:spcBef>
-              <a:spcAft>
-                <a:spcPts val="300"/>
-              </a:spcAft>
-              <a:buClr>
-                <a:schemeClr val="accent1"/>
-              </a:buClr>
-              <a:buFont typeface="Wingdings 2" pitchFamily="18" charset="2"/>
-              <a:buNone/>
-              <a:defRPr sz="2000" kern="1200">
-                <a:solidFill>
-                  <a:schemeClr val="tx1">
-                    <a:lumMod val="85000"/>
-                    <a:lumOff val="15000"/>
-                  </a:schemeClr>
-                </a:solidFill>
-                <a:latin typeface="+mn-lt"/>
-                <a:ea typeface="+mn-ea"/>
-                <a:cs typeface="+mn-cs"/>
-              </a:defRPr>
-            </a:lvl8pPr>
-            <a:lvl9pPr marL="3657600" indent="0" algn="ctr" defTabSz="914400" rtl="0" eaLnBrk="1" latinLnBrk="0" hangingPunct="1">
-              <a:lnSpc>
-                <a:spcPct val="90000"/>
-              </a:lnSpc>
-              <a:spcBef>
-                <a:spcPts val="300"/>
-              </a:spcBef>
-              <a:spcAft>
-                <a:spcPts val="300"/>
-              </a:spcAft>
-              <a:buClr>
-                <a:schemeClr val="accent1"/>
-              </a:buClr>
-              <a:buFont typeface="Wingdings 2" pitchFamily="18" charset="2"/>
-              <a:buNone/>
-              <a:defRPr sz="2000" kern="1200">
-                <a:solidFill>
-                  <a:schemeClr val="tx1">
-                    <a:lumMod val="85000"/>
-                    <a:lumOff val="15000"/>
-                  </a:schemeClr>
-                </a:solidFill>
-                <a:latin typeface="+mn-lt"/>
-                <a:ea typeface="+mn-ea"/>
-                <a:cs typeface="+mn-cs"/>
-              </a:defRPr>
-            </a:lvl9pPr>
-          </a:lstStyle>
-          <a:p>
-            <a:pPr algn="just"/>
-            <a:r>
-              <a:rPr lang="en-US" b="1" dirty="0">
-                <a:solidFill>
-                  <a:schemeClr val="tx1"/>
-                </a:solidFill>
-              </a:rPr>
-              <a:t>Wrapper </a:t>
-            </a:r>
-            <a:r>
-              <a:rPr lang="en-US" b="1" dirty="0" smtClean="0">
-                <a:solidFill>
-                  <a:schemeClr val="tx1"/>
-                </a:solidFill>
-              </a:rPr>
-              <a:t>(</a:t>
-            </a:r>
-            <a:r>
-              <a:rPr lang="en-US" dirty="0"/>
-              <a:t>since it wraps one interface and makes it compatible with another</a:t>
-            </a:r>
-            <a:r>
-              <a:rPr lang="en-US" b="1" dirty="0" smtClean="0">
-                <a:solidFill>
-                  <a:schemeClr val="tx1"/>
-                </a:solidFill>
-              </a:rPr>
-              <a:t>).</a:t>
-            </a:r>
-            <a:endParaRPr lang="en-US" b="1" dirty="0">
-              <a:solidFill>
-                <a:schemeClr val="tx1"/>
-              </a:solidFill>
-            </a:endParaRPr>
+          <a:lstStyle/>
+          <a:p>
+            <a:pPr marL="342900" indent="-342900" algn="just">
+              <a:buFont typeface="+mj-lt"/>
+              <a:buAutoNum type="arabicPeriod"/>
+            </a:pPr>
+            <a:r>
+              <a:rPr lang="en-US" sz="2000" b="1" dirty="0"/>
+              <a:t>Identify Incompatibility: Have a service class with an incompatible interface that the client cannot use directly.</a:t>
+            </a:r>
+          </a:p>
+          <a:p>
+            <a:pPr marL="342900" indent="-342900" algn="just">
+              <a:buFont typeface="+mj-lt"/>
+              <a:buAutoNum type="arabicPeriod"/>
+            </a:pPr>
+            <a:endParaRPr lang="en-US" sz="2000" b="1" dirty="0"/>
+          </a:p>
+          <a:p>
+            <a:pPr marL="342900" indent="-342900" algn="just">
+              <a:buFont typeface="+mj-lt"/>
+              <a:buAutoNum type="arabicPeriod"/>
+            </a:pPr>
+            <a:r>
+              <a:rPr lang="en-US" sz="2000" b="1" dirty="0"/>
+              <a:t>Define Client Interface: Create an interface that represents how the client expects to interact with the service.</a:t>
+            </a:r>
+          </a:p>
+          <a:p>
+            <a:pPr marL="342900" indent="-342900" algn="just">
+              <a:buFont typeface="+mj-lt"/>
+              <a:buAutoNum type="arabicPeriod"/>
+            </a:pPr>
+            <a:endParaRPr lang="en-US" sz="2000" b="1" dirty="0"/>
+          </a:p>
+          <a:p>
+            <a:pPr marL="342900" indent="-342900" algn="just">
+              <a:buFont typeface="+mj-lt"/>
+              <a:buAutoNum type="arabicPeriod"/>
+            </a:pPr>
+            <a:r>
+              <a:rPr lang="en-US" sz="2000" b="1" dirty="0"/>
+              <a:t>Create Adapter Class: Implement the client interface in an adapter class, initially leaving methods unimplemented.</a:t>
+            </a:r>
+          </a:p>
+          <a:p>
+            <a:pPr marL="342900" indent="-342900" algn="just">
+              <a:buFont typeface="+mj-lt"/>
+              <a:buAutoNum type="arabicPeriod"/>
+            </a:pPr>
+            <a:endParaRPr lang="en-US" sz="2000" b="1" dirty="0"/>
+          </a:p>
+          <a:p>
+            <a:pPr marL="342900" indent="-342900" algn="just">
+              <a:buFont typeface="+mj-lt"/>
+              <a:buAutoNum type="arabicPeriod"/>
+            </a:pPr>
+            <a:r>
+              <a:rPr lang="en-US" sz="2000" b="1" dirty="0"/>
+              <a:t>Store Service Reference: Add a field in the adapter to hold a reference to the service class, typically set via the constructor.</a:t>
+            </a:r>
+          </a:p>
+          <a:p>
+            <a:pPr marL="342900" indent="-342900" algn="just">
+              <a:buFont typeface="+mj-lt"/>
+              <a:buAutoNum type="arabicPeriod"/>
+            </a:pPr>
+            <a:endParaRPr lang="en-US" sz="2000" b="1" dirty="0"/>
+          </a:p>
+          <a:p>
+            <a:pPr marL="342900" indent="-342900" algn="just">
+              <a:buFont typeface="+mj-lt"/>
+              <a:buAutoNum type="arabicPeriod"/>
+            </a:pPr>
+            <a:r>
+              <a:rPr lang="en-US" sz="2000" b="1" dirty="0"/>
+              <a:t>Implement Adaptation Logic: In the adapter, translate client interface calls into equivalent service calls, handling data or interface conversion as needed.</a:t>
+            </a:r>
+          </a:p>
+          <a:p>
+            <a:pPr marL="342900" indent="-342900" algn="just">
+              <a:buFont typeface="+mj-lt"/>
+              <a:buAutoNum type="arabicPeriod"/>
+            </a:pPr>
+            <a:endParaRPr lang="en-US" sz="2000" b="1" dirty="0"/>
+          </a:p>
+          <a:p>
+            <a:pPr marL="342900" indent="-342900" algn="just">
+              <a:buFont typeface="+mj-lt"/>
+              <a:buAutoNum type="arabicPeriod"/>
+            </a:pPr>
+            <a:r>
+              <a:rPr lang="en-US" sz="2000" b="1" dirty="0"/>
+              <a:t>Client Uses Adapter: The client interacts only with the adapter via the client interface, ensuring flexibility and decoupling from the actual service class.</a:t>
+            </a:r>
+          </a:p>
+          <a:p>
+            <a:pPr marL="342900" indent="-342900" algn="just">
+              <a:buFont typeface="+mj-lt"/>
+              <a:buAutoNum type="arabicPeriod"/>
+            </a:pPr>
+            <a:endParaRPr lang="en-IN" sz="2000" b="1" dirty="0"/>
           </a:p>
         </p:txBody>
       </p:sp>
     </p:spTree>
     <p:extLst>
       <p:ext uri="{BB962C8B-B14F-4D97-AF65-F5344CB8AC3E}">
-        <p14:creationId xmlns:p14="http://schemas.microsoft.com/office/powerpoint/2010/main" val="309431840"/>
+        <p14:creationId xmlns:p14="http://schemas.microsoft.com/office/powerpoint/2010/main" val="3376716967"/>
       </p:ext>
     </p:extLst>
   </p:cSld>
@@ -5137,8 +4694,8 @@
         </p:nvSpPr>
         <p:spPr>
           <a:xfrm>
-            <a:off x="522511" y="189443"/>
-            <a:ext cx="3518266" cy="709214"/>
+            <a:off x="592181" y="0"/>
+            <a:ext cx="4101740" cy="966652"/>
           </a:xfrm>
         </p:spPr>
         <p:txBody>
@@ -5148,10 +4705,10 @@
           <a:lstStyle/>
           <a:p>
             <a:r>
-              <a:rPr lang="en-IN" sz="5300" u="sng" dirty="0" smtClean="0"/>
-              <a:t>Advantages</a:t>
-            </a:r>
-            <a:endParaRPr lang="en-IN" sz="4800" u="sng" dirty="0"/>
+              <a:rPr lang="en-IN" sz="5300" u="sng" dirty="0"/>
+              <a:t>Collaboration</a:t>
+            </a:r>
+            <a:endParaRPr lang="en-IN" sz="6000" u="sng" dirty="0"/>
           </a:p>
         </p:txBody>
       </p:sp>
@@ -5167,8 +4724,8 @@
         </p:nvSpPr>
         <p:spPr>
           <a:xfrm>
-            <a:off x="618306" y="1299251"/>
-            <a:ext cx="11051180" cy="2211974"/>
+            <a:off x="984065" y="1383300"/>
+            <a:ext cx="10624457" cy="2378512"/>
           </a:xfrm>
         </p:spPr>
         <p:txBody>
@@ -5186,12 +4743,20 @@
               <a:buChar char="•"/>
             </a:pPr>
             <a:r>
+              <a:rPr lang="en-US" b="1" dirty="0" smtClean="0">
+                <a:solidFill>
+                  <a:schemeClr val="tx1"/>
+                </a:solidFill>
+              </a:rPr>
+              <a:t>Client </a:t>
+            </a:r>
+            <a:r>
               <a:rPr lang="en-US" b="1" dirty="0">
                 <a:solidFill>
                   <a:schemeClr val="tx1"/>
                 </a:solidFill>
               </a:rPr>
-              <a:t>Allows reuse of existing code with different interfaces</a:t>
+              <a:t>calls Adapter </a:t>
             </a:r>
             <a:r>
               <a:rPr lang="en-US" b="1" dirty="0" smtClean="0">
@@ -5199,7 +4764,15 @@
                   <a:schemeClr val="tx1"/>
                 </a:solidFill>
               </a:rPr>
-              <a:t>.</a:t>
+              <a:t>using </a:t>
+            </a:r>
+            <a:r>
+              <a:rPr lang="en-US" b="1" dirty="0">
+                <a:solidFill>
+                  <a:schemeClr val="tx1"/>
+                </a:solidFill>
+              </a:rPr>
+              <a:t>Target Interface.</a:t>
             </a:r>
           </a:p>
           <a:p>
@@ -5217,7 +4790,7 @@
                   <a:schemeClr val="tx1"/>
                 </a:solidFill>
               </a:rPr>
-              <a:t>Improves code flexibility by enabling communication between incompatible components</a:t>
+              <a:t>Adapter class translates this request and delegates it to adaptee using one/multiple method calls using Adaptee </a:t>
             </a:r>
             <a:r>
               <a:rPr lang="en-US" b="1" dirty="0" smtClean="0">
@@ -5225,7 +4798,7 @@
                   <a:schemeClr val="tx1"/>
                 </a:solidFill>
               </a:rPr>
-              <a:t>.</a:t>
+              <a:t>Interface.</a:t>
             </a:r>
           </a:p>
           <a:p>
@@ -5243,9 +4816,17 @@
                   <a:schemeClr val="tx1"/>
                 </a:solidFill>
               </a:rPr>
-              <a:t>Supports open/closed principle (allows adding new adapters without modifying existing code).</a:t>
-            </a:r>
-            <a:endParaRPr lang="en-IN" b="1" dirty="0">
+              <a:t>Adaptee returns response to Adapter class as defined in Adaptee Interface and then Adapter transforms this response before returning it to Client as defined in Target Interface</a:t>
+            </a:r>
+            <a:r>
+              <a:rPr lang="en-US" b="1" dirty="0" smtClean="0">
+                <a:solidFill>
+                  <a:schemeClr val="tx1"/>
+                </a:solidFill>
+              </a:rPr>
+              <a:t>.</a:t>
+            </a:r>
+            <a:endParaRPr lang="en-US" b="1" dirty="0">
               <a:solidFill>
                 <a:schemeClr val="tx1"/>
               </a:solidFill>
@@ -5255,7 +4836,7 @@
       </p:sp>
       <p:sp>
         <p:nvSpPr>
-          <p:cNvPr id="6" name="Title 1"/>
+          <p:cNvPr id="4" name="Title 1"/>
           <p:cNvSpPr txBox="1">
             <a:spLocks/>
           </p:cNvSpPr>
@@ -5263,8 +4844,8 @@
         </p:nvSpPr>
         <p:spPr>
           <a:xfrm>
-            <a:off x="522510" y="3831771"/>
-            <a:ext cx="4362999" cy="709214"/>
+            <a:off x="592181" y="4178460"/>
+            <a:ext cx="4763592" cy="966652"/>
           </a:xfrm>
           <a:prstGeom prst="rect">
             <a:avLst/>
@@ -5272,7 +4853,7 @@
         </p:spPr>
         <p:txBody>
           <a:bodyPr vert="horz" lIns="91440" tIns="45720" rIns="91440" bIns="45720" rtlCol="0" anchor="b">
-            <a:normAutofit fontScale="90000" lnSpcReduction="10000"/>
+            <a:normAutofit/>
           </a:bodyPr>
           <a:lstStyle>
             <a:lvl1pPr algn="l" defTabSz="914400" rtl="0" eaLnBrk="1" latinLnBrk="0" hangingPunct="1">
@@ -5295,16 +4876,16 @@
           </a:lstStyle>
           <a:p>
             <a:r>
-              <a:rPr lang="en-IN" sz="5300" u="sng" dirty="0" smtClean="0"/>
-              <a:t>Disadvantages</a:t>
-            </a:r>
-            <a:endParaRPr lang="en-IN" sz="4800" u="sng" dirty="0"/>
-          </a:p>
-        </p:txBody>
-      </p:sp>
-      <p:sp>
-        <p:nvSpPr>
-          <p:cNvPr id="7" name="Subtitle 2"/>
+              <a:rPr lang="en-IN" sz="4800" u="sng" dirty="0"/>
+              <a:t>Also Known As</a:t>
+            </a:r>
+            <a:endParaRPr lang="en-IN" sz="6000" u="sng" dirty="0"/>
+          </a:p>
+        </p:txBody>
+      </p:sp>
+      <p:sp>
+        <p:nvSpPr>
+          <p:cNvPr id="10" name="Subtitle 2"/>
           <p:cNvSpPr txBox="1">
             <a:spLocks/>
           </p:cNvSpPr>
@@ -5312,8 +4893,8 @@
         </p:nvSpPr>
         <p:spPr>
           <a:xfrm>
-            <a:off x="618306" y="4958161"/>
-            <a:ext cx="11051180" cy="1632854"/>
+            <a:off x="984066" y="5601761"/>
+            <a:ext cx="10624457" cy="520365"/>
           </a:xfrm>
           <a:prstGeom prst="rect">
             <a:avLst/>
@@ -5569,71 +5150,47 @@
             </a:lvl9pPr>
           </a:lstStyle>
           <a:p>
-            <a:pPr marL="342900" indent="-342900" algn="just">
-              <a:buClr>
+            <a:pPr algn="just"/>
+            <a:r>
+              <a:rPr lang="en-US" b="1" dirty="0">
+                <a:solidFill>
+                  <a:schemeClr val="tx1"/>
+                </a:solidFill>
+              </a:rPr>
+              <a:t>Wrapper </a:t>
+            </a:r>
+            <a:r>
+              <a:rPr lang="en-US" b="1" dirty="0" smtClean="0">
+                <a:solidFill>
+                  <a:schemeClr val="tx1"/>
+                </a:solidFill>
+              </a:rPr>
+              <a:t>(</a:t>
+            </a:r>
+            <a:r>
+              <a:rPr lang="en-US" dirty="0"/>
+              <a:t>since it wraps one interface and makes it compatible with another</a:t>
+            </a:r>
+            <a:r>
+              <a:rPr lang="en-US" b="1" dirty="0" smtClean="0">
+                <a:solidFill>
+                  <a:schemeClr val="tx1"/>
+                </a:solidFill>
+              </a:rPr>
+              <a:t>).</a:t>
+            </a:r>
+            <a:endParaRPr lang="en-US" b="1" dirty="0">
+              <a:solidFill>
                 <a:schemeClr val="tx1"/>
-              </a:buClr>
-              <a:buSzPct val="119000"/>
-              <a:buFont typeface="Arial" pitchFamily="34" charset="0"/>
-              <a:buChar char="•"/>
-            </a:pPr>
-            <a:r>
-              <a:rPr lang="en-US" b="1" dirty="0">
-                <a:solidFill>
-                  <a:schemeClr val="tx1"/>
-                </a:solidFill>
-              </a:rPr>
-              <a:t>Introduces extra layers of abstraction, which can make debugging </a:t>
-            </a:r>
-            <a:r>
-              <a:rPr lang="en-US" b="1" dirty="0" smtClean="0">
-                <a:solidFill>
-                  <a:schemeClr val="tx1"/>
-                </a:solidFill>
-              </a:rPr>
-              <a:t>harder.</a:t>
-            </a:r>
-          </a:p>
-          <a:p>
-            <a:pPr marL="342900" indent="-342900" algn="just">
-              <a:buClr>
-                <a:schemeClr val="tx1"/>
-              </a:buClr>
-              <a:buSzPct val="119000"/>
-              <a:buFont typeface="Arial" pitchFamily="34" charset="0"/>
-              <a:buChar char="•"/>
-            </a:pPr>
-            <a:r>
-              <a:rPr lang="en-US" b="1" dirty="0" smtClean="0">
-                <a:solidFill>
-                  <a:schemeClr val="tx1"/>
-                </a:solidFill>
-              </a:rPr>
-              <a:t>If </a:t>
-            </a:r>
-            <a:r>
-              <a:rPr lang="en-US" b="1" dirty="0">
-                <a:solidFill>
-                  <a:schemeClr val="tx1"/>
-                </a:solidFill>
-              </a:rPr>
-              <a:t>overused, it might lead to unnecessary complexity in the code structure</a:t>
-            </a:r>
-            <a:r>
-              <a:rPr lang="en-US" b="1" dirty="0" smtClean="0">
-                <a:solidFill>
-                  <a:schemeClr val="tx1"/>
-                </a:solidFill>
-              </a:rPr>
-              <a:t>.</a:t>
-            </a:r>
+              </a:solidFill>
+            </a:endParaRPr>
           </a:p>
         </p:txBody>
       </p:sp>
     </p:spTree>
     <p:extLst>
       <p:ext uri="{BB962C8B-B14F-4D97-AF65-F5344CB8AC3E}">
-        <p14:creationId xmlns:p14="http://schemas.microsoft.com/office/powerpoint/2010/main" val="626287550"/>
+        <p14:creationId xmlns:p14="http://schemas.microsoft.com/office/powerpoint/2010/main" val="309431840"/>
       </p:ext>
     </p:extLst>
   </p:cSld>
@@ -5679,21 +5236,21 @@
         </p:nvSpPr>
         <p:spPr>
           <a:xfrm>
-            <a:off x="522513" y="-42219"/>
-            <a:ext cx="4101740" cy="726631"/>
+            <a:off x="522511" y="189443"/>
+            <a:ext cx="3518266" cy="709214"/>
           </a:xfrm>
         </p:spPr>
         <p:txBody>
           <a:bodyPr>
-            <a:normAutofit/>
+            <a:normAutofit fontScale="90000"/>
           </a:bodyPr>
           <a:lstStyle/>
           <a:p>
             <a:r>
-              <a:rPr lang="en-IN" sz="4000" u="sng" dirty="0" smtClean="0"/>
-              <a:t>Applicability</a:t>
-            </a:r>
-            <a:endParaRPr lang="en-IN" sz="4400" u="sng" dirty="0"/>
+              <a:rPr lang="en-IN" sz="5300" u="sng" dirty="0" smtClean="0"/>
+              <a:t>Advantages</a:t>
+            </a:r>
+            <a:endParaRPr lang="en-IN" sz="4800" u="sng" dirty="0"/>
           </a:p>
         </p:txBody>
       </p:sp>
@@ -5709,13 +5266,13 @@
         </p:nvSpPr>
         <p:spPr>
           <a:xfrm>
-            <a:off x="1088568" y="915625"/>
-            <a:ext cx="10624457" cy="2872604"/>
+            <a:off x="618306" y="1299251"/>
+            <a:ext cx="11051180" cy="2211974"/>
           </a:xfrm>
         </p:spPr>
         <p:txBody>
           <a:bodyPr>
-            <a:normAutofit/>
+            <a:noAutofit/>
           </a:bodyPr>
           <a:lstStyle/>
           <a:p>
@@ -5733,7 +5290,7 @@
                   <a:schemeClr val="tx1"/>
                 </a:solidFill>
               </a:rPr>
-              <a:t>Use the Adapter class when you want to use some existing class, but its interface isn’t compatible with the rest of your </a:t>
+              <a:t>Allows reuse of existing code with different interfaces</a:t>
             </a:r>
             <a:r>
               <a:rPr lang="en-US" b="1" dirty="0" smtClean="0">
@@ -5741,7 +5298,7 @@
                   <a:schemeClr val="tx1"/>
                 </a:solidFill>
               </a:rPr>
-              <a:t>code.</a:t>
+              <a:t>.</a:t>
             </a:r>
           </a:p>
           <a:p>
@@ -5754,20 +5311,12 @@
               <a:buChar char="•"/>
             </a:pPr>
             <a:r>
-              <a:rPr lang="en-US" b="1" dirty="0" smtClean="0">
+              <a:rPr lang="en-US" b="1" dirty="0">
                 <a:solidFill>
                   <a:schemeClr val="tx1"/>
                 </a:solidFill>
               </a:rPr>
-              <a:t>When </a:t>
-            </a:r>
-            <a:r>
-              <a:rPr lang="en-US" b="1" dirty="0">
-                <a:solidFill>
-                  <a:schemeClr val="tx1"/>
-                </a:solidFill>
-              </a:rPr>
-              <a:t>a new system wants to interact with legacy(old) system using new interface which is not compatible with interface of legacy system</a:t>
+              <a:t>Improves code flexibility by enabling communication between incompatible components</a:t>
             </a:r>
             <a:r>
               <a:rPr lang="en-US" b="1" dirty="0" smtClean="0">
@@ -5793,19 +5342,9 @@
                   <a:schemeClr val="tx1"/>
                 </a:solidFill>
               </a:rPr>
-              <a:t>When you want to use a 3rd party framework or library whose interface is incompatible with your system.</a:t>
-            </a:r>
-          </a:p>
-          <a:p>
-            <a:pPr marL="342900" indent="-342900" algn="just">
-              <a:buClr>
-                <a:schemeClr val="tx1"/>
-              </a:buClr>
-              <a:buSzPct val="119000"/>
-              <a:buFont typeface="Arial" panose="020B0604020202020204" pitchFamily="34" charset="0"/>
-              <a:buChar char="•"/>
-            </a:pPr>
-            <a:endParaRPr lang="en-US" b="1" dirty="0">
+              <a:t>Supports open/closed principle (allows adding new adapters without modifying existing code).</a:t>
+            </a:r>
+            <a:endParaRPr lang="en-IN" b="1" dirty="0">
               <a:solidFill>
                 <a:schemeClr val="tx1"/>
               </a:solidFill>
@@ -5815,7 +5354,7 @@
       </p:sp>
       <p:sp>
         <p:nvSpPr>
-          <p:cNvPr id="4" name="Title 1"/>
+          <p:cNvPr id="6" name="Title 1"/>
           <p:cNvSpPr txBox="1">
             <a:spLocks/>
           </p:cNvSpPr>
@@ -5823,8 +5362,8 @@
         </p:nvSpPr>
         <p:spPr>
           <a:xfrm>
-            <a:off x="522513" y="3788229"/>
-            <a:ext cx="4998722" cy="706469"/>
+            <a:off x="522510" y="3831771"/>
+            <a:ext cx="4362999" cy="709214"/>
           </a:xfrm>
           <a:prstGeom prst="rect">
             <a:avLst/>
@@ -5832,7 +5371,7 @@
         </p:spPr>
         <p:txBody>
           <a:bodyPr vert="horz" lIns="91440" tIns="45720" rIns="91440" bIns="45720" rtlCol="0" anchor="b">
-            <a:normAutofit/>
+            <a:normAutofit fontScale="90000" lnSpcReduction="10000"/>
           </a:bodyPr>
           <a:lstStyle>
             <a:lvl1pPr algn="l" defTabSz="914400" rtl="0" eaLnBrk="1" latinLnBrk="0" hangingPunct="1">
@@ -5855,8 +5394,8 @@
           </a:lstStyle>
           <a:p>
             <a:r>
-              <a:rPr lang="en-IN" sz="3600" u="sng" dirty="0" smtClean="0"/>
-              <a:t>When to not use it</a:t>
+              <a:rPr lang="en-IN" sz="5300" u="sng" dirty="0" smtClean="0"/>
+              <a:t>Disadvantages</a:t>
             </a:r>
             <a:endParaRPr lang="en-IN" sz="4800" u="sng" dirty="0"/>
           </a:p>
@@ -5864,7 +5403,7 @@
       </p:sp>
       <p:sp>
         <p:nvSpPr>
-          <p:cNvPr id="6" name="Subtitle 2"/>
+          <p:cNvPr id="7" name="Subtitle 2"/>
           <p:cNvSpPr txBox="1">
             <a:spLocks/>
           </p:cNvSpPr>
@@ -5872,8 +5411,8 @@
         </p:nvSpPr>
         <p:spPr>
           <a:xfrm>
-            <a:off x="1088568" y="4789019"/>
-            <a:ext cx="10624457" cy="1838203"/>
+            <a:off x="618306" y="4958161"/>
+            <a:ext cx="11051180" cy="1632854"/>
           </a:xfrm>
           <a:prstGeom prst="rect">
             <a:avLst/>
@@ -5881,7 +5420,7 @@
         </p:spPr>
         <p:txBody>
           <a:bodyPr vert="horz" lIns="91440" tIns="45720" rIns="91440" bIns="45720" rtlCol="0">
-            <a:normAutofit/>
+            <a:noAutofit/>
           </a:bodyPr>
           <a:lstStyle>
             <a:lvl1pPr marL="0" indent="0" algn="l" defTabSz="914400" rtl="0" eaLnBrk="1" latinLnBrk="0" hangingPunct="1">
@@ -6138,20 +5677,20 @@
               <a:buChar char="•"/>
             </a:pPr>
             <a:r>
-              <a:rPr lang="en-US" sz="2000" b="1" dirty="0">
+              <a:rPr lang="en-US" b="1" dirty="0">
                 <a:solidFill>
                   <a:schemeClr val="tx1"/>
                 </a:solidFill>
               </a:rPr>
-              <a:t>You can modify the original code to match the required interface. Instead of adding an adapter, refactoring might be a cleaner solution</a:t>
-            </a:r>
-            <a:r>
-              <a:rPr lang="en-US" sz="2000" b="1" dirty="0" smtClean="0">
+              <a:t>Introduces extra layers of abstraction, which can make debugging </a:t>
+            </a:r>
+            <a:r>
+              <a:rPr lang="en-US" b="1" dirty="0" smtClean="0">
                 <a:solidFill>
                   <a:schemeClr val="tx1"/>
                 </a:solidFill>
               </a:rPr>
-              <a:t>.</a:t>
+              <a:t>harder.</a:t>
             </a:r>
           </a:p>
           <a:p>
@@ -6164,25 +5703,36 @@
               <a:buChar char="•"/>
             </a:pPr>
             <a:r>
-              <a:rPr lang="en-US" sz="2000" b="1" dirty="0">
+              <a:rPr lang="en-US" b="1" dirty="0" smtClean="0">
                 <a:solidFill>
                   <a:schemeClr val="tx1"/>
                 </a:solidFill>
               </a:rPr>
-              <a:t>A simple method override or extension is enough. If you can just extend a class and override a method to achieve the same result, an adapter is overkill.</a:t>
-            </a:r>
-            <a:endParaRPr lang="en-US" sz="2000" b="1" dirty="0" smtClean="0">
-              <a:solidFill>
-                <a:schemeClr val="tx1"/>
-              </a:solidFill>
-            </a:endParaRPr>
+              <a:t>If </a:t>
+            </a:r>
+            <a:r>
+              <a:rPr lang="en-US" b="1" dirty="0">
+                <a:solidFill>
+                  <a:schemeClr val="tx1"/>
+                </a:solidFill>
+              </a:rPr>
+              <a:t>overused, it might lead to unnecessary complexity in the code structure</a:t>
+            </a:r>
+            <a:r>
+              <a:rPr lang="en-US" b="1" dirty="0" smtClean="0">
+                <a:solidFill>
+                  <a:schemeClr val="tx1"/>
+                </a:solidFill>
+              </a:rPr>
+              <a:t>.</a:t>
+            </a:r>
           </a:p>
         </p:txBody>
       </p:sp>
     </p:spTree>
     <p:extLst>
       <p:ext uri="{BB962C8B-B14F-4D97-AF65-F5344CB8AC3E}">
-        <p14:creationId xmlns:p14="http://schemas.microsoft.com/office/powerpoint/2010/main" val="334093667"/>
+        <p14:creationId xmlns:p14="http://schemas.microsoft.com/office/powerpoint/2010/main" val="626287550"/>
       </p:ext>
     </p:extLst>
   </p:cSld>
@@ -6228,38 +5778,8 @@
         </p:nvSpPr>
         <p:spPr>
           <a:xfrm>
-            <a:off x="522513" y="185484"/>
+            <a:off x="522513" y="-42219"/>
             <a:ext cx="4101740" cy="726631"/>
-          </a:xfrm>
-        </p:spPr>
-        <p:txBody>
-          <a:bodyPr>
-            <a:normAutofit fontScale="90000"/>
-          </a:bodyPr>
-          <a:lstStyle/>
-          <a:p>
-            <a:r>
-              <a:rPr lang="en-US" sz="4400" u="sng" dirty="0" smtClean="0"/>
-              <a:t>Related Patterns</a:t>
-            </a:r>
-            <a:endParaRPr lang="en-IN" sz="4800" u="sng" dirty="0"/>
-          </a:p>
-        </p:txBody>
-      </p:sp>
-      <p:sp>
-        <p:nvSpPr>
-          <p:cNvPr id="3" name="Subtitle 2"/>
-          <p:cNvSpPr>
-            <a:spLocks noGrp="1"/>
-          </p:cNvSpPr>
-          <p:nvPr>
-            <p:ph type="subTitle" idx="1"/>
-          </p:nvPr>
-        </p:nvSpPr>
-        <p:spPr>
-          <a:xfrm>
-            <a:off x="1088569" y="1205699"/>
-            <a:ext cx="10624457" cy="2272325"/>
           </a:xfrm>
         </p:spPr>
         <p:txBody>
@@ -6268,6 +5788,36 @@
           </a:bodyPr>
           <a:lstStyle/>
           <a:p>
+            <a:r>
+              <a:rPr lang="en-IN" sz="4000" u="sng" dirty="0" smtClean="0"/>
+              <a:t>Applicability</a:t>
+            </a:r>
+            <a:endParaRPr lang="en-IN" sz="4400" u="sng" dirty="0"/>
+          </a:p>
+        </p:txBody>
+      </p:sp>
+      <p:sp>
+        <p:nvSpPr>
+          <p:cNvPr id="3" name="Subtitle 2"/>
+          <p:cNvSpPr>
+            <a:spLocks noGrp="1"/>
+          </p:cNvSpPr>
+          <p:nvPr>
+            <p:ph type="subTitle" idx="1"/>
+          </p:nvPr>
+        </p:nvSpPr>
+        <p:spPr>
+          <a:xfrm>
+            <a:off x="1088568" y="915625"/>
+            <a:ext cx="10624457" cy="2872604"/>
+          </a:xfrm>
+        </p:spPr>
+        <p:txBody>
+          <a:bodyPr>
+            <a:normAutofit/>
+          </a:bodyPr>
+          <a:lstStyle/>
+          <a:p>
             <a:pPr marL="342900" indent="-342900" algn="just">
               <a:buClr>
                 <a:schemeClr val="tx1"/>
@@ -6277,20 +5827,20 @@
               <a:buChar char="•"/>
             </a:pPr>
             <a:r>
+              <a:rPr lang="en-US" b="1" dirty="0">
+                <a:solidFill>
+                  <a:schemeClr val="tx1"/>
+                </a:solidFill>
+              </a:rPr>
+              <a:t>Use the Adapter class when you want to use some existing class, but its interface isn’t compatible with the rest of your </a:t>
+            </a:r>
+            <a:r>
               <a:rPr lang="en-US" b="1" dirty="0" smtClean="0">
                 <a:solidFill>
                   <a:schemeClr val="tx1"/>
                 </a:solidFill>
               </a:rPr>
-              <a:t>Facade </a:t>
-            </a:r>
-            <a:r>
-              <a:rPr lang="en-US" b="1" dirty="0">
-                <a:solidFill>
-                  <a:schemeClr val="tx1"/>
-                </a:solidFill>
-              </a:rPr>
-              <a:t>Pattern (Provides a simplified interface, often using adapters internally).</a:t>
+              <a:t>code.</a:t>
             </a:r>
           </a:p>
           <a:p>
@@ -6303,12 +5853,20 @@
               <a:buChar char="•"/>
             </a:pPr>
             <a:r>
+              <a:rPr lang="en-US" b="1" dirty="0" smtClean="0">
+                <a:solidFill>
+                  <a:schemeClr val="tx1"/>
+                </a:solidFill>
+              </a:rPr>
+              <a:t>When </a:t>
+            </a:r>
+            <a:r>
               <a:rPr lang="en-US" b="1" dirty="0">
                 <a:solidFill>
                   <a:schemeClr val="tx1"/>
                 </a:solidFill>
               </a:rPr>
-              <a:t>Decorator Pattern (adds behavior dynamically without modifying the object</a:t>
+              <a:t>a new system wants to interact with legacy(old) system using new interface which is not compatible with interface of legacy system</a:t>
             </a:r>
             <a:r>
               <a:rPr lang="en-US" b="1" dirty="0" smtClean="0">
@@ -6316,7 +5874,7 @@
                   <a:schemeClr val="tx1"/>
                 </a:solidFill>
               </a:rPr>
-              <a:t>).</a:t>
+              <a:t>.</a:t>
             </a:r>
           </a:p>
           <a:p>
@@ -6334,14 +5892,29 @@
                   <a:schemeClr val="tx1"/>
                 </a:solidFill>
               </a:rPr>
-              <a:t>Proxy Pattern (controls access to another object).</a:t>
-            </a:r>
-          </a:p>
-        </p:txBody>
-      </p:sp>
-      <p:sp>
-        <p:nvSpPr>
-          <p:cNvPr id="9" name="Title 1"/>
+              <a:t>When you want to use a 3rd party framework or library whose interface is incompatible with your system.</a:t>
+            </a:r>
+          </a:p>
+          <a:p>
+            <a:pPr marL="342900" indent="-342900" algn="just">
+              <a:buClr>
+                <a:schemeClr val="tx1"/>
+              </a:buClr>
+              <a:buSzPct val="119000"/>
+              <a:buFont typeface="Arial" panose="020B0604020202020204" pitchFamily="34" charset="0"/>
+              <a:buChar char="•"/>
+            </a:pPr>
+            <a:endParaRPr lang="en-US" b="1" dirty="0">
+              <a:solidFill>
+                <a:schemeClr val="tx1"/>
+              </a:solidFill>
+            </a:endParaRPr>
+          </a:p>
+        </p:txBody>
+      </p:sp>
+      <p:sp>
+        <p:nvSpPr>
+          <p:cNvPr id="4" name="Title 1"/>
           <p:cNvSpPr txBox="1">
             <a:spLocks/>
           </p:cNvSpPr>
@@ -6349,8 +5922,8 @@
         </p:nvSpPr>
         <p:spPr>
           <a:xfrm>
-            <a:off x="522513" y="3771608"/>
-            <a:ext cx="4101740" cy="726631"/>
+            <a:off x="522513" y="3788229"/>
+            <a:ext cx="4998722" cy="706469"/>
           </a:xfrm>
           <a:prstGeom prst="rect">
             <a:avLst/>
@@ -6358,7 +5931,7 @@
         </p:spPr>
         <p:txBody>
           <a:bodyPr vert="horz" lIns="91440" tIns="45720" rIns="91440" bIns="45720" rtlCol="0" anchor="b">
-            <a:normAutofit fontScale="90000"/>
+            <a:normAutofit/>
           </a:bodyPr>
           <a:lstStyle>
             <a:lvl1pPr algn="l" defTabSz="914400" rtl="0" eaLnBrk="1" latinLnBrk="0" hangingPunct="1">
@@ -6381,8 +5954,8 @@
           </a:lstStyle>
           <a:p>
             <a:r>
-              <a:rPr lang="en-US" sz="4400" u="sng" dirty="0" smtClean="0"/>
-              <a:t>Design Principle</a:t>
+              <a:rPr lang="en-IN" sz="3600" u="sng" dirty="0" smtClean="0"/>
+              <a:t>When to not use it</a:t>
             </a:r>
             <a:endParaRPr lang="en-IN" sz="4800" u="sng" dirty="0"/>
           </a:p>
@@ -6390,7 +5963,7 @@
       </p:sp>
       <p:sp>
         <p:nvSpPr>
-          <p:cNvPr id="10" name="Subtitle 2"/>
+          <p:cNvPr id="6" name="Subtitle 2"/>
           <p:cNvSpPr txBox="1">
             <a:spLocks/>
           </p:cNvSpPr>
@@ -6398,8 +5971,8 @@
         </p:nvSpPr>
         <p:spPr>
           <a:xfrm>
-            <a:off x="1088569" y="4793932"/>
-            <a:ext cx="10624457" cy="1815125"/>
+            <a:off x="1088568" y="4789019"/>
+            <a:ext cx="10624457" cy="1838203"/>
           </a:xfrm>
           <a:prstGeom prst="rect">
             <a:avLst/>
@@ -6407,7 +5980,7 @@
         </p:spPr>
         <p:txBody>
           <a:bodyPr vert="horz" lIns="91440" tIns="45720" rIns="91440" bIns="45720" rtlCol="0">
-            <a:normAutofit lnSpcReduction="10000"/>
+            <a:normAutofit/>
           </a:bodyPr>
           <a:lstStyle>
             <a:lvl1pPr marL="0" indent="0" algn="l" defTabSz="914400" rtl="0" eaLnBrk="1" latinLnBrk="0" hangingPunct="1">
@@ -6664,15 +6237,15 @@
               <a:buChar char="•"/>
             </a:pPr>
             <a:r>
-              <a:rPr lang="en-US" b="1" dirty="0">
+              <a:rPr lang="en-US" sz="2000" b="1" dirty="0">
                 <a:solidFill>
                   <a:schemeClr val="tx1"/>
                 </a:solidFill>
               </a:rPr>
-              <a:t>Single Responsibility Principle (SRP): The Adapter class has one responsibility: adapting the interface</a:t>
-            </a:r>
-            <a:r>
-              <a:rPr lang="en-US" b="1" dirty="0" smtClean="0">
+              <a:t>You can modify the original code to match the required interface. Instead of adding an adapter, refactoring might be a cleaner solution</a:t>
+            </a:r>
+            <a:r>
+              <a:rPr lang="en-US" sz="2000" b="1" dirty="0" smtClean="0">
                 <a:solidFill>
                   <a:schemeClr val="tx1"/>
                 </a:solidFill>
@@ -6690,20 +6263,25 @@
               <a:buChar char="•"/>
             </a:pPr>
             <a:r>
-              <a:rPr lang="en-US" b="1" dirty="0">
+              <a:rPr lang="en-US" sz="2000" b="1" dirty="0">
                 <a:solidFill>
                   <a:schemeClr val="tx1"/>
                 </a:solidFill>
               </a:rPr>
-              <a:t>Open/Closed Principle (OCP): The Adapter pattern allows you to extend functionality by adding new adapters without modifying existing code.</a:t>
-            </a:r>
+              <a:t>A simple method override or extension is enough. If you can just extend a class and override a method to achieve the same result, an adapter is overkill.</a:t>
+            </a:r>
+            <a:endParaRPr lang="en-US" sz="2000" b="1" dirty="0" smtClean="0">
+              <a:solidFill>
+                <a:schemeClr val="tx1"/>
+              </a:solidFill>
+            </a:endParaRPr>
           </a:p>
         </p:txBody>
       </p:sp>
     </p:spTree>
     <p:extLst>
       <p:ext uri="{BB962C8B-B14F-4D97-AF65-F5344CB8AC3E}">
-        <p14:creationId xmlns:p14="http://schemas.microsoft.com/office/powerpoint/2010/main" val="2919009059"/>
+        <p14:creationId xmlns:p14="http://schemas.microsoft.com/office/powerpoint/2010/main" val="334093667"/>
       </p:ext>
     </p:extLst>
   </p:cSld>
@@ -6749,27 +6327,27 @@
         </p:nvSpPr>
         <p:spPr>
           <a:xfrm>
-            <a:off x="679268" y="478972"/>
-            <a:ext cx="9614263" cy="726631"/>
+            <a:off x="522513" y="185484"/>
+            <a:ext cx="4101740" cy="726631"/>
           </a:xfrm>
         </p:spPr>
         <p:txBody>
           <a:bodyPr>
-            <a:noAutofit/>
+            <a:normAutofit fontScale="90000"/>
           </a:bodyPr>
           <a:lstStyle/>
           <a:p>
             <a:r>
-              <a:rPr lang="fr-FR" sz="4000" u="sng" dirty="0"/>
-              <a:t>Important Points About Adapter Pattern</a:t>
-            </a:r>
-            <a:endParaRPr lang="en-IN" sz="2400" u="sng" dirty="0"/>
-          </a:p>
-        </p:txBody>
-      </p:sp>
-      <p:sp>
-        <p:nvSpPr>
-          <p:cNvPr id="4" name="Subtitle 3"/>
+              <a:rPr lang="en-US" sz="4400" u="sng" dirty="0" smtClean="0"/>
+              <a:t>Related Patterns</a:t>
+            </a:r>
+            <a:endParaRPr lang="en-IN" sz="4800" u="sng" dirty="0"/>
+          </a:p>
+        </p:txBody>
+      </p:sp>
+      <p:sp>
+        <p:nvSpPr>
+          <p:cNvPr id="3" name="Subtitle 2"/>
           <p:cNvSpPr>
             <a:spLocks noGrp="1"/>
           </p:cNvSpPr>
@@ -6779,13 +6357,13 @@
         </p:nvSpPr>
         <p:spPr>
           <a:xfrm>
-            <a:off x="1193074" y="1883228"/>
-            <a:ext cx="10258698" cy="3298372"/>
+            <a:off x="1088569" y="1205699"/>
+            <a:ext cx="10624457" cy="2272325"/>
           </a:xfrm>
         </p:spPr>
         <p:txBody>
           <a:bodyPr>
-            <a:noAutofit/>
+            <a:normAutofit/>
           </a:bodyPr>
           <a:lstStyle/>
           <a:p>
@@ -6793,17 +6371,25 @@
               <a:buClr>
                 <a:schemeClr val="tx1"/>
               </a:buClr>
-              <a:buSzPct val="120000"/>
+              <a:buSzPct val="119000"/>
               <a:buFont typeface="Arial" panose="020B0604020202020204" pitchFamily="34" charset="0"/>
               <a:buChar char="•"/>
             </a:pPr>
             <a:r>
-              <a:rPr lang="en-US" sz="2400" b="1" dirty="0">
+              <a:rPr lang="en-US" b="1" dirty="0" smtClean="0">
                 <a:solidFill>
                   <a:schemeClr val="tx1"/>
                 </a:solidFill>
               </a:rPr>
-              <a:t>Adapter class changes the interface of an existing object.</a:t>
+              <a:t>Facade </a:t>
+            </a:r>
+            <a:r>
+              <a:rPr lang="en-US" b="1" dirty="0">
+                <a:solidFill>
+                  <a:schemeClr val="tx1"/>
+                </a:solidFill>
+              </a:rPr>
+              <a:t>Pattern (Provides a simplified interface, often using adapters internally).</a:t>
             </a:r>
           </a:p>
           <a:p>
@@ -6811,17 +6397,25 @@
               <a:buClr>
                 <a:schemeClr val="tx1"/>
               </a:buClr>
-              <a:buSzPct val="120000"/>
+              <a:buSzPct val="119000"/>
               <a:buFont typeface="Arial" panose="020B0604020202020204" pitchFamily="34" charset="0"/>
               <a:buChar char="•"/>
             </a:pPr>
             <a:r>
-              <a:rPr lang="en-US" sz="2400" b="1" dirty="0">
+              <a:rPr lang="en-US" b="1" dirty="0">
                 <a:solidFill>
                   <a:schemeClr val="tx1"/>
                 </a:solidFill>
               </a:rPr>
-              <a:t>Adapter class is a good example of object composition. Adapter class "has a" instance of the adaptee class.</a:t>
+              <a:t>Decorator Pattern (adds behavior dynamically without modifying the object</a:t>
+            </a:r>
+            <a:r>
+              <a:rPr lang="en-US" b="1" dirty="0" smtClean="0">
+                <a:solidFill>
+                  <a:schemeClr val="tx1"/>
+                </a:solidFill>
+              </a:rPr>
+              <a:t>).</a:t>
             </a:r>
           </a:p>
           <a:p>
@@ -6829,35 +6423,378 @@
               <a:buClr>
                 <a:schemeClr val="tx1"/>
               </a:buClr>
-              <a:buSzPct val="120000"/>
+              <a:buSzPct val="119000"/>
               <a:buFont typeface="Arial" panose="020B0604020202020204" pitchFamily="34" charset="0"/>
               <a:buChar char="•"/>
             </a:pPr>
             <a:r>
-              <a:rPr lang="en-US" sz="2400" b="1" dirty="0">
+              <a:rPr lang="en-US" b="1" dirty="0">
                 <a:solidFill>
                   <a:schemeClr val="tx1"/>
                 </a:solidFill>
               </a:rPr>
-              <a:t>We can use an Adapter with any class Implementing Adaptee Interface.</a:t>
-            </a:r>
-          </a:p>
+              <a:t>Proxy Pattern (controls access to another object).</a:t>
+            </a:r>
+          </a:p>
+        </p:txBody>
+      </p:sp>
+      <p:sp>
+        <p:nvSpPr>
+          <p:cNvPr id="9" name="Title 1"/>
+          <p:cNvSpPr txBox="1">
+            <a:spLocks/>
+          </p:cNvSpPr>
+          <p:nvPr/>
+        </p:nvSpPr>
+        <p:spPr>
+          <a:xfrm>
+            <a:off x="522513" y="3771608"/>
+            <a:ext cx="4101740" cy="726631"/>
+          </a:xfrm>
+          <a:prstGeom prst="rect">
+            <a:avLst/>
+          </a:prstGeom>
+        </p:spPr>
+        <p:txBody>
+          <a:bodyPr vert="horz" lIns="91440" tIns="45720" rIns="91440" bIns="45720" rtlCol="0" anchor="b">
+            <a:normAutofit fontScale="90000"/>
+          </a:bodyPr>
+          <a:lstStyle>
+            <a:lvl1pPr algn="l" defTabSz="914400" rtl="0" eaLnBrk="1" latinLnBrk="0" hangingPunct="1">
+              <a:lnSpc>
+                <a:spcPct val="85000"/>
+              </a:lnSpc>
+              <a:spcBef>
+                <a:spcPct val="0"/>
+              </a:spcBef>
+              <a:buNone/>
+              <a:defRPr sz="7200" kern="1200" spc="-50" baseline="0">
+                <a:solidFill>
+                  <a:schemeClr val="tx1"/>
+                </a:solidFill>
+                <a:latin typeface="+mj-lt"/>
+                <a:ea typeface="+mj-ea"/>
+                <a:cs typeface="+mj-cs"/>
+              </a:defRPr>
+            </a:lvl1pPr>
+          </a:lstStyle>
+          <a:p>
+            <a:r>
+              <a:rPr lang="en-US" sz="4400" u="sng" dirty="0" smtClean="0"/>
+              <a:t>Design Principle</a:t>
+            </a:r>
+            <a:endParaRPr lang="en-IN" sz="4800" u="sng" dirty="0"/>
+          </a:p>
+        </p:txBody>
+      </p:sp>
+      <p:sp>
+        <p:nvSpPr>
+          <p:cNvPr id="10" name="Subtitle 2"/>
+          <p:cNvSpPr txBox="1">
+            <a:spLocks/>
+          </p:cNvSpPr>
+          <p:nvPr/>
+        </p:nvSpPr>
+        <p:spPr>
+          <a:xfrm>
+            <a:off x="1088569" y="4793932"/>
+            <a:ext cx="10624457" cy="1815125"/>
+          </a:xfrm>
+          <a:prstGeom prst="rect">
+            <a:avLst/>
+          </a:prstGeom>
+        </p:spPr>
+        <p:txBody>
+          <a:bodyPr vert="horz" lIns="91440" tIns="45720" rIns="91440" bIns="45720" rtlCol="0">
+            <a:normAutofit lnSpcReduction="10000"/>
+          </a:bodyPr>
+          <a:lstStyle>
+            <a:lvl1pPr marL="0" indent="0" algn="l" defTabSz="914400" rtl="0" eaLnBrk="1" latinLnBrk="0" hangingPunct="1">
+              <a:lnSpc>
+                <a:spcPct val="95000"/>
+              </a:lnSpc>
+              <a:spcBef>
+                <a:spcPts val="1400"/>
+              </a:spcBef>
+              <a:spcAft>
+                <a:spcPts val="200"/>
+              </a:spcAft>
+              <a:buClr>
+                <a:schemeClr val="accent1"/>
+              </a:buClr>
+              <a:buSzPct val="80000"/>
+              <a:buFont typeface="Arial" pitchFamily="34" charset="0"/>
+              <a:buNone/>
+              <a:defRPr sz="2200" kern="1200" spc="10" baseline="0">
+                <a:solidFill>
+                  <a:schemeClr val="tx1">
+                    <a:lumMod val="75000"/>
+                  </a:schemeClr>
+                </a:solidFill>
+                <a:latin typeface="+mn-lt"/>
+                <a:ea typeface="+mn-ea"/>
+                <a:cs typeface="+mn-cs"/>
+              </a:defRPr>
+            </a:lvl1pPr>
+            <a:lvl2pPr marL="457200" indent="0" algn="ctr" defTabSz="914400" rtl="0" eaLnBrk="1" latinLnBrk="0" hangingPunct="1">
+              <a:lnSpc>
+                <a:spcPct val="90000"/>
+              </a:lnSpc>
+              <a:spcBef>
+                <a:spcPts val="300"/>
+              </a:spcBef>
+              <a:spcAft>
+                <a:spcPts val="300"/>
+              </a:spcAft>
+              <a:buClr>
+                <a:schemeClr val="accent1"/>
+              </a:buClr>
+              <a:buFont typeface="Wingdings 2" pitchFamily="18" charset="2"/>
+              <a:buNone/>
+              <a:defRPr sz="2200" kern="1200">
+                <a:solidFill>
+                  <a:schemeClr val="tx1">
+                    <a:lumMod val="85000"/>
+                    <a:lumOff val="15000"/>
+                  </a:schemeClr>
+                </a:solidFill>
+                <a:latin typeface="+mn-lt"/>
+                <a:ea typeface="+mn-ea"/>
+                <a:cs typeface="+mn-cs"/>
+              </a:defRPr>
+            </a:lvl2pPr>
+            <a:lvl3pPr marL="914400" indent="0" algn="ctr" defTabSz="914400" rtl="0" eaLnBrk="1" latinLnBrk="0" hangingPunct="1">
+              <a:lnSpc>
+                <a:spcPct val="90000"/>
+              </a:lnSpc>
+              <a:spcBef>
+                <a:spcPts val="300"/>
+              </a:spcBef>
+              <a:spcAft>
+                <a:spcPts val="300"/>
+              </a:spcAft>
+              <a:buClr>
+                <a:schemeClr val="accent1"/>
+              </a:buClr>
+              <a:buFont typeface="Wingdings 2" pitchFamily="18" charset="2"/>
+              <a:buNone/>
+              <a:defRPr sz="2200" kern="1200">
+                <a:solidFill>
+                  <a:schemeClr val="tx1">
+                    <a:lumMod val="85000"/>
+                    <a:lumOff val="15000"/>
+                  </a:schemeClr>
+                </a:solidFill>
+                <a:latin typeface="+mn-lt"/>
+                <a:ea typeface="+mn-ea"/>
+                <a:cs typeface="+mn-cs"/>
+              </a:defRPr>
+            </a:lvl3pPr>
+            <a:lvl4pPr marL="1371600" indent="0" algn="ctr" defTabSz="914400" rtl="0" eaLnBrk="1" latinLnBrk="0" hangingPunct="1">
+              <a:lnSpc>
+                <a:spcPct val="90000"/>
+              </a:lnSpc>
+              <a:spcBef>
+                <a:spcPts val="300"/>
+              </a:spcBef>
+              <a:spcAft>
+                <a:spcPts val="300"/>
+              </a:spcAft>
+              <a:buClr>
+                <a:schemeClr val="accent1"/>
+              </a:buClr>
+              <a:buFont typeface="Wingdings 2" pitchFamily="18" charset="2"/>
+              <a:buNone/>
+              <a:defRPr sz="2000" kern="1200">
+                <a:solidFill>
+                  <a:schemeClr val="tx1">
+                    <a:lumMod val="85000"/>
+                    <a:lumOff val="15000"/>
+                  </a:schemeClr>
+                </a:solidFill>
+                <a:latin typeface="+mn-lt"/>
+                <a:ea typeface="+mn-ea"/>
+                <a:cs typeface="+mn-cs"/>
+              </a:defRPr>
+            </a:lvl4pPr>
+            <a:lvl5pPr marL="1828800" indent="0" algn="ctr" defTabSz="914400" rtl="0" eaLnBrk="1" latinLnBrk="0" hangingPunct="1">
+              <a:lnSpc>
+                <a:spcPct val="90000"/>
+              </a:lnSpc>
+              <a:spcBef>
+                <a:spcPts val="300"/>
+              </a:spcBef>
+              <a:spcAft>
+                <a:spcPts val="300"/>
+              </a:spcAft>
+              <a:buClr>
+                <a:schemeClr val="accent1"/>
+              </a:buClr>
+              <a:buFont typeface="Wingdings 2" pitchFamily="18" charset="2"/>
+              <a:buNone/>
+              <a:defRPr sz="2000" kern="1200">
+                <a:solidFill>
+                  <a:schemeClr val="tx1">
+                    <a:lumMod val="85000"/>
+                    <a:lumOff val="15000"/>
+                  </a:schemeClr>
+                </a:solidFill>
+                <a:latin typeface="+mn-lt"/>
+                <a:ea typeface="+mn-ea"/>
+                <a:cs typeface="+mn-cs"/>
+              </a:defRPr>
+            </a:lvl5pPr>
+            <a:lvl6pPr marL="2286000" indent="0" algn="ctr" defTabSz="914400" rtl="0" eaLnBrk="1" latinLnBrk="0" hangingPunct="1">
+              <a:lnSpc>
+                <a:spcPct val="90000"/>
+              </a:lnSpc>
+              <a:spcBef>
+                <a:spcPts val="300"/>
+              </a:spcBef>
+              <a:spcAft>
+                <a:spcPts val="300"/>
+              </a:spcAft>
+              <a:buClr>
+                <a:schemeClr val="accent1"/>
+              </a:buClr>
+              <a:buFont typeface="Wingdings 2" pitchFamily="18" charset="2"/>
+              <a:buNone/>
+              <a:defRPr sz="2000" kern="1200">
+                <a:solidFill>
+                  <a:schemeClr val="tx1">
+                    <a:lumMod val="85000"/>
+                    <a:lumOff val="15000"/>
+                  </a:schemeClr>
+                </a:solidFill>
+                <a:latin typeface="+mn-lt"/>
+                <a:ea typeface="+mn-ea"/>
+                <a:cs typeface="+mn-cs"/>
+              </a:defRPr>
+            </a:lvl6pPr>
+            <a:lvl7pPr marL="2743200" indent="0" algn="ctr" defTabSz="914400" rtl="0" eaLnBrk="1" latinLnBrk="0" hangingPunct="1">
+              <a:lnSpc>
+                <a:spcPct val="90000"/>
+              </a:lnSpc>
+              <a:spcBef>
+                <a:spcPts val="300"/>
+              </a:spcBef>
+              <a:spcAft>
+                <a:spcPts val="300"/>
+              </a:spcAft>
+              <a:buClr>
+                <a:schemeClr val="accent1"/>
+              </a:buClr>
+              <a:buFont typeface="Wingdings 2" pitchFamily="18" charset="2"/>
+              <a:buNone/>
+              <a:defRPr sz="2000" kern="1200">
+                <a:solidFill>
+                  <a:schemeClr val="tx1">
+                    <a:lumMod val="85000"/>
+                    <a:lumOff val="15000"/>
+                  </a:schemeClr>
+                </a:solidFill>
+                <a:latin typeface="+mn-lt"/>
+                <a:ea typeface="+mn-ea"/>
+                <a:cs typeface="+mn-cs"/>
+              </a:defRPr>
+            </a:lvl7pPr>
+            <a:lvl8pPr marL="3200400" indent="0" algn="ctr" defTabSz="914400" rtl="0" eaLnBrk="1" latinLnBrk="0" hangingPunct="1">
+              <a:lnSpc>
+                <a:spcPct val="90000"/>
+              </a:lnSpc>
+              <a:spcBef>
+                <a:spcPts val="300"/>
+              </a:spcBef>
+              <a:spcAft>
+                <a:spcPts val="300"/>
+              </a:spcAft>
+              <a:buClr>
+                <a:schemeClr val="accent1"/>
+              </a:buClr>
+              <a:buFont typeface="Wingdings 2" pitchFamily="18" charset="2"/>
+              <a:buNone/>
+              <a:defRPr sz="2000" kern="1200">
+                <a:solidFill>
+                  <a:schemeClr val="tx1">
+                    <a:lumMod val="85000"/>
+                    <a:lumOff val="15000"/>
+                  </a:schemeClr>
+                </a:solidFill>
+                <a:latin typeface="+mn-lt"/>
+                <a:ea typeface="+mn-ea"/>
+                <a:cs typeface="+mn-cs"/>
+              </a:defRPr>
+            </a:lvl8pPr>
+            <a:lvl9pPr marL="3657600" indent="0" algn="ctr" defTabSz="914400" rtl="0" eaLnBrk="1" latinLnBrk="0" hangingPunct="1">
+              <a:lnSpc>
+                <a:spcPct val="90000"/>
+              </a:lnSpc>
+              <a:spcBef>
+                <a:spcPts val="300"/>
+              </a:spcBef>
+              <a:spcAft>
+                <a:spcPts val="300"/>
+              </a:spcAft>
+              <a:buClr>
+                <a:schemeClr val="accent1"/>
+              </a:buClr>
+              <a:buFont typeface="Wingdings 2" pitchFamily="18" charset="2"/>
+              <a:buNone/>
+              <a:defRPr sz="2000" kern="1200">
+                <a:solidFill>
+                  <a:schemeClr val="tx1">
+                    <a:lumMod val="85000"/>
+                    <a:lumOff val="15000"/>
+                  </a:schemeClr>
+                </a:solidFill>
+                <a:latin typeface="+mn-lt"/>
+                <a:ea typeface="+mn-ea"/>
+                <a:cs typeface="+mn-cs"/>
+              </a:defRPr>
+            </a:lvl9pPr>
+          </a:lstStyle>
           <a:p>
             <a:pPr marL="342900" indent="-342900" algn="just">
               <a:buClr>
                 <a:schemeClr val="tx1"/>
               </a:buClr>
-              <a:buSzPct val="120000"/>
-              <a:buFont typeface="Arial" panose="020B0604020202020204" pitchFamily="34" charset="0"/>
+              <a:buSzPct val="119000"/>
+              <a:buFont typeface="Arial" pitchFamily="34" charset="0"/>
               <a:buChar char="•"/>
             </a:pPr>
             <a:r>
-              <a:rPr lang="en-US" sz="2400" b="1" dirty="0">
+              <a:rPr lang="en-US" b="1" dirty="0">
                 <a:solidFill>
                   <a:schemeClr val="tx1"/>
                 </a:solidFill>
               </a:rPr>
-              <a:t>Adapter wraps an object to change it's interface whereas a decorator wraps an object to add extra functionalities.</a:t>
+              <a:t>Single Responsibility Principle (SRP): The Adapter class has one responsibility: adapting the interface</a:t>
+            </a:r>
+            <a:r>
+              <a:rPr lang="en-US" b="1" dirty="0" smtClean="0">
+                <a:solidFill>
+                  <a:schemeClr val="tx1"/>
+                </a:solidFill>
+              </a:rPr>
+              <a:t>.</a:t>
+            </a:r>
+          </a:p>
+          <a:p>
+            <a:pPr marL="342900" indent="-342900" algn="just">
+              <a:buClr>
+                <a:schemeClr val="tx1"/>
+              </a:buClr>
+              <a:buSzPct val="119000"/>
+              <a:buFont typeface="Arial" pitchFamily="34" charset="0"/>
+              <a:buChar char="•"/>
+            </a:pPr>
+            <a:r>
+              <a:rPr lang="en-US" b="1" dirty="0">
+                <a:solidFill>
+                  <a:schemeClr val="tx1"/>
+                </a:solidFill>
+              </a:rPr>
+              <a:t>Open/Closed Principle (OCP): The Adapter pattern allows you to extend functionality by adding new adapters without modifying existing code.</a:t>
             </a:r>
           </a:p>
         </p:txBody>
@@ -6865,7 +6802,7 @@
     </p:spTree>
     <p:extLst>
       <p:ext uri="{BB962C8B-B14F-4D97-AF65-F5344CB8AC3E}">
-        <p14:creationId xmlns:p14="http://schemas.microsoft.com/office/powerpoint/2010/main" val="65994222"/>
+        <p14:creationId xmlns:p14="http://schemas.microsoft.com/office/powerpoint/2010/main" val="2919009059"/>
       </p:ext>
     </p:extLst>
   </p:cSld>
@@ -6911,31 +6848,27 @@
         </p:nvSpPr>
         <p:spPr>
           <a:xfrm>
-            <a:off x="522513" y="185484"/>
-            <a:ext cx="3988528" cy="726631"/>
+            <a:off x="679268" y="478972"/>
+            <a:ext cx="9614263" cy="726631"/>
           </a:xfrm>
         </p:spPr>
         <p:txBody>
           <a:bodyPr>
-            <a:normAutofit/>
+            <a:noAutofit/>
           </a:bodyPr>
           <a:lstStyle/>
           <a:p>
             <a:r>
-              <a:rPr lang="en-US" sz="4400" u="sng" dirty="0"/>
-              <a:t>Real-Time </a:t>
-            </a:r>
-            <a:r>
-              <a:rPr lang="en-US" sz="4400" u="sng" dirty="0" smtClean="0"/>
-              <a:t>Use</a:t>
-            </a:r>
-            <a:endParaRPr lang="en-IN" sz="4800" u="sng" dirty="0"/>
-          </a:p>
-        </p:txBody>
-      </p:sp>
-      <p:sp>
-        <p:nvSpPr>
-          <p:cNvPr id="3" name="Subtitle 2"/>
+              <a:rPr lang="fr-FR" sz="4000" u="sng" dirty="0"/>
+              <a:t>Important Points About Adapter Pattern</a:t>
+            </a:r>
+            <a:endParaRPr lang="en-IN" sz="2400" u="sng" dirty="0"/>
+          </a:p>
+        </p:txBody>
+      </p:sp>
+      <p:sp>
+        <p:nvSpPr>
+          <p:cNvPr id="4" name="Subtitle 3"/>
           <p:cNvSpPr>
             <a:spLocks noGrp="1"/>
           </p:cNvSpPr>
@@ -6945,13 +6878,13 @@
         </p:nvSpPr>
         <p:spPr>
           <a:xfrm>
-            <a:off x="1088569" y="1205699"/>
-            <a:ext cx="10624457" cy="5177684"/>
+            <a:off x="1193074" y="1883228"/>
+            <a:ext cx="10258698" cy="3298372"/>
           </a:xfrm>
         </p:spPr>
         <p:txBody>
           <a:bodyPr>
-            <a:normAutofit/>
+            <a:noAutofit/>
           </a:bodyPr>
           <a:lstStyle/>
           <a:p>
@@ -6959,191 +6892,71 @@
               <a:buClr>
                 <a:schemeClr val="tx1"/>
               </a:buClr>
-              <a:buSzPct val="119000"/>
+              <a:buSzPct val="120000"/>
               <a:buFont typeface="Arial" panose="020B0604020202020204" pitchFamily="34" charset="0"/>
               <a:buChar char="•"/>
             </a:pPr>
             <a:r>
-              <a:rPr lang="en-US" b="1" dirty="0">
+              <a:rPr lang="en-US" sz="2400" b="1" dirty="0">
                 <a:solidFill>
                   <a:schemeClr val="tx1"/>
                 </a:solidFill>
               </a:rPr>
-              <a:t>Java InputStreamReader &amp; OutputStreamWriter: Converts byte streams to character streams</a:t>
-            </a:r>
-            <a:r>
-              <a:rPr lang="en-US" b="1" dirty="0" smtClean="0">
-                <a:solidFill>
-                  <a:schemeClr val="tx1"/>
-                </a:solidFill>
-              </a:rPr>
-              <a:t>.</a:t>
-            </a:r>
-          </a:p>
-          <a:p>
-            <a:pPr lvl="2" algn="just">
+              <a:t>Adapter class changes the interface of an existing object.</a:t>
+            </a:r>
+          </a:p>
+          <a:p>
+            <a:pPr marL="342900" indent="-342900" algn="just">
               <a:buClr>
                 <a:schemeClr val="tx1"/>
               </a:buClr>
-              <a:buSzPct val="119000"/>
-            </a:pPr>
-            <a:r>
-              <a:rPr lang="en-US" sz="2000" b="1" dirty="0" smtClean="0">
-                <a:solidFill>
-                  <a:schemeClr val="tx1"/>
-                </a:solidFill>
-              </a:rPr>
-              <a:t>The </a:t>
-            </a:r>
-            <a:r>
-              <a:rPr lang="en-US" sz="2000" b="1" dirty="0">
-                <a:solidFill>
-                  <a:schemeClr val="tx1"/>
-                </a:solidFill>
-              </a:rPr>
-              <a:t>InputStream class works with byte streams, but sometimes we need </a:t>
-            </a:r>
-            <a:r>
-              <a:rPr lang="en-US" sz="2000" b="1" dirty="0" smtClean="0">
-                <a:solidFill>
-                  <a:schemeClr val="tx1"/>
-                </a:solidFill>
-              </a:rPr>
-              <a:t>to </a:t>
-            </a:r>
-            <a:r>
-              <a:rPr lang="en-US" sz="2000" b="1" dirty="0">
-                <a:solidFill>
-                  <a:schemeClr val="tx1"/>
-                </a:solidFill>
-              </a:rPr>
-              <a:t>work with character streams. Java provides InputStreamReader, which acts as an adapter that converts an InputStream (bytes) into a Reader (characters).</a:t>
-            </a:r>
-            <a:endParaRPr lang="en-US" sz="2000" b="1" dirty="0" smtClean="0">
-              <a:solidFill>
-                <a:schemeClr val="tx1"/>
-              </a:solidFill>
-            </a:endParaRPr>
-          </a:p>
-          <a:p>
-            <a:pPr marL="342900" indent="-342900" algn="just">
-              <a:buClr>
-                <a:schemeClr val="tx1"/>
-              </a:buClr>
-              <a:buSzPct val="119000"/>
+              <a:buSzPct val="120000"/>
               <a:buFont typeface="Arial" panose="020B0604020202020204" pitchFamily="34" charset="0"/>
               <a:buChar char="•"/>
             </a:pPr>
             <a:r>
-              <a:rPr lang="en-US" b="1" dirty="0">
+              <a:rPr lang="en-US" sz="2400" b="1" dirty="0">
                 <a:solidFill>
                   <a:schemeClr val="tx1"/>
                 </a:solidFill>
               </a:rPr>
-              <a:t>JDBC Drivers: Adapt different database protocols to the common JDBC interface</a:t>
-            </a:r>
-            <a:r>
-              <a:rPr lang="en-US" b="1" dirty="0" smtClean="0">
-                <a:solidFill>
-                  <a:schemeClr val="tx1"/>
-                </a:solidFill>
-              </a:rPr>
-              <a:t>.</a:t>
-            </a:r>
-          </a:p>
-          <a:p>
-            <a:pPr lvl="2" algn="just">
+              <a:t>Adapter class is a good example of object composition. Adapter class "has a" instance of the adaptee class.</a:t>
+            </a:r>
+          </a:p>
+          <a:p>
+            <a:pPr marL="342900" indent="-342900" algn="just">
               <a:buClr>
                 <a:schemeClr val="tx1"/>
               </a:buClr>
-              <a:buSzPct val="119000"/>
-            </a:pPr>
-            <a:r>
-              <a:rPr lang="en-US" sz="2000" b="1" dirty="0">
-                <a:solidFill>
-                  <a:schemeClr val="tx1"/>
-                </a:solidFill>
-              </a:rPr>
-              <a:t>Java provides a common interface (java.sql.Connection) for connecting to databases. Different databases (MySQL, PostgreSQL, etc.) have their own incompatible </a:t>
-            </a:r>
-            <a:r>
-              <a:rPr lang="en-US" sz="2000" b="1" dirty="0" smtClean="0">
-                <a:solidFill>
-                  <a:schemeClr val="tx1"/>
-                </a:solidFill>
-              </a:rPr>
-              <a:t>implementations. To </a:t>
-            </a:r>
-            <a:r>
-              <a:rPr lang="en-US" sz="2000" b="1" dirty="0">
-                <a:solidFill>
-                  <a:schemeClr val="tx1"/>
-                </a:solidFill>
-              </a:rPr>
-              <a:t>make them work with the JDBC API, database vendors provide JDBC Drivers as Adapters.</a:t>
-            </a:r>
-            <a:endParaRPr lang="en-US" sz="2000" b="1" dirty="0" smtClean="0">
-              <a:solidFill>
-                <a:schemeClr val="tx1"/>
-              </a:solidFill>
-            </a:endParaRPr>
-          </a:p>
-          <a:p>
-            <a:pPr marL="342900" indent="-342900" algn="just">
-              <a:buClr>
-                <a:schemeClr val="tx1"/>
-              </a:buClr>
-              <a:buSzPct val="119000"/>
+              <a:buSzPct val="120000"/>
               <a:buFont typeface="Arial" panose="020B0604020202020204" pitchFamily="34" charset="0"/>
               <a:buChar char="•"/>
             </a:pPr>
             <a:r>
-              <a:rPr lang="en-US" b="1" dirty="0">
+              <a:rPr lang="en-US" sz="2400" b="1" dirty="0">
                 <a:solidFill>
                   <a:schemeClr val="tx1"/>
                 </a:solidFill>
               </a:rPr>
-              <a:t>Convert Array to List in </a:t>
-            </a:r>
-            <a:r>
-              <a:rPr lang="en-US" b="1" dirty="0" smtClean="0">
+              <a:t>We can use an Adapter with any class Implementing Adaptee Interface.</a:t>
+            </a:r>
+          </a:p>
+          <a:p>
+            <a:pPr marL="342900" indent="-342900" algn="just">
+              <a:buClr>
+                <a:schemeClr val="tx1"/>
+              </a:buClr>
+              <a:buSzPct val="120000"/>
+              <a:buFont typeface="Arial" panose="020B0604020202020204" pitchFamily="34" charset="0"/>
+              <a:buChar char="•"/>
+            </a:pPr>
+            <a:r>
+              <a:rPr lang="en-US" sz="2400" b="1" dirty="0">
                 <a:solidFill>
                   <a:schemeClr val="tx1"/>
                 </a:solidFill>
               </a:rPr>
-              <a:t>Java</a:t>
-            </a:r>
-          </a:p>
-          <a:p>
-            <a:pPr lvl="2" algn="just">
-              <a:buClr>
-                <a:schemeClr val="tx1"/>
-              </a:buClr>
-              <a:buSzPct val="119000"/>
-            </a:pPr>
-            <a:r>
-              <a:rPr lang="en-US" sz="2000" b="1" dirty="0">
-                <a:solidFill>
-                  <a:schemeClr val="tx1"/>
-                </a:solidFill>
-              </a:rPr>
-              <a:t>If you just need a read-only list, use Arrays.asList().</a:t>
-            </a:r>
-          </a:p>
-          <a:p>
-            <a:pPr lvl="2" algn="just">
-              <a:buClr>
-                <a:schemeClr val="tx1"/>
-              </a:buClr>
-              <a:buSzPct val="119000"/>
-            </a:pPr>
-            <a:r>
-              <a:rPr lang="en-US" sz="2000" b="1" dirty="0">
-                <a:solidFill>
-                  <a:schemeClr val="tx1"/>
-                </a:solidFill>
-              </a:rPr>
-              <a:t>If you need a modifiable list, use new ArrayList&lt;&gt;(Arrays.asList()).</a:t>
+              <a:t>Adapter wraps an object to change it's interface whereas a decorator wraps an object to add extra functionalities.</a:t>
             </a:r>
           </a:p>
         </p:txBody>
@@ -7151,7 +6964,7 @@
     </p:spTree>
     <p:extLst>
       <p:ext uri="{BB962C8B-B14F-4D97-AF65-F5344CB8AC3E}">
-        <p14:creationId xmlns:p14="http://schemas.microsoft.com/office/powerpoint/2010/main" val="3356536215"/>
+        <p14:creationId xmlns:p14="http://schemas.microsoft.com/office/powerpoint/2010/main" val="65994222"/>
       </p:ext>
     </p:extLst>
   </p:cSld>
@@ -7197,56 +7010,253 @@
         </p:nvSpPr>
         <p:spPr>
           <a:xfrm>
-            <a:off x="2447109" y="2682240"/>
-            <a:ext cx="7968344" cy="1658448"/>
+            <a:off x="522513" y="185484"/>
+            <a:ext cx="3988528" cy="726631"/>
           </a:xfrm>
         </p:spPr>
         <p:txBody>
           <a:bodyPr>
-            <a:noAutofit/>
+            <a:normAutofit/>
           </a:bodyPr>
           <a:lstStyle/>
           <a:p>
             <a:r>
-              <a:rPr lang="fr-FR" sz="11500" dirty="0" smtClean="0">
-                <a:ln>
-                  <a:solidFill>
-                    <a:srgbClr val="C00000"/>
-                  </a:solidFill>
-                </a:ln>
-                <a:latin typeface="Algerian" panose="04020705040A02060702" pitchFamily="82" charset="0"/>
+              <a:rPr lang="en-US" sz="4400" u="sng" dirty="0"/>
+              <a:t>Real-Time </a:t>
+            </a:r>
+            <a:r>
+              <a:rPr lang="en-US" sz="4400" u="sng" dirty="0" smtClean="0"/>
+              <a:t>Use</a:t>
+            </a:r>
+            <a:endParaRPr lang="en-IN" sz="4800" u="sng" dirty="0"/>
+          </a:p>
+        </p:txBody>
+      </p:sp>
+      <p:sp>
+        <p:nvSpPr>
+          <p:cNvPr id="3" name="Subtitle 2"/>
+          <p:cNvSpPr>
+            <a:spLocks noGrp="1"/>
+          </p:cNvSpPr>
+          <p:nvPr>
+            <p:ph type="subTitle" idx="1"/>
+          </p:nvPr>
+        </p:nvSpPr>
+        <p:spPr>
+          <a:xfrm>
+            <a:off x="1088569" y="1205699"/>
+            <a:ext cx="10624457" cy="5177684"/>
+          </a:xfrm>
+        </p:spPr>
+        <p:txBody>
+          <a:bodyPr>
+            <a:normAutofit/>
+          </a:bodyPr>
+          <a:lstStyle/>
+          <a:p>
+            <a:pPr marL="342900" indent="-342900" algn="just">
+              <a:buClr>
+                <a:schemeClr val="tx1"/>
+              </a:buClr>
+              <a:buSzPct val="119000"/>
+              <a:buFont typeface="Arial" panose="020B0604020202020204" pitchFamily="34" charset="0"/>
+              <a:buChar char="•"/>
+            </a:pPr>
+            <a:r>
+              <a:rPr lang="en-US" b="1" dirty="0">
+                <a:solidFill>
+                  <a:schemeClr val="tx1"/>
+                </a:solidFill>
               </a:rPr>
-              <a:t>THANK YOU</a:t>
-            </a:r>
-            <a:endParaRPr lang="en-IN" dirty="0">
-              <a:ln>
-                <a:solidFill>
-                  <a:srgbClr val="C00000"/>
-                </a:solidFill>
-              </a:ln>
-              <a:latin typeface="Algerian" panose="04020705040A02060702" pitchFamily="82" charset="0"/>
+              <a:t>Java InputStreamReader &amp; OutputStreamWriter: Converts byte streams to character streams</a:t>
+            </a:r>
+            <a:r>
+              <a:rPr lang="en-US" b="1" dirty="0" smtClean="0">
+                <a:solidFill>
+                  <a:schemeClr val="tx1"/>
+                </a:solidFill>
+              </a:rPr>
+              <a:t>.</a:t>
+            </a:r>
+          </a:p>
+          <a:p>
+            <a:pPr lvl="2" algn="just">
+              <a:buClr>
+                <a:schemeClr val="tx1"/>
+              </a:buClr>
+              <a:buSzPct val="119000"/>
+            </a:pPr>
+            <a:r>
+              <a:rPr lang="en-US" sz="2000" b="1" dirty="0" smtClean="0">
+                <a:solidFill>
+                  <a:schemeClr val="tx1"/>
+                </a:solidFill>
+              </a:rPr>
+              <a:t>The </a:t>
+            </a:r>
+            <a:r>
+              <a:rPr lang="en-US" sz="2000" b="1" dirty="0">
+                <a:solidFill>
+                  <a:schemeClr val="tx1"/>
+                </a:solidFill>
+              </a:rPr>
+              <a:t>InputStream class works with byte streams, but sometimes we need </a:t>
+            </a:r>
+            <a:r>
+              <a:rPr lang="en-US" sz="2000" b="1" dirty="0" smtClean="0">
+                <a:solidFill>
+                  <a:schemeClr val="tx1"/>
+                </a:solidFill>
+              </a:rPr>
+              <a:t>to </a:t>
+            </a:r>
+            <a:r>
+              <a:rPr lang="en-US" sz="2000" b="1" dirty="0">
+                <a:solidFill>
+                  <a:schemeClr val="tx1"/>
+                </a:solidFill>
+              </a:rPr>
+              <a:t>work with character streams. Java provides InputStreamReader, which acts as an adapter that converts an InputStream (bytes) into a Reader (characters).</a:t>
+            </a:r>
+            <a:endParaRPr lang="en-US" sz="2000" b="1" dirty="0" smtClean="0">
+              <a:solidFill>
+                <a:schemeClr val="tx1"/>
+              </a:solidFill>
             </a:endParaRPr>
+          </a:p>
+          <a:p>
+            <a:pPr marL="342900" indent="-342900" algn="just">
+              <a:buClr>
+                <a:schemeClr val="tx1"/>
+              </a:buClr>
+              <a:buSzPct val="119000"/>
+              <a:buFont typeface="Arial" panose="020B0604020202020204" pitchFamily="34" charset="0"/>
+              <a:buChar char="•"/>
+            </a:pPr>
+            <a:r>
+              <a:rPr lang="en-US" b="1" dirty="0">
+                <a:solidFill>
+                  <a:schemeClr val="tx1"/>
+                </a:solidFill>
+              </a:rPr>
+              <a:t>JDBC Drivers: Adapt different database protocols to the common JDBC interface</a:t>
+            </a:r>
+            <a:r>
+              <a:rPr lang="en-US" b="1" dirty="0" smtClean="0">
+                <a:solidFill>
+                  <a:schemeClr val="tx1"/>
+                </a:solidFill>
+              </a:rPr>
+              <a:t>.</a:t>
+            </a:r>
+          </a:p>
+          <a:p>
+            <a:pPr lvl="2" algn="just">
+              <a:buClr>
+                <a:schemeClr val="tx1"/>
+              </a:buClr>
+              <a:buSzPct val="119000"/>
+            </a:pPr>
+            <a:r>
+              <a:rPr lang="en-US" sz="2000" b="1" dirty="0">
+                <a:solidFill>
+                  <a:schemeClr val="tx1"/>
+                </a:solidFill>
+              </a:rPr>
+              <a:t>Java provides a common interface (java.sql.Connection) for connecting to databases. Different databases (MySQL, PostgreSQL, etc.) have their own incompatible </a:t>
+            </a:r>
+            <a:r>
+              <a:rPr lang="en-US" sz="2000" b="1" dirty="0" smtClean="0">
+                <a:solidFill>
+                  <a:schemeClr val="tx1"/>
+                </a:solidFill>
+              </a:rPr>
+              <a:t>implementations. To </a:t>
+            </a:r>
+            <a:r>
+              <a:rPr lang="en-US" sz="2000" b="1" dirty="0">
+                <a:solidFill>
+                  <a:schemeClr val="tx1"/>
+                </a:solidFill>
+              </a:rPr>
+              <a:t>make them work with the JDBC API, database vendors provide JDBC Drivers as Adapters.</a:t>
+            </a:r>
+            <a:endParaRPr lang="en-US" sz="2000" b="1" dirty="0" smtClean="0">
+              <a:solidFill>
+                <a:schemeClr val="tx1"/>
+              </a:solidFill>
+            </a:endParaRPr>
+          </a:p>
+          <a:p>
+            <a:pPr marL="342900" indent="-342900" algn="just">
+              <a:buClr>
+                <a:schemeClr val="tx1"/>
+              </a:buClr>
+              <a:buSzPct val="119000"/>
+              <a:buFont typeface="Arial" panose="020B0604020202020204" pitchFamily="34" charset="0"/>
+              <a:buChar char="•"/>
+            </a:pPr>
+            <a:r>
+              <a:rPr lang="en-US" b="1" dirty="0">
+                <a:solidFill>
+                  <a:schemeClr val="tx1"/>
+                </a:solidFill>
+              </a:rPr>
+              <a:t>Convert Array to List in </a:t>
+            </a:r>
+            <a:r>
+              <a:rPr lang="en-US" b="1" dirty="0" smtClean="0">
+                <a:solidFill>
+                  <a:schemeClr val="tx1"/>
+                </a:solidFill>
+              </a:rPr>
+              <a:t>Java</a:t>
+            </a:r>
+          </a:p>
+          <a:p>
+            <a:pPr lvl="2" algn="just">
+              <a:buClr>
+                <a:schemeClr val="tx1"/>
+              </a:buClr>
+              <a:buSzPct val="119000"/>
+            </a:pPr>
+            <a:r>
+              <a:rPr lang="en-US" sz="2000" b="1" dirty="0">
+                <a:solidFill>
+                  <a:schemeClr val="tx1"/>
+                </a:solidFill>
+              </a:rPr>
+              <a:t>If you just need a read-only list, use Arrays.asList().</a:t>
+            </a:r>
+          </a:p>
+          <a:p>
+            <a:pPr lvl="2" algn="just">
+              <a:buClr>
+                <a:schemeClr val="tx1"/>
+              </a:buClr>
+              <a:buSzPct val="119000"/>
+            </a:pPr>
+            <a:r>
+              <a:rPr lang="en-US" sz="2000" b="1" dirty="0">
+                <a:solidFill>
+                  <a:schemeClr val="tx1"/>
+                </a:solidFill>
+              </a:rPr>
+              <a:t>If you need a modifiable list, use new ArrayList&lt;&gt;(Arrays.asList()).</a:t>
+            </a:r>
           </a:p>
         </p:txBody>
       </p:sp>
     </p:spTree>
     <p:extLst>
       <p:ext uri="{BB962C8B-B14F-4D97-AF65-F5344CB8AC3E}">
-        <p14:creationId xmlns:p14="http://schemas.microsoft.com/office/powerpoint/2010/main" val="66669561"/>
+        <p14:creationId xmlns:p14="http://schemas.microsoft.com/office/powerpoint/2010/main" val="3356536215"/>
       </p:ext>
     </p:extLst>
   </p:cSld>
   <p:clrMapOvr>
     <a:masterClrMapping/>
   </p:clrMapOvr>
-  <mc:AlternateContent xmlns:mc="http://schemas.openxmlformats.org/markup-compatibility/2006" xmlns:p14="http://schemas.microsoft.com/office/powerpoint/2010/main">
-    <mc:Choice Requires="p14">
-      <p:transition p14:dur="0"/>
-    </mc:Choice>
-    <mc:Fallback xmlns="">
-      <p:transition/>
-    </mc:Fallback>
-  </mc:AlternateContent>
   <p:timing>
     <p:tnLst>
       <p:par>
@@ -7444,6 +7454,95 @@
 </p:sld>
 </file>
 
+<file path=ppt/slides/slide20.xml><?xml version="1.0" encoding="utf-8"?>
+<p:sld xmlns:a="http://schemas.openxmlformats.org/drawingml/2006/main" xmlns:r="http://schemas.openxmlformats.org/officeDocument/2006/relationships" xmlns:p="http://schemas.openxmlformats.org/presentationml/2006/main">
+  <p:cSld>
+    <p:spTree>
+      <p:nvGrpSpPr>
+        <p:cNvPr id="1" name=""/>
+        <p:cNvGrpSpPr/>
+        <p:nvPr/>
+      </p:nvGrpSpPr>
+      <p:grpSpPr>
+        <a:xfrm>
+          <a:off x="0" y="0"/>
+          <a:ext cx="0" cy="0"/>
+          <a:chOff x="0" y="0"/>
+          <a:chExt cx="0" cy="0"/>
+        </a:xfrm>
+      </p:grpSpPr>
+      <p:sp>
+        <p:nvSpPr>
+          <p:cNvPr id="2" name="Title 1"/>
+          <p:cNvSpPr>
+            <a:spLocks noGrp="1"/>
+          </p:cNvSpPr>
+          <p:nvPr>
+            <p:ph type="ctrTitle"/>
+          </p:nvPr>
+        </p:nvSpPr>
+        <p:spPr>
+          <a:xfrm>
+            <a:off x="2447109" y="2682240"/>
+            <a:ext cx="7968344" cy="1658448"/>
+          </a:xfrm>
+        </p:spPr>
+        <p:txBody>
+          <a:bodyPr>
+            <a:noAutofit/>
+          </a:bodyPr>
+          <a:lstStyle/>
+          <a:p>
+            <a:r>
+              <a:rPr lang="fr-FR" sz="11500" dirty="0" smtClean="0">
+                <a:ln>
+                  <a:solidFill>
+                    <a:srgbClr val="C00000"/>
+                  </a:solidFill>
+                </a:ln>
+                <a:latin typeface="Algerian" panose="04020705040A02060702" pitchFamily="82" charset="0"/>
+              </a:rPr>
+              <a:t>THANK YOU</a:t>
+            </a:r>
+            <a:endParaRPr lang="en-IN" dirty="0">
+              <a:ln>
+                <a:solidFill>
+                  <a:srgbClr val="C00000"/>
+                </a:solidFill>
+              </a:ln>
+              <a:latin typeface="Algerian" panose="04020705040A02060702" pitchFamily="82" charset="0"/>
+            </a:endParaRPr>
+          </a:p>
+        </p:txBody>
+      </p:sp>
+    </p:spTree>
+    <p:extLst>
+      <p:ext uri="{BB962C8B-B14F-4D97-AF65-F5344CB8AC3E}">
+        <p14:creationId xmlns:p14="http://schemas.microsoft.com/office/powerpoint/2010/main" val="66669561"/>
+      </p:ext>
+    </p:extLst>
+  </p:cSld>
+  <p:clrMapOvr>
+    <a:masterClrMapping/>
+  </p:clrMapOvr>
+  <mc:AlternateContent xmlns:mc="http://schemas.openxmlformats.org/markup-compatibility/2006" xmlns:p14="http://schemas.microsoft.com/office/powerpoint/2010/main">
+    <mc:Choice Requires="p14">
+      <p:transition p14:dur="0"/>
+    </mc:Choice>
+    <mc:Fallback xmlns="">
+      <p:transition/>
+    </mc:Fallback>
+  </mc:AlternateContent>
+  <p:timing>
+    <p:tnLst>
+      <p:par>
+        <p:cTn id="1" dur="indefinite" restart="never" nodeType="tmRoot"/>
+      </p:par>
+    </p:tnLst>
+  </p:timing>
+</p:sld>
+</file>
+
 <file path=ppt/slides/slide3.xml><?xml version="1.0" encoding="utf-8"?>
 <p:sld xmlns:a="http://schemas.openxmlformats.org/drawingml/2006/main" xmlns:r="http://schemas.openxmlformats.org/officeDocument/2006/relationships" xmlns:p="http://schemas.openxmlformats.org/presentationml/2006/main">
   <p:cSld>
@@ -7579,6 +7678,365 @@
 </file>
 
 <file path=ppt/slides/slide4.xml><?xml version="1.0" encoding="utf-8"?>
+<p:sld xmlns:a="http://schemas.openxmlformats.org/drawingml/2006/main" xmlns:r="http://schemas.openxmlformats.org/officeDocument/2006/relationships" xmlns:p="http://schemas.openxmlformats.org/presentationml/2006/main">
+  <p:cSld>
+    <p:spTree>
+      <p:nvGrpSpPr>
+        <p:cNvPr id="1" name=""/>
+        <p:cNvGrpSpPr/>
+        <p:nvPr/>
+      </p:nvGrpSpPr>
+      <p:grpSpPr>
+        <a:xfrm>
+          <a:off x="0" y="0"/>
+          <a:ext cx="0" cy="0"/>
+          <a:chOff x="0" y="0"/>
+          <a:chExt cx="0" cy="0"/>
+        </a:xfrm>
+      </p:grpSpPr>
+      <p:sp>
+        <p:nvSpPr>
+          <p:cNvPr id="2" name="Title 1"/>
+          <p:cNvSpPr>
+            <a:spLocks noGrp="1"/>
+          </p:cNvSpPr>
+          <p:nvPr>
+            <p:ph type="ctrTitle"/>
+          </p:nvPr>
+        </p:nvSpPr>
+        <p:spPr>
+          <a:xfrm>
+            <a:off x="708109" y="478972"/>
+            <a:ext cx="2525488" cy="740229"/>
+          </a:xfrm>
+        </p:spPr>
+        <p:txBody>
+          <a:bodyPr/>
+          <a:lstStyle/>
+          <a:p>
+            <a:r>
+              <a:rPr lang="en-IN" sz="4800" u="sng" dirty="0"/>
+              <a:t>Problem</a:t>
+            </a:r>
+            <a:endParaRPr lang="en-IN" sz="6000" u="sng" dirty="0"/>
+          </a:p>
+        </p:txBody>
+      </p:sp>
+      <p:sp>
+        <p:nvSpPr>
+          <p:cNvPr id="6" name="Rectangle 1"/>
+          <p:cNvSpPr>
+            <a:spLocks noGrp="1" noChangeArrowheads="1"/>
+          </p:cNvSpPr>
+          <p:nvPr>
+            <p:ph type="subTitle" idx="1"/>
+          </p:nvPr>
+        </p:nvSpPr>
+        <p:spPr bwMode="auto">
+          <a:xfrm>
+            <a:off x="708109" y="1796021"/>
+            <a:ext cx="10708828" cy="3693319"/>
+          </a:xfrm>
+          <a:prstGeom prst="rect">
+            <a:avLst/>
+          </a:prstGeom>
+          <a:noFill/>
+          <a:ln>
+            <a:noFill/>
+          </a:ln>
+          <a:effectLst/>
+          <a:extLst>
+            <a:ext uri="{909E8E84-426E-40DD-AFC4-6F175D3DCCD1}">
+              <a14:hiddenFill xmlns:a14="http://schemas.microsoft.com/office/drawing/2010/main">
+                <a:solidFill>
+                  <a:schemeClr val="accent1"/>
+                </a:solidFill>
+              </a14:hiddenFill>
+            </a:ext>
+            <a:ext uri="{91240B29-F687-4F45-9708-019B960494DF}">
+              <a14:hiddenLine xmlns:a14="http://schemas.microsoft.com/office/drawing/2010/main" w="9525">
+                <a:solidFill>
+                  <a:schemeClr val="tx1"/>
+                </a:solidFill>
+                <a:miter lim="800000"/>
+                <a:headEnd/>
+                <a:tailEnd/>
+              </a14:hiddenLine>
+            </a:ext>
+            <a:ext uri="{AF507438-7753-43E0-B8FC-AC1667EBCBE1}">
+              <a14:hiddenEffects xmlns:a14="http://schemas.microsoft.com/office/drawing/2010/main">
+                <a:effectLst>
+                  <a:outerShdw dist="35921" dir="2700000" algn="ctr" rotWithShape="0">
+                    <a:schemeClr val="bg2"/>
+                  </a:outerShdw>
+                </a:effectLst>
+              </a14:hiddenEffects>
+            </a:ext>
+          </a:extLst>
+        </p:spPr>
+        <p:txBody>
+          <a:bodyPr vert="horz" wrap="square" lIns="91440" tIns="45720" rIns="91440" bIns="45720" numCol="1" anchor="ctr" anchorCtr="0" compatLnSpc="1">
+            <a:prstTxWarp prst="textNoShape">
+              <a:avLst/>
+            </a:prstTxWarp>
+            <a:spAutoFit/>
+          </a:bodyPr>
+          <a:lstStyle/>
+          <a:p>
+            <a:pPr marL="285750" lvl="0" indent="-285750" algn="just" eaLnBrk="0" fontAlgn="base" hangingPunct="0">
+              <a:lnSpc>
+                <a:spcPct val="100000"/>
+              </a:lnSpc>
+              <a:spcBef>
+                <a:spcPct val="0"/>
+              </a:spcBef>
+              <a:spcAft>
+                <a:spcPct val="0"/>
+              </a:spcAft>
+              <a:buClrTx/>
+              <a:buSzTx/>
+              <a:buFont typeface="Arial" panose="020B0604020202020204" pitchFamily="34" charset="0"/>
+              <a:buChar char="•"/>
+            </a:pPr>
+            <a:r>
+              <a:rPr lang="en-US" altLang="en-US" sz="1800" b="1" dirty="0">
+                <a:solidFill>
+                  <a:schemeClr val="tx1"/>
+                </a:solidFill>
+                <a:latin typeface="Arial" panose="020B0604020202020204" pitchFamily="34" charset="0"/>
+              </a:rPr>
+              <a:t>Code Incompatibility: The Main class cannot directly use XMLSoftware in place of JSONData.</a:t>
+            </a:r>
+          </a:p>
+          <a:p>
+            <a:pPr lvl="0" algn="just" eaLnBrk="0" fontAlgn="base" hangingPunct="0">
+              <a:lnSpc>
+                <a:spcPct val="100000"/>
+              </a:lnSpc>
+              <a:spcBef>
+                <a:spcPct val="0"/>
+              </a:spcBef>
+              <a:spcAft>
+                <a:spcPct val="0"/>
+              </a:spcAft>
+              <a:buClrTx/>
+              <a:buSzTx/>
+              <a:buFontTx/>
+              <a:buChar char="•"/>
+            </a:pPr>
+            <a:endParaRPr lang="en-US" altLang="en-US" sz="1800" b="1" dirty="0">
+              <a:solidFill>
+                <a:schemeClr val="tx1"/>
+              </a:solidFill>
+              <a:latin typeface="Arial" panose="020B0604020202020204" pitchFamily="34" charset="0"/>
+            </a:endParaRPr>
+          </a:p>
+          <a:p>
+            <a:pPr marL="285750" lvl="0" indent="-285750" algn="just" eaLnBrk="0" fontAlgn="base" hangingPunct="0">
+              <a:lnSpc>
+                <a:spcPct val="100000"/>
+              </a:lnSpc>
+              <a:spcBef>
+                <a:spcPct val="0"/>
+              </a:spcBef>
+              <a:spcAft>
+                <a:spcPct val="0"/>
+              </a:spcAft>
+              <a:buClrTx/>
+              <a:buSzTx/>
+              <a:buFont typeface="Arial" panose="020B0604020202020204" pitchFamily="34" charset="0"/>
+              <a:buChar char="•"/>
+            </a:pPr>
+            <a:r>
+              <a:rPr lang="en-US" altLang="en-US" sz="1800" b="1" dirty="0">
+                <a:solidFill>
+                  <a:schemeClr val="tx1"/>
+                </a:solidFill>
+                <a:latin typeface="Arial" panose="020B0604020202020204" pitchFamily="34" charset="0"/>
+              </a:rPr>
+              <a:t>Code Duplication: You may need to rewrite or duplicate logic to convert XML to JSON in multiple places.</a:t>
+            </a:r>
+          </a:p>
+          <a:p>
+            <a:pPr lvl="0" algn="just" eaLnBrk="0" fontAlgn="base" hangingPunct="0">
+              <a:lnSpc>
+                <a:spcPct val="100000"/>
+              </a:lnSpc>
+              <a:spcBef>
+                <a:spcPct val="0"/>
+              </a:spcBef>
+              <a:spcAft>
+                <a:spcPct val="0"/>
+              </a:spcAft>
+              <a:buClrTx/>
+              <a:buSzTx/>
+              <a:buFontTx/>
+              <a:buChar char="•"/>
+            </a:pPr>
+            <a:endParaRPr lang="en-US" altLang="en-US" sz="1800" b="1" dirty="0">
+              <a:solidFill>
+                <a:schemeClr val="tx1"/>
+              </a:solidFill>
+              <a:latin typeface="Arial" panose="020B0604020202020204" pitchFamily="34" charset="0"/>
+            </a:endParaRPr>
+          </a:p>
+          <a:p>
+            <a:pPr marL="285750" lvl="0" indent="-285750" algn="just" eaLnBrk="0" fontAlgn="base" hangingPunct="0">
+              <a:lnSpc>
+                <a:spcPct val="100000"/>
+              </a:lnSpc>
+              <a:spcBef>
+                <a:spcPct val="0"/>
+              </a:spcBef>
+              <a:spcAft>
+                <a:spcPct val="0"/>
+              </a:spcAft>
+              <a:buClrTx/>
+              <a:buSzTx/>
+              <a:buFont typeface="Arial" panose="020B0604020202020204" pitchFamily="34" charset="0"/>
+              <a:buChar char="•"/>
+            </a:pPr>
+            <a:r>
+              <a:rPr lang="en-US" altLang="en-US" sz="1800" b="1" dirty="0">
+                <a:solidFill>
+                  <a:schemeClr val="tx1"/>
+                </a:solidFill>
+                <a:latin typeface="Arial" panose="020B0604020202020204" pitchFamily="34" charset="0"/>
+              </a:rPr>
+              <a:t>Tight Coupling: Without an adapter, you're forced to tightly couple the client to specific data formats.</a:t>
+            </a:r>
+          </a:p>
+          <a:p>
+            <a:pPr lvl="0" algn="just" eaLnBrk="0" fontAlgn="base" hangingPunct="0">
+              <a:lnSpc>
+                <a:spcPct val="100000"/>
+              </a:lnSpc>
+              <a:spcBef>
+                <a:spcPct val="0"/>
+              </a:spcBef>
+              <a:spcAft>
+                <a:spcPct val="0"/>
+              </a:spcAft>
+              <a:buClrTx/>
+              <a:buSzTx/>
+              <a:buFontTx/>
+              <a:buChar char="•"/>
+            </a:pPr>
+            <a:endParaRPr lang="en-US" altLang="en-US" sz="1800" b="1" dirty="0">
+              <a:solidFill>
+                <a:schemeClr val="tx1"/>
+              </a:solidFill>
+              <a:latin typeface="Arial" panose="020B0604020202020204" pitchFamily="34" charset="0"/>
+            </a:endParaRPr>
+          </a:p>
+          <a:p>
+            <a:pPr marL="285750" lvl="0" indent="-285750" algn="just" eaLnBrk="0" fontAlgn="base" hangingPunct="0">
+              <a:lnSpc>
+                <a:spcPct val="100000"/>
+              </a:lnSpc>
+              <a:spcBef>
+                <a:spcPct val="0"/>
+              </a:spcBef>
+              <a:spcAft>
+                <a:spcPct val="0"/>
+              </a:spcAft>
+              <a:buClrTx/>
+              <a:buSzTx/>
+              <a:buFont typeface="Arial" panose="020B0604020202020204" pitchFamily="34" charset="0"/>
+              <a:buChar char="•"/>
+            </a:pPr>
+            <a:r>
+              <a:rPr lang="en-US" altLang="en-US" sz="1800" b="1" dirty="0">
+                <a:solidFill>
+                  <a:schemeClr val="tx1"/>
+                </a:solidFill>
+                <a:latin typeface="Arial" panose="020B0604020202020204" pitchFamily="34" charset="0"/>
+              </a:rPr>
+              <a:t>Reduced Flexibility and Reusability: You can’t plug in new data formats (like XML) into a system that only understands JSON without modifying existing code.</a:t>
+            </a:r>
+          </a:p>
+          <a:p>
+            <a:pPr lvl="0" algn="just" eaLnBrk="0" fontAlgn="base" hangingPunct="0">
+              <a:lnSpc>
+                <a:spcPct val="100000"/>
+              </a:lnSpc>
+              <a:spcBef>
+                <a:spcPct val="0"/>
+              </a:spcBef>
+              <a:spcAft>
+                <a:spcPct val="0"/>
+              </a:spcAft>
+              <a:buClrTx/>
+              <a:buSzTx/>
+              <a:buFontTx/>
+              <a:buChar char="•"/>
+            </a:pPr>
+            <a:endParaRPr lang="en-US" altLang="en-US" sz="1800" b="1" dirty="0">
+              <a:solidFill>
+                <a:schemeClr val="tx1"/>
+              </a:solidFill>
+              <a:latin typeface="Arial" panose="020B0604020202020204" pitchFamily="34" charset="0"/>
+            </a:endParaRPr>
+          </a:p>
+          <a:p>
+            <a:pPr marL="285750" lvl="0" indent="-285750" algn="just" eaLnBrk="0" fontAlgn="base" hangingPunct="0">
+              <a:lnSpc>
+                <a:spcPct val="100000"/>
+              </a:lnSpc>
+              <a:spcBef>
+                <a:spcPct val="0"/>
+              </a:spcBef>
+              <a:spcAft>
+                <a:spcPct val="0"/>
+              </a:spcAft>
+              <a:buClrTx/>
+              <a:buSzTx/>
+              <a:buFont typeface="Arial" panose="020B0604020202020204" pitchFamily="34" charset="0"/>
+              <a:buChar char="•"/>
+            </a:pPr>
+            <a:r>
+              <a:rPr lang="en-US" altLang="en-US" sz="1800" b="1" dirty="0">
+                <a:solidFill>
+                  <a:schemeClr val="tx1"/>
+                </a:solidFill>
+                <a:latin typeface="Arial" panose="020B0604020202020204" pitchFamily="34" charset="0"/>
+              </a:rPr>
+              <a:t>Violation of Open/Closed Principle: You’d need to modify existing classes (e.g., Main or JSONSoftware) instead of extending them.</a:t>
+            </a:r>
+            <a:endParaRPr kumimoji="0" lang="en-US" altLang="en-US" sz="1800" b="0" i="0" u="none" strike="noStrike" cap="none" normalizeH="0" baseline="0" dirty="0" smtClean="0">
+              <a:ln>
+                <a:noFill/>
+              </a:ln>
+              <a:solidFill>
+                <a:schemeClr val="tx1"/>
+              </a:solidFill>
+              <a:effectLst/>
+              <a:latin typeface="Arial" panose="020B0604020202020204" pitchFamily="34" charset="0"/>
+            </a:endParaRPr>
+          </a:p>
+        </p:txBody>
+      </p:sp>
+    </p:spTree>
+    <p:extLst>
+      <p:ext uri="{BB962C8B-B14F-4D97-AF65-F5344CB8AC3E}">
+        <p14:creationId xmlns:p14="http://schemas.microsoft.com/office/powerpoint/2010/main" val="797963055"/>
+      </p:ext>
+    </p:extLst>
+  </p:cSld>
+  <p:clrMapOvr>
+    <a:masterClrMapping/>
+  </p:clrMapOvr>
+  <p:timing>
+    <p:tnLst>
+      <p:par>
+        <p:cTn id="1" dur="indefinite" restart="never" nodeType="tmRoot"/>
+      </p:par>
+    </p:tnLst>
+  </p:timing>
+</p:sld>
+</file>
+
+<file path=ppt/slides/slide5.xml><?xml version="1.0" encoding="utf-8"?>
 <p:sld xmlns:a="http://schemas.openxmlformats.org/drawingml/2006/main" xmlns:r="http://schemas.openxmlformats.org/officeDocument/2006/relationships" xmlns:p="http://schemas.openxmlformats.org/presentationml/2006/main">
   <p:cSld>
     <p:spTree>
@@ -8077,7 +8535,7 @@
 </p:sld>
 </file>
 
-<file path=ppt/slides/slide5.xml><?xml version="1.0" encoding="utf-8"?>
+<file path=ppt/slides/slide6.xml><?xml version="1.0" encoding="utf-8"?>
 <p:sld xmlns:a="http://schemas.openxmlformats.org/drawingml/2006/main" xmlns:r="http://schemas.openxmlformats.org/officeDocument/2006/relationships" xmlns:p="http://schemas.openxmlformats.org/presentationml/2006/main">
   <p:cSld>
     <p:spTree>
@@ -8485,425 +8943,6 @@
 </p:sld>
 </file>
 
-<file path=ppt/slides/slide6.xml><?xml version="1.0" encoding="utf-8"?>
-<p:sld xmlns:a="http://schemas.openxmlformats.org/drawingml/2006/main" xmlns:r="http://schemas.openxmlformats.org/officeDocument/2006/relationships" xmlns:p="http://schemas.openxmlformats.org/presentationml/2006/main">
-  <p:cSld>
-    <p:spTree>
-      <p:nvGrpSpPr>
-        <p:cNvPr id="1" name=""/>
-        <p:cNvGrpSpPr/>
-        <p:nvPr/>
-      </p:nvGrpSpPr>
-      <p:grpSpPr>
-        <a:xfrm>
-          <a:off x="0" y="0"/>
-          <a:ext cx="0" cy="0"/>
-          <a:chOff x="0" y="0"/>
-          <a:chExt cx="0" cy="0"/>
-        </a:xfrm>
-      </p:grpSpPr>
-      <p:sp>
-        <p:nvSpPr>
-          <p:cNvPr id="2" name="Title 1"/>
-          <p:cNvSpPr>
-            <a:spLocks noGrp="1"/>
-          </p:cNvSpPr>
-          <p:nvPr>
-            <p:ph type="ctrTitle"/>
-          </p:nvPr>
-        </p:nvSpPr>
-        <p:spPr>
-          <a:xfrm>
-            <a:off x="2743197" y="155681"/>
-            <a:ext cx="7167157" cy="966652"/>
-          </a:xfrm>
-        </p:spPr>
-        <p:txBody>
-          <a:bodyPr anchor="ctr">
-            <a:normAutofit fontScale="90000"/>
-          </a:bodyPr>
-          <a:lstStyle/>
-          <a:p>
-            <a:pPr algn="ctr"/>
-            <a:r>
-              <a:rPr lang="en-IN" sz="4800" b="1" u="sng" dirty="0" smtClean="0"/>
-              <a:t>Adapter Design Pattern</a:t>
-            </a:r>
-            <a:endParaRPr lang="en-IN" sz="6000" b="1" u="sng" dirty="0"/>
-          </a:p>
-        </p:txBody>
-      </p:sp>
-      <p:sp>
-        <p:nvSpPr>
-          <p:cNvPr id="10" name="Subtitle 2"/>
-          <p:cNvSpPr txBox="1">
-            <a:spLocks/>
-          </p:cNvSpPr>
-          <p:nvPr/>
-        </p:nvSpPr>
-        <p:spPr>
-          <a:xfrm>
-            <a:off x="1014546" y="1555555"/>
-            <a:ext cx="10624457" cy="2659393"/>
-          </a:xfrm>
-          <a:prstGeom prst="rect">
-            <a:avLst/>
-          </a:prstGeom>
-        </p:spPr>
-        <p:txBody>
-          <a:bodyPr vert="horz" lIns="91440" tIns="45720" rIns="91440" bIns="45720" rtlCol="0">
-            <a:noAutofit/>
-          </a:bodyPr>
-          <a:lstStyle>
-            <a:lvl1pPr marL="0" indent="0" algn="l" defTabSz="914400" rtl="0" eaLnBrk="1" latinLnBrk="0" hangingPunct="1">
-              <a:lnSpc>
-                <a:spcPct val="95000"/>
-              </a:lnSpc>
-              <a:spcBef>
-                <a:spcPts val="1400"/>
-              </a:spcBef>
-              <a:spcAft>
-                <a:spcPts val="200"/>
-              </a:spcAft>
-              <a:buClr>
-                <a:schemeClr val="accent1"/>
-              </a:buClr>
-              <a:buSzPct val="80000"/>
-              <a:buFont typeface="Arial" pitchFamily="34" charset="0"/>
-              <a:buNone/>
-              <a:defRPr sz="2200" kern="1200" spc="10" baseline="0">
-                <a:solidFill>
-                  <a:schemeClr val="tx1">
-                    <a:lumMod val="75000"/>
-                  </a:schemeClr>
-                </a:solidFill>
-                <a:latin typeface="+mn-lt"/>
-                <a:ea typeface="+mn-ea"/>
-                <a:cs typeface="+mn-cs"/>
-              </a:defRPr>
-            </a:lvl1pPr>
-            <a:lvl2pPr marL="457200" indent="0" algn="ctr" defTabSz="914400" rtl="0" eaLnBrk="1" latinLnBrk="0" hangingPunct="1">
-              <a:lnSpc>
-                <a:spcPct val="90000"/>
-              </a:lnSpc>
-              <a:spcBef>
-                <a:spcPts val="300"/>
-              </a:spcBef>
-              <a:spcAft>
-                <a:spcPts val="300"/>
-              </a:spcAft>
-              <a:buClr>
-                <a:schemeClr val="accent1"/>
-              </a:buClr>
-              <a:buFont typeface="Wingdings 2" pitchFamily="18" charset="2"/>
-              <a:buNone/>
-              <a:defRPr sz="2200" kern="1200">
-                <a:solidFill>
-                  <a:schemeClr val="tx1">
-                    <a:lumMod val="85000"/>
-                    <a:lumOff val="15000"/>
-                  </a:schemeClr>
-                </a:solidFill>
-                <a:latin typeface="+mn-lt"/>
-                <a:ea typeface="+mn-ea"/>
-                <a:cs typeface="+mn-cs"/>
-              </a:defRPr>
-            </a:lvl2pPr>
-            <a:lvl3pPr marL="914400" indent="0" algn="ctr" defTabSz="914400" rtl="0" eaLnBrk="1" latinLnBrk="0" hangingPunct="1">
-              <a:lnSpc>
-                <a:spcPct val="90000"/>
-              </a:lnSpc>
-              <a:spcBef>
-                <a:spcPts val="300"/>
-              </a:spcBef>
-              <a:spcAft>
-                <a:spcPts val="300"/>
-              </a:spcAft>
-              <a:buClr>
-                <a:schemeClr val="accent1"/>
-              </a:buClr>
-              <a:buFont typeface="Wingdings 2" pitchFamily="18" charset="2"/>
-              <a:buNone/>
-              <a:defRPr sz="2200" kern="1200">
-                <a:solidFill>
-                  <a:schemeClr val="tx1">
-                    <a:lumMod val="85000"/>
-                    <a:lumOff val="15000"/>
-                  </a:schemeClr>
-                </a:solidFill>
-                <a:latin typeface="+mn-lt"/>
-                <a:ea typeface="+mn-ea"/>
-                <a:cs typeface="+mn-cs"/>
-              </a:defRPr>
-            </a:lvl3pPr>
-            <a:lvl4pPr marL="1371600" indent="0" algn="ctr" defTabSz="914400" rtl="0" eaLnBrk="1" latinLnBrk="0" hangingPunct="1">
-              <a:lnSpc>
-                <a:spcPct val="90000"/>
-              </a:lnSpc>
-              <a:spcBef>
-                <a:spcPts val="300"/>
-              </a:spcBef>
-              <a:spcAft>
-                <a:spcPts val="300"/>
-              </a:spcAft>
-              <a:buClr>
-                <a:schemeClr val="accent1"/>
-              </a:buClr>
-              <a:buFont typeface="Wingdings 2" pitchFamily="18" charset="2"/>
-              <a:buNone/>
-              <a:defRPr sz="2000" kern="1200">
-                <a:solidFill>
-                  <a:schemeClr val="tx1">
-                    <a:lumMod val="85000"/>
-                    <a:lumOff val="15000"/>
-                  </a:schemeClr>
-                </a:solidFill>
-                <a:latin typeface="+mn-lt"/>
-                <a:ea typeface="+mn-ea"/>
-                <a:cs typeface="+mn-cs"/>
-              </a:defRPr>
-            </a:lvl4pPr>
-            <a:lvl5pPr marL="1828800" indent="0" algn="ctr" defTabSz="914400" rtl="0" eaLnBrk="1" latinLnBrk="0" hangingPunct="1">
-              <a:lnSpc>
-                <a:spcPct val="90000"/>
-              </a:lnSpc>
-              <a:spcBef>
-                <a:spcPts val="300"/>
-              </a:spcBef>
-              <a:spcAft>
-                <a:spcPts val="300"/>
-              </a:spcAft>
-              <a:buClr>
-                <a:schemeClr val="accent1"/>
-              </a:buClr>
-              <a:buFont typeface="Wingdings 2" pitchFamily="18" charset="2"/>
-              <a:buNone/>
-              <a:defRPr sz="2000" kern="1200">
-                <a:solidFill>
-                  <a:schemeClr val="tx1">
-                    <a:lumMod val="85000"/>
-                    <a:lumOff val="15000"/>
-                  </a:schemeClr>
-                </a:solidFill>
-                <a:latin typeface="+mn-lt"/>
-                <a:ea typeface="+mn-ea"/>
-                <a:cs typeface="+mn-cs"/>
-              </a:defRPr>
-            </a:lvl5pPr>
-            <a:lvl6pPr marL="2286000" indent="0" algn="ctr" defTabSz="914400" rtl="0" eaLnBrk="1" latinLnBrk="0" hangingPunct="1">
-              <a:lnSpc>
-                <a:spcPct val="90000"/>
-              </a:lnSpc>
-              <a:spcBef>
-                <a:spcPts val="300"/>
-              </a:spcBef>
-              <a:spcAft>
-                <a:spcPts val="300"/>
-              </a:spcAft>
-              <a:buClr>
-                <a:schemeClr val="accent1"/>
-              </a:buClr>
-              <a:buFont typeface="Wingdings 2" pitchFamily="18" charset="2"/>
-              <a:buNone/>
-              <a:defRPr sz="2000" kern="1200">
-                <a:solidFill>
-                  <a:schemeClr val="tx1">
-                    <a:lumMod val="85000"/>
-                    <a:lumOff val="15000"/>
-                  </a:schemeClr>
-                </a:solidFill>
-                <a:latin typeface="+mn-lt"/>
-                <a:ea typeface="+mn-ea"/>
-                <a:cs typeface="+mn-cs"/>
-              </a:defRPr>
-            </a:lvl6pPr>
-            <a:lvl7pPr marL="2743200" indent="0" algn="ctr" defTabSz="914400" rtl="0" eaLnBrk="1" latinLnBrk="0" hangingPunct="1">
-              <a:lnSpc>
-                <a:spcPct val="90000"/>
-              </a:lnSpc>
-              <a:spcBef>
-                <a:spcPts val="300"/>
-              </a:spcBef>
-              <a:spcAft>
-                <a:spcPts val="300"/>
-              </a:spcAft>
-              <a:buClr>
-                <a:schemeClr val="accent1"/>
-              </a:buClr>
-              <a:buFont typeface="Wingdings 2" pitchFamily="18" charset="2"/>
-              <a:buNone/>
-              <a:defRPr sz="2000" kern="1200">
-                <a:solidFill>
-                  <a:schemeClr val="tx1">
-                    <a:lumMod val="85000"/>
-                    <a:lumOff val="15000"/>
-                  </a:schemeClr>
-                </a:solidFill>
-                <a:latin typeface="+mn-lt"/>
-                <a:ea typeface="+mn-ea"/>
-                <a:cs typeface="+mn-cs"/>
-              </a:defRPr>
-            </a:lvl7pPr>
-            <a:lvl8pPr marL="3200400" indent="0" algn="ctr" defTabSz="914400" rtl="0" eaLnBrk="1" latinLnBrk="0" hangingPunct="1">
-              <a:lnSpc>
-                <a:spcPct val="90000"/>
-              </a:lnSpc>
-              <a:spcBef>
-                <a:spcPts val="300"/>
-              </a:spcBef>
-              <a:spcAft>
-                <a:spcPts val="300"/>
-              </a:spcAft>
-              <a:buClr>
-                <a:schemeClr val="accent1"/>
-              </a:buClr>
-              <a:buFont typeface="Wingdings 2" pitchFamily="18" charset="2"/>
-              <a:buNone/>
-              <a:defRPr sz="2000" kern="1200">
-                <a:solidFill>
-                  <a:schemeClr val="tx1">
-                    <a:lumMod val="85000"/>
-                    <a:lumOff val="15000"/>
-                  </a:schemeClr>
-                </a:solidFill>
-                <a:latin typeface="+mn-lt"/>
-                <a:ea typeface="+mn-ea"/>
-                <a:cs typeface="+mn-cs"/>
-              </a:defRPr>
-            </a:lvl8pPr>
-            <a:lvl9pPr marL="3657600" indent="0" algn="ctr" defTabSz="914400" rtl="0" eaLnBrk="1" latinLnBrk="0" hangingPunct="1">
-              <a:lnSpc>
-                <a:spcPct val="90000"/>
-              </a:lnSpc>
-              <a:spcBef>
-                <a:spcPts val="300"/>
-              </a:spcBef>
-              <a:spcAft>
-                <a:spcPts val="300"/>
-              </a:spcAft>
-              <a:buClr>
-                <a:schemeClr val="accent1"/>
-              </a:buClr>
-              <a:buFont typeface="Wingdings 2" pitchFamily="18" charset="2"/>
-              <a:buNone/>
-              <a:defRPr sz="2000" kern="1200">
-                <a:solidFill>
-                  <a:schemeClr val="tx1">
-                    <a:lumMod val="85000"/>
-                    <a:lumOff val="15000"/>
-                  </a:schemeClr>
-                </a:solidFill>
-                <a:latin typeface="+mn-lt"/>
-                <a:ea typeface="+mn-ea"/>
-                <a:cs typeface="+mn-cs"/>
-              </a:defRPr>
-            </a:lvl9pPr>
-          </a:lstStyle>
-          <a:p>
-            <a:pPr marL="342900" indent="-342900" algn="just">
-              <a:buClr>
-                <a:schemeClr val="tx1"/>
-              </a:buClr>
-              <a:buSzPct val="120000"/>
-              <a:buFont typeface="Arial" panose="020B0604020202020204" pitchFamily="34" charset="0"/>
-              <a:buChar char="•"/>
-            </a:pPr>
-            <a:r>
-              <a:rPr lang="en-US" sz="2400" b="1" dirty="0">
-                <a:solidFill>
-                  <a:schemeClr val="tx1"/>
-                </a:solidFill>
-              </a:rPr>
-              <a:t>The Adapter design pattern is a structural </a:t>
-            </a:r>
-            <a:r>
-              <a:rPr lang="en-US" sz="2400" b="1" dirty="0" smtClean="0">
-                <a:solidFill>
-                  <a:schemeClr val="tx1"/>
-                </a:solidFill>
-              </a:rPr>
-              <a:t>pattern.</a:t>
-            </a:r>
-          </a:p>
-          <a:p>
-            <a:pPr marL="342900" indent="-342900" algn="just">
-              <a:buClr>
-                <a:schemeClr val="tx1"/>
-              </a:buClr>
-              <a:buSzPct val="120000"/>
-              <a:buFont typeface="Arial" panose="020B0604020202020204" pitchFamily="34" charset="0"/>
-              <a:buChar char="•"/>
-            </a:pPr>
-            <a:r>
-              <a:rPr lang="en-US" sz="2400" b="1" dirty="0" smtClean="0">
-                <a:solidFill>
-                  <a:schemeClr val="tx1"/>
-                </a:solidFill>
-              </a:rPr>
-              <a:t>It allows </a:t>
-            </a:r>
-            <a:r>
-              <a:rPr lang="en-US" sz="2400" b="1" dirty="0">
-                <a:solidFill>
-                  <a:schemeClr val="tx1"/>
-                </a:solidFill>
-              </a:rPr>
-              <a:t>incompatible interfaces to work together by converting the interface of one class (the "adaptee") into another interface that clients expect (the "target"). </a:t>
-            </a:r>
-            <a:endParaRPr lang="en-US" sz="2400" b="1" dirty="0" smtClean="0">
-              <a:solidFill>
-                <a:schemeClr val="tx1"/>
-              </a:solidFill>
-            </a:endParaRPr>
-          </a:p>
-          <a:p>
-            <a:pPr marL="342900" indent="-342900" algn="just">
-              <a:buClr>
-                <a:schemeClr val="tx1"/>
-              </a:buClr>
-              <a:buSzPct val="120000"/>
-              <a:buFont typeface="Arial" panose="020B0604020202020204" pitchFamily="34" charset="0"/>
-              <a:buChar char="•"/>
-            </a:pPr>
-            <a:r>
-              <a:rPr lang="en-US" sz="2400" b="1" dirty="0" smtClean="0">
-                <a:solidFill>
-                  <a:schemeClr val="tx1"/>
-                </a:solidFill>
-              </a:rPr>
-              <a:t>It </a:t>
-            </a:r>
-            <a:r>
-              <a:rPr lang="en-US" sz="2400" b="1" dirty="0">
-                <a:solidFill>
-                  <a:schemeClr val="tx1"/>
-                </a:solidFill>
-              </a:rPr>
-              <a:t>essentially acts as a bridge, enabling classes with different interfaces to collaborate. </a:t>
-            </a:r>
-          </a:p>
-        </p:txBody>
-      </p:sp>
-    </p:spTree>
-    <p:extLst>
-      <p:ext uri="{BB962C8B-B14F-4D97-AF65-F5344CB8AC3E}">
-        <p14:creationId xmlns:p14="http://schemas.microsoft.com/office/powerpoint/2010/main" val="3792031785"/>
-      </p:ext>
-    </p:extLst>
-  </p:cSld>
-  <p:clrMapOvr>
-    <a:masterClrMapping/>
-  </p:clrMapOvr>
-  <p:timing>
-    <p:tnLst>
-      <p:par>
-        <p:cTn id="1" dur="indefinite" restart="never" nodeType="tmRoot"/>
-      </p:par>
-    </p:tnLst>
-  </p:timing>
-</p:sld>
-</file>
-
 <file path=ppt/slides/slide7.xml><?xml version="1.0" encoding="utf-8"?>
 <p:sld xmlns:a="http://schemas.openxmlformats.org/drawingml/2006/main" xmlns:r="http://schemas.openxmlformats.org/officeDocument/2006/relationships" xmlns:p="http://schemas.openxmlformats.org/presentationml/2006/main">
   <p:cSld>
@@ -8933,26 +8972,22 @@
         </p:nvSpPr>
         <p:spPr>
           <a:xfrm>
-            <a:off x="2050864" y="556275"/>
-            <a:ext cx="8290563" cy="966652"/>
+            <a:off x="2743197" y="155681"/>
+            <a:ext cx="7167157" cy="966652"/>
           </a:xfrm>
         </p:spPr>
         <p:txBody>
           <a:bodyPr anchor="ctr">
-            <a:noAutofit/>
+            <a:normAutofit fontScale="90000"/>
           </a:bodyPr>
           <a:lstStyle/>
           <a:p>
             <a:pPr algn="ctr"/>
             <a:r>
-              <a:rPr lang="en-US" sz="3600" b="1" u="sng" dirty="0" smtClean="0"/>
-              <a:t>Why </a:t>
-            </a:r>
-            <a:r>
-              <a:rPr lang="en-US" sz="3600" b="1" u="sng" dirty="0"/>
-              <a:t>the Adapter Design Pattern a Structural Pattern?</a:t>
-            </a:r>
-            <a:endParaRPr lang="en-IN" sz="4400" b="1" u="sng" dirty="0"/>
+              <a:rPr lang="en-IN" sz="4800" b="1" u="sng" dirty="0" smtClean="0"/>
+              <a:t>Adapter Design Pattern</a:t>
+            </a:r>
+            <a:endParaRPr lang="en-IN" sz="6000" b="1" u="sng" dirty="0"/>
           </a:p>
         </p:txBody>
       </p:sp>
@@ -8966,8 +9001,8 @@
         </p:nvSpPr>
         <p:spPr>
           <a:xfrm>
-            <a:off x="883918" y="2374161"/>
-            <a:ext cx="10624457" cy="2911943"/>
+            <a:off x="1014546" y="1555555"/>
+            <a:ext cx="10624457" cy="2659393"/>
           </a:xfrm>
           <a:prstGeom prst="rect">
             <a:avLst/>
@@ -9237,7 +9272,7 @@
                   <a:schemeClr val="tx1"/>
                 </a:solidFill>
               </a:rPr>
-              <a:t>The Adapter Design Pattern is a structural pattern because it focuses on the structure of the system by connecting two incompatible interfaces without modifying their existing code</a:t>
+              <a:t>The Adapter design pattern is a structural </a:t>
             </a:r>
             <a:r>
               <a:rPr lang="en-US" sz="2400" b="1" dirty="0" smtClean="0">
@@ -9245,7 +9280,7 @@
                   <a:schemeClr val="tx1"/>
                 </a:solidFill>
               </a:rPr>
-              <a:t>.</a:t>
+              <a:t>pattern.</a:t>
             </a:r>
           </a:p>
           <a:p>
@@ -9258,29 +9293,29 @@
               <a:buChar char="•"/>
             </a:pPr>
             <a:r>
-              <a:rPr lang="en-IN" sz="2400" b="1" dirty="0">
+              <a:rPr lang="en-US" sz="2400" b="1" dirty="0" smtClean="0">
                 <a:solidFill>
                   <a:schemeClr val="tx1"/>
                 </a:solidFill>
               </a:rPr>
-              <a:t>Key Reasons</a:t>
-            </a:r>
-            <a:r>
-              <a:rPr lang="en-IN" sz="2400" b="1" dirty="0" smtClean="0">
+              <a:t>It allows </a:t>
+            </a:r>
+            <a:r>
+              <a:rPr lang="en-US" sz="2400" b="1" dirty="0">
                 <a:solidFill>
                   <a:schemeClr val="tx1"/>
                 </a:solidFill>
               </a:rPr>
-              <a:t>:</a:t>
-            </a:r>
-            <a:endParaRPr lang="en-IN" sz="2400" b="1" dirty="0">
+              <a:t>incompatible interfaces to work together by converting the interface of one class (the "adaptee") into another interface that clients expect (the "target"). </a:t>
+            </a:r>
+            <a:endParaRPr lang="en-US" sz="2400" b="1" dirty="0" smtClean="0">
               <a:solidFill>
                 <a:schemeClr val="tx1"/>
               </a:solidFill>
             </a:endParaRPr>
           </a:p>
           <a:p>
-            <a:pPr marL="1257300" lvl="2" indent="-342900" algn="just">
+            <a:pPr marL="342900" indent="-342900" algn="just">
               <a:buClr>
                 <a:schemeClr val="tx1"/>
               </a:buClr>
@@ -9289,77 +9324,28 @@
               <a:buChar char="•"/>
             </a:pPr>
             <a:r>
-              <a:rPr lang="en-IN" sz="2000" b="1" dirty="0">
+              <a:rPr lang="en-US" sz="2400" b="1" dirty="0" smtClean="0">
                 <a:solidFill>
                   <a:schemeClr val="tx1"/>
                 </a:solidFill>
               </a:rPr>
-              <a:t>Connects Different </a:t>
-            </a:r>
-            <a:r>
-              <a:rPr lang="en-IN" sz="2000" b="1" dirty="0" smtClean="0">
+              <a:t>It </a:t>
+            </a:r>
+            <a:r>
+              <a:rPr lang="en-US" sz="2400" b="1" dirty="0">
                 <a:solidFill>
                   <a:schemeClr val="tx1"/>
                 </a:solidFill>
               </a:rPr>
-              <a:t>Structures</a:t>
-            </a:r>
-          </a:p>
-          <a:p>
-            <a:pPr marL="1257300" lvl="2" indent="-342900" algn="just">
-              <a:buClr>
-                <a:schemeClr val="tx1"/>
-              </a:buClr>
-              <a:buSzPct val="120000"/>
-              <a:buFont typeface="Arial" panose="020B0604020202020204" pitchFamily="34" charset="0"/>
-              <a:buChar char="•"/>
-            </a:pPr>
-            <a:r>
-              <a:rPr lang="en-US" sz="2000" b="1" dirty="0">
-                <a:solidFill>
-                  <a:schemeClr val="tx1"/>
-                </a:solidFill>
-              </a:rPr>
-              <a:t>Does Not Change Original </a:t>
-            </a:r>
-            <a:r>
-              <a:rPr lang="en-US" sz="2000" b="1" dirty="0" smtClean="0">
-                <a:solidFill>
-                  <a:schemeClr val="tx1"/>
-                </a:solidFill>
-              </a:rPr>
-              <a:t>Classes</a:t>
-            </a:r>
-          </a:p>
-          <a:p>
-            <a:pPr marL="1257300" lvl="2" indent="-342900" algn="just">
-              <a:buClr>
-                <a:schemeClr val="tx1"/>
-              </a:buClr>
-              <a:buSzPct val="120000"/>
-              <a:buFont typeface="Arial" panose="020B0604020202020204" pitchFamily="34" charset="0"/>
-              <a:buChar char="•"/>
-            </a:pPr>
-            <a:r>
-              <a:rPr lang="en-IN" sz="2000" b="1" dirty="0">
-                <a:solidFill>
-                  <a:schemeClr val="tx1"/>
-                </a:solidFill>
-              </a:rPr>
-              <a:t>Follows Open/Closed Principle</a:t>
-            </a:r>
-            <a:endParaRPr lang="en-US" sz="2000" b="1" dirty="0">
-              <a:solidFill>
-                <a:schemeClr val="tx1"/>
-              </a:solidFill>
-            </a:endParaRPr>
+              <a:t>essentially acts as a bridge, enabling classes with different interfaces to collaborate. </a:t>
+            </a:r>
           </a:p>
         </p:txBody>
       </p:sp>
     </p:spTree>
     <p:extLst>
       <p:ext uri="{BB962C8B-B14F-4D97-AF65-F5344CB8AC3E}">
-        <p14:creationId xmlns:p14="http://schemas.microsoft.com/office/powerpoint/2010/main" val="1550072786"/>
+        <p14:creationId xmlns:p14="http://schemas.microsoft.com/office/powerpoint/2010/main" val="3792031785"/>
       </p:ext>
     </p:extLst>
   </p:cSld>
@@ -9405,107 +9391,26 @@
         </p:nvSpPr>
         <p:spPr>
           <a:xfrm>
-            <a:off x="714099" y="104505"/>
-            <a:ext cx="2081350" cy="747865"/>
+            <a:off x="2050864" y="556275"/>
+            <a:ext cx="8290563" cy="966652"/>
           </a:xfrm>
         </p:spPr>
         <p:txBody>
-          <a:bodyPr/>
-          <a:lstStyle/>
-          <a:p>
-            <a:r>
-              <a:rPr lang="en-IN" sz="4800" u="sng" dirty="0"/>
-              <a:t>Intent</a:t>
-            </a:r>
-            <a:endParaRPr lang="en-IN" sz="6000" u="sng" dirty="0"/>
-          </a:p>
-        </p:txBody>
-      </p:sp>
-      <p:sp>
-        <p:nvSpPr>
-          <p:cNvPr id="3" name="Subtitle 2"/>
-          <p:cNvSpPr>
-            <a:spLocks noGrp="1"/>
-          </p:cNvSpPr>
-          <p:nvPr>
-            <p:ph type="subTitle" idx="1"/>
-          </p:nvPr>
-        </p:nvSpPr>
-        <p:spPr>
-          <a:xfrm>
-            <a:off x="714099" y="1297581"/>
-            <a:ext cx="10624457" cy="896980"/>
-          </a:xfrm>
-        </p:spPr>
-        <p:txBody>
-          <a:bodyPr>
-            <a:normAutofit/>
+          <a:bodyPr anchor="ctr">
+            <a:noAutofit/>
           </a:bodyPr>
           <a:lstStyle/>
           <a:p>
-            <a:pPr algn="just"/>
-            <a:r>
-              <a:rPr lang="en-US" b="1" dirty="0">
-                <a:solidFill>
-                  <a:schemeClr val="tx1"/>
-                </a:solidFill>
-              </a:rPr>
-              <a:t>Adapter is a structural design pattern that allows objects with incompatible interfaces to collaborate.</a:t>
-            </a:r>
-            <a:endParaRPr lang="en-IN" b="1" dirty="0">
-              <a:solidFill>
-                <a:schemeClr val="tx1"/>
-              </a:solidFill>
-            </a:endParaRPr>
-          </a:p>
-        </p:txBody>
-      </p:sp>
-      <p:sp>
-        <p:nvSpPr>
-          <p:cNvPr id="4" name="Title 1"/>
-          <p:cNvSpPr txBox="1">
-            <a:spLocks/>
-          </p:cNvSpPr>
-          <p:nvPr/>
-        </p:nvSpPr>
-        <p:spPr>
-          <a:xfrm>
-            <a:off x="714099" y="2639772"/>
-            <a:ext cx="3413760" cy="722811"/>
-          </a:xfrm>
-          <a:prstGeom prst="rect">
-            <a:avLst/>
-          </a:prstGeom>
-        </p:spPr>
-        <p:txBody>
-          <a:bodyPr vert="horz" lIns="91440" tIns="45720" rIns="91440" bIns="45720" rtlCol="0" anchor="b">
-            <a:normAutofit/>
-          </a:bodyPr>
-          <a:lstStyle>
-            <a:lvl1pPr algn="l" defTabSz="914400" rtl="0" eaLnBrk="1" latinLnBrk="0" hangingPunct="1">
-              <a:lnSpc>
-                <a:spcPct val="85000"/>
-              </a:lnSpc>
-              <a:spcBef>
-                <a:spcPct val="0"/>
-              </a:spcBef>
-              <a:buNone/>
-              <a:defRPr sz="7200" kern="1200" spc="-50" baseline="0">
-                <a:solidFill>
-                  <a:schemeClr val="tx1"/>
-                </a:solidFill>
-                <a:latin typeface="+mj-lt"/>
-                <a:ea typeface="+mj-ea"/>
-                <a:cs typeface="+mj-cs"/>
-              </a:defRPr>
-            </a:lvl1pPr>
-          </a:lstStyle>
-          <a:p>
-            <a:r>
-              <a:rPr lang="en-IN" sz="4800" u="sng" dirty="0"/>
-              <a:t>Motivation</a:t>
-            </a:r>
-            <a:endParaRPr lang="en-IN" sz="6000" u="sng" dirty="0"/>
+            <a:pPr algn="ctr"/>
+            <a:r>
+              <a:rPr lang="en-US" sz="3600" b="1" u="sng" dirty="0" smtClean="0"/>
+              <a:t>Why </a:t>
+            </a:r>
+            <a:r>
+              <a:rPr lang="en-US" sz="3600" b="1" u="sng" dirty="0"/>
+              <a:t>the Adapter Design Pattern a Structural Pattern?</a:t>
+            </a:r>
+            <a:endParaRPr lang="en-IN" sz="4400" b="1" u="sng" dirty="0"/>
           </a:p>
         </p:txBody>
       </p:sp>
@@ -9519,8 +9424,8 @@
         </p:nvSpPr>
         <p:spPr>
           <a:xfrm>
-            <a:off x="714099" y="3807794"/>
-            <a:ext cx="11077306" cy="2706217"/>
+            <a:off x="883918" y="2374161"/>
+            <a:ext cx="10624457" cy="2911943"/>
           </a:xfrm>
           <a:prstGeom prst="rect">
             <a:avLst/>
@@ -9776,22 +9681,143 @@
             </a:lvl9pPr>
           </a:lstStyle>
           <a:p>
-            <a:pPr algn="just"/>
-            <a:r>
-              <a:rPr lang="en-US" b="1" dirty="0">
+            <a:pPr marL="342900" indent="-342900" algn="just">
+              <a:buClr>
+                <a:schemeClr val="tx1"/>
+              </a:buClr>
+              <a:buSzPct val="120000"/>
+              <a:buFont typeface="Arial" panose="020B0604020202020204" pitchFamily="34" charset="0"/>
+              <a:buChar char="•"/>
+            </a:pPr>
+            <a:r>
+              <a:rPr lang="en-US" sz="2400" b="1" dirty="0">
                 <a:solidFill>
                   <a:schemeClr val="tx1"/>
                 </a:solidFill>
               </a:rPr>
-              <a:t>Imagine an old application that exchanges data using XML format, but a new application is designed to use JSON because it is lightweight and easier to parse. Direct communication between these systems is not possible due to their differing data formats. Instead of modifying the old application, which could be complex and risky, an Adapter can be introduced. This Adapter acts as a bridge, converting XML requests into JSON format and vice versa, allowing seamless communication between the two systems without altering their core implementations.</a:t>
-            </a:r>
+              <a:t>The Adapter Design Pattern is a structural pattern because it focuses on the structure of the system by connecting two incompatible interfaces without modifying their existing code</a:t>
+            </a:r>
+            <a:r>
+              <a:rPr lang="en-US" sz="2400" b="1" dirty="0" smtClean="0">
+                <a:solidFill>
+                  <a:schemeClr val="tx1"/>
+                </a:solidFill>
+              </a:rPr>
+              <a:t>.</a:t>
+            </a:r>
+          </a:p>
+          <a:p>
+            <a:pPr marL="342900" indent="-342900" algn="just">
+              <a:buClr>
+                <a:schemeClr val="tx1"/>
+              </a:buClr>
+              <a:buSzPct val="120000"/>
+              <a:buFont typeface="Arial" panose="020B0604020202020204" pitchFamily="34" charset="0"/>
+              <a:buChar char="•"/>
+            </a:pPr>
+            <a:r>
+              <a:rPr lang="en-IN" sz="2400" b="1" dirty="0">
+                <a:solidFill>
+                  <a:schemeClr val="tx1"/>
+                </a:solidFill>
+              </a:rPr>
+              <a:t>Key Reasons</a:t>
+            </a:r>
+            <a:r>
+              <a:rPr lang="en-IN" sz="2400" b="1" dirty="0" smtClean="0">
+                <a:solidFill>
+                  <a:schemeClr val="tx1"/>
+                </a:solidFill>
+              </a:rPr>
+              <a:t>:</a:t>
+            </a:r>
+            <a:endParaRPr lang="en-IN" sz="2400" b="1" dirty="0">
+              <a:solidFill>
+                <a:schemeClr val="tx1"/>
+              </a:solidFill>
+            </a:endParaRPr>
+          </a:p>
+          <a:p>
+            <a:pPr marL="1257300" lvl="2" indent="-342900" algn="just">
+              <a:buClr>
+                <a:schemeClr val="tx1"/>
+              </a:buClr>
+              <a:buSzPct val="120000"/>
+              <a:buFont typeface="Arial" panose="020B0604020202020204" pitchFamily="34" charset="0"/>
+              <a:buChar char="•"/>
+            </a:pPr>
+            <a:r>
+              <a:rPr lang="en-IN" sz="2000" b="1" dirty="0">
+                <a:solidFill>
+                  <a:schemeClr val="tx1"/>
+                </a:solidFill>
+              </a:rPr>
+              <a:t>Connects Different </a:t>
+            </a:r>
+            <a:r>
+              <a:rPr lang="en-IN" sz="2000" b="1" dirty="0" smtClean="0">
+                <a:solidFill>
+                  <a:schemeClr val="tx1"/>
+                </a:solidFill>
+              </a:rPr>
+              <a:t>Structures</a:t>
+            </a:r>
+          </a:p>
+          <a:p>
+            <a:pPr marL="1257300" lvl="2" indent="-342900" algn="just">
+              <a:buClr>
+                <a:schemeClr val="tx1"/>
+              </a:buClr>
+              <a:buSzPct val="120000"/>
+              <a:buFont typeface="Arial" panose="020B0604020202020204" pitchFamily="34" charset="0"/>
+              <a:buChar char="•"/>
+            </a:pPr>
+            <a:r>
+              <a:rPr lang="en-US" sz="2000" b="1" dirty="0">
+                <a:solidFill>
+                  <a:schemeClr val="tx1"/>
+                </a:solidFill>
+              </a:rPr>
+              <a:t>Does Not Change Original </a:t>
+            </a:r>
+            <a:r>
+              <a:rPr lang="en-US" sz="2000" b="1" dirty="0" smtClean="0">
+                <a:solidFill>
+                  <a:schemeClr val="tx1"/>
+                </a:solidFill>
+              </a:rPr>
+              <a:t>Classes</a:t>
+            </a:r>
+          </a:p>
+          <a:p>
+            <a:pPr marL="1257300" lvl="2" indent="-342900" algn="just">
+              <a:buClr>
+                <a:schemeClr val="tx1"/>
+              </a:buClr>
+              <a:buSzPct val="120000"/>
+              <a:buFont typeface="Arial" panose="020B0604020202020204" pitchFamily="34" charset="0"/>
+              <a:buChar char="•"/>
+            </a:pPr>
+            <a:r>
+              <a:rPr lang="en-IN" sz="2000" b="1" dirty="0">
+                <a:solidFill>
+                  <a:schemeClr val="tx1"/>
+                </a:solidFill>
+              </a:rPr>
+              <a:t>Follows Open/Closed Principle</a:t>
+            </a:r>
+            <a:endParaRPr lang="en-US" sz="2000" b="1" dirty="0">
+              <a:solidFill>
+                <a:schemeClr val="tx1"/>
+              </a:solidFill>
+            </a:endParaRPr>
           </a:p>
         </p:txBody>
       </p:sp>
     </p:spTree>
     <p:extLst>
       <p:ext uri="{BB962C8B-B14F-4D97-AF65-F5344CB8AC3E}">
-        <p14:creationId xmlns:p14="http://schemas.microsoft.com/office/powerpoint/2010/main" val="249223882"/>
+        <p14:creationId xmlns:p14="http://schemas.microsoft.com/office/powerpoint/2010/main" val="1550072786"/>
       </p:ext>
     </p:extLst>
   </p:cSld>
@@ -9837,59 +9863,393 @@
         </p:nvSpPr>
         <p:spPr>
           <a:xfrm>
-            <a:off x="644434" y="121920"/>
-            <a:ext cx="5286106" cy="966652"/>
+            <a:off x="714099" y="104505"/>
+            <a:ext cx="2081350" cy="747865"/>
           </a:xfrm>
         </p:spPr>
         <p:txBody>
-          <a:bodyPr anchor="ctr">
-            <a:noAutofit/>
+          <a:bodyPr/>
+          <a:lstStyle/>
+          <a:p>
+            <a:r>
+              <a:rPr lang="en-IN" sz="4800" u="sng" dirty="0"/>
+              <a:t>Intent</a:t>
+            </a:r>
+            <a:endParaRPr lang="en-IN" sz="6000" u="sng" dirty="0"/>
+          </a:p>
+        </p:txBody>
+      </p:sp>
+      <p:sp>
+        <p:nvSpPr>
+          <p:cNvPr id="3" name="Subtitle 2"/>
+          <p:cNvSpPr>
+            <a:spLocks noGrp="1"/>
+          </p:cNvSpPr>
+          <p:nvPr>
+            <p:ph type="subTitle" idx="1"/>
+          </p:nvPr>
+        </p:nvSpPr>
+        <p:spPr>
+          <a:xfrm>
+            <a:off x="714099" y="1297581"/>
+            <a:ext cx="10624457" cy="896980"/>
+          </a:xfrm>
+        </p:spPr>
+        <p:txBody>
+          <a:bodyPr>
+            <a:normAutofit/>
           </a:bodyPr>
           <a:lstStyle/>
           <a:p>
-            <a:pPr algn="ctr"/>
-            <a:r>
-              <a:rPr lang="en-IN" sz="4000" b="1" u="sng" dirty="0" smtClean="0"/>
-              <a:t>Structure Diagram</a:t>
-            </a:r>
-            <a:endParaRPr lang="en-IN" sz="4800" b="1" u="sng" dirty="0"/>
-          </a:p>
-        </p:txBody>
-      </p:sp>
-      <p:pic>
-        <p:nvPicPr>
-          <p:cNvPr id="3" name="Picture 2"/>
-          <p:cNvPicPr>
-            <a:picLocks noChangeAspect="1"/>
-          </p:cNvPicPr>
+            <a:pPr algn="just"/>
+            <a:r>
+              <a:rPr lang="en-US" b="1" dirty="0">
+                <a:solidFill>
+                  <a:schemeClr val="tx1"/>
+                </a:solidFill>
+              </a:rPr>
+              <a:t>Adapter is a structural design pattern that allows objects with incompatible interfaces to collaborate.</a:t>
+            </a:r>
+            <a:endParaRPr lang="en-IN" b="1" dirty="0">
+              <a:solidFill>
+                <a:schemeClr val="tx1"/>
+              </a:solidFill>
+            </a:endParaRPr>
+          </a:p>
+        </p:txBody>
+      </p:sp>
+      <p:sp>
+        <p:nvSpPr>
+          <p:cNvPr id="4" name="Title 1"/>
+          <p:cNvSpPr txBox="1">
+            <a:spLocks/>
+          </p:cNvSpPr>
           <p:nvPr/>
-        </p:nvPicPr>
-        <p:blipFill>
-          <a:blip r:embed="rId2">
-            <a:extLst>
-              <a:ext uri="{28A0092B-C50C-407E-A947-70E740481C1C}">
-                <a14:useLocalDpi xmlns:a14="http://schemas.microsoft.com/office/drawing/2010/main" val="0"/>
-              </a:ext>
-            </a:extLst>
-          </a:blip>
-          <a:stretch>
-            <a:fillRect/>
-          </a:stretch>
-        </p:blipFill>
+        </p:nvSpPr>
         <p:spPr>
           <a:xfrm>
-            <a:off x="801189" y="1280160"/>
-            <a:ext cx="11059885" cy="5303520"/>
+            <a:off x="714099" y="2639772"/>
+            <a:ext cx="3413760" cy="722811"/>
           </a:xfrm>
           <a:prstGeom prst="rect">
             <a:avLst/>
           </a:prstGeom>
         </p:spPr>
-      </p:pic>
+        <p:txBody>
+          <a:bodyPr vert="horz" lIns="91440" tIns="45720" rIns="91440" bIns="45720" rtlCol="0" anchor="b">
+            <a:normAutofit/>
+          </a:bodyPr>
+          <a:lstStyle>
+            <a:lvl1pPr algn="l" defTabSz="914400" rtl="0" eaLnBrk="1" latinLnBrk="0" hangingPunct="1">
+              <a:lnSpc>
+                <a:spcPct val="85000"/>
+              </a:lnSpc>
+              <a:spcBef>
+                <a:spcPct val="0"/>
+              </a:spcBef>
+              <a:buNone/>
+              <a:defRPr sz="7200" kern="1200" spc="-50" baseline="0">
+                <a:solidFill>
+                  <a:schemeClr val="tx1"/>
+                </a:solidFill>
+                <a:latin typeface="+mj-lt"/>
+                <a:ea typeface="+mj-ea"/>
+                <a:cs typeface="+mj-cs"/>
+              </a:defRPr>
+            </a:lvl1pPr>
+          </a:lstStyle>
+          <a:p>
+            <a:r>
+              <a:rPr lang="en-IN" sz="4800" u="sng" dirty="0"/>
+              <a:t>Motivation</a:t>
+            </a:r>
+            <a:endParaRPr lang="en-IN" sz="6000" u="sng" dirty="0"/>
+          </a:p>
+        </p:txBody>
+      </p:sp>
+      <p:sp>
+        <p:nvSpPr>
+          <p:cNvPr id="10" name="Subtitle 2"/>
+          <p:cNvSpPr txBox="1">
+            <a:spLocks/>
+          </p:cNvSpPr>
+          <p:nvPr/>
+        </p:nvSpPr>
+        <p:spPr>
+          <a:xfrm>
+            <a:off x="714099" y="3807794"/>
+            <a:ext cx="11077306" cy="2706217"/>
+          </a:xfrm>
+          <a:prstGeom prst="rect">
+            <a:avLst/>
+          </a:prstGeom>
+        </p:spPr>
+        <p:txBody>
+          <a:bodyPr vert="horz" lIns="91440" tIns="45720" rIns="91440" bIns="45720" rtlCol="0">
+            <a:noAutofit/>
+          </a:bodyPr>
+          <a:lstStyle>
+            <a:lvl1pPr marL="0" indent="0" algn="l" defTabSz="914400" rtl="0" eaLnBrk="1" latinLnBrk="0" hangingPunct="1">
+              <a:lnSpc>
+                <a:spcPct val="95000"/>
+              </a:lnSpc>
+              <a:spcBef>
+                <a:spcPts val="1400"/>
+              </a:spcBef>
+              <a:spcAft>
+                <a:spcPts val="200"/>
+              </a:spcAft>
+              <a:buClr>
+                <a:schemeClr val="accent1"/>
+              </a:buClr>
+              <a:buSzPct val="80000"/>
+              <a:buFont typeface="Arial" pitchFamily="34" charset="0"/>
+              <a:buNone/>
+              <a:defRPr sz="2200" kern="1200" spc="10" baseline="0">
+                <a:solidFill>
+                  <a:schemeClr val="tx1">
+                    <a:lumMod val="75000"/>
+                  </a:schemeClr>
+                </a:solidFill>
+                <a:latin typeface="+mn-lt"/>
+                <a:ea typeface="+mn-ea"/>
+                <a:cs typeface="+mn-cs"/>
+              </a:defRPr>
+            </a:lvl1pPr>
+            <a:lvl2pPr marL="457200" indent="0" algn="ctr" defTabSz="914400" rtl="0" eaLnBrk="1" latinLnBrk="0" hangingPunct="1">
+              <a:lnSpc>
+                <a:spcPct val="90000"/>
+              </a:lnSpc>
+              <a:spcBef>
+                <a:spcPts val="300"/>
+              </a:spcBef>
+              <a:spcAft>
+                <a:spcPts val="300"/>
+              </a:spcAft>
+              <a:buClr>
+                <a:schemeClr val="accent1"/>
+              </a:buClr>
+              <a:buFont typeface="Wingdings 2" pitchFamily="18" charset="2"/>
+              <a:buNone/>
+              <a:defRPr sz="2200" kern="1200">
+                <a:solidFill>
+                  <a:schemeClr val="tx1">
+                    <a:lumMod val="85000"/>
+                    <a:lumOff val="15000"/>
+                  </a:schemeClr>
+                </a:solidFill>
+                <a:latin typeface="+mn-lt"/>
+                <a:ea typeface="+mn-ea"/>
+                <a:cs typeface="+mn-cs"/>
+              </a:defRPr>
+            </a:lvl2pPr>
+            <a:lvl3pPr marL="914400" indent="0" algn="ctr" defTabSz="914400" rtl="0" eaLnBrk="1" latinLnBrk="0" hangingPunct="1">
+              <a:lnSpc>
+                <a:spcPct val="90000"/>
+              </a:lnSpc>
+              <a:spcBef>
+                <a:spcPts val="300"/>
+              </a:spcBef>
+              <a:spcAft>
+                <a:spcPts val="300"/>
+              </a:spcAft>
+              <a:buClr>
+                <a:schemeClr val="accent1"/>
+              </a:buClr>
+              <a:buFont typeface="Wingdings 2" pitchFamily="18" charset="2"/>
+              <a:buNone/>
+              <a:defRPr sz="2200" kern="1200">
+                <a:solidFill>
+                  <a:schemeClr val="tx1">
+                    <a:lumMod val="85000"/>
+                    <a:lumOff val="15000"/>
+                  </a:schemeClr>
+                </a:solidFill>
+                <a:latin typeface="+mn-lt"/>
+                <a:ea typeface="+mn-ea"/>
+                <a:cs typeface="+mn-cs"/>
+              </a:defRPr>
+            </a:lvl3pPr>
+            <a:lvl4pPr marL="1371600" indent="0" algn="ctr" defTabSz="914400" rtl="0" eaLnBrk="1" latinLnBrk="0" hangingPunct="1">
+              <a:lnSpc>
+                <a:spcPct val="90000"/>
+              </a:lnSpc>
+              <a:spcBef>
+                <a:spcPts val="300"/>
+              </a:spcBef>
+              <a:spcAft>
+                <a:spcPts val="300"/>
+              </a:spcAft>
+              <a:buClr>
+                <a:schemeClr val="accent1"/>
+              </a:buClr>
+              <a:buFont typeface="Wingdings 2" pitchFamily="18" charset="2"/>
+              <a:buNone/>
+              <a:defRPr sz="2000" kern="1200">
+                <a:solidFill>
+                  <a:schemeClr val="tx1">
+                    <a:lumMod val="85000"/>
+                    <a:lumOff val="15000"/>
+                  </a:schemeClr>
+                </a:solidFill>
+                <a:latin typeface="+mn-lt"/>
+                <a:ea typeface="+mn-ea"/>
+                <a:cs typeface="+mn-cs"/>
+              </a:defRPr>
+            </a:lvl4pPr>
+            <a:lvl5pPr marL="1828800" indent="0" algn="ctr" defTabSz="914400" rtl="0" eaLnBrk="1" latinLnBrk="0" hangingPunct="1">
+              <a:lnSpc>
+                <a:spcPct val="90000"/>
+              </a:lnSpc>
+              <a:spcBef>
+                <a:spcPts val="300"/>
+              </a:spcBef>
+              <a:spcAft>
+                <a:spcPts val="300"/>
+              </a:spcAft>
+              <a:buClr>
+                <a:schemeClr val="accent1"/>
+              </a:buClr>
+              <a:buFont typeface="Wingdings 2" pitchFamily="18" charset="2"/>
+              <a:buNone/>
+              <a:defRPr sz="2000" kern="1200">
+                <a:solidFill>
+                  <a:schemeClr val="tx1">
+                    <a:lumMod val="85000"/>
+                    <a:lumOff val="15000"/>
+                  </a:schemeClr>
+                </a:solidFill>
+                <a:latin typeface="+mn-lt"/>
+                <a:ea typeface="+mn-ea"/>
+                <a:cs typeface="+mn-cs"/>
+              </a:defRPr>
+            </a:lvl5pPr>
+            <a:lvl6pPr marL="2286000" indent="0" algn="ctr" defTabSz="914400" rtl="0" eaLnBrk="1" latinLnBrk="0" hangingPunct="1">
+              <a:lnSpc>
+                <a:spcPct val="90000"/>
+              </a:lnSpc>
+              <a:spcBef>
+                <a:spcPts val="300"/>
+              </a:spcBef>
+              <a:spcAft>
+                <a:spcPts val="300"/>
+              </a:spcAft>
+              <a:buClr>
+                <a:schemeClr val="accent1"/>
+              </a:buClr>
+              <a:buFont typeface="Wingdings 2" pitchFamily="18" charset="2"/>
+              <a:buNone/>
+              <a:defRPr sz="2000" kern="1200">
+                <a:solidFill>
+                  <a:schemeClr val="tx1">
+                    <a:lumMod val="85000"/>
+                    <a:lumOff val="15000"/>
+                  </a:schemeClr>
+                </a:solidFill>
+                <a:latin typeface="+mn-lt"/>
+                <a:ea typeface="+mn-ea"/>
+                <a:cs typeface="+mn-cs"/>
+              </a:defRPr>
+            </a:lvl6pPr>
+            <a:lvl7pPr marL="2743200" indent="0" algn="ctr" defTabSz="914400" rtl="0" eaLnBrk="1" latinLnBrk="0" hangingPunct="1">
+              <a:lnSpc>
+                <a:spcPct val="90000"/>
+              </a:lnSpc>
+              <a:spcBef>
+                <a:spcPts val="300"/>
+              </a:spcBef>
+              <a:spcAft>
+                <a:spcPts val="300"/>
+              </a:spcAft>
+              <a:buClr>
+                <a:schemeClr val="accent1"/>
+              </a:buClr>
+              <a:buFont typeface="Wingdings 2" pitchFamily="18" charset="2"/>
+              <a:buNone/>
+              <a:defRPr sz="2000" kern="1200">
+                <a:solidFill>
+                  <a:schemeClr val="tx1">
+                    <a:lumMod val="85000"/>
+                    <a:lumOff val="15000"/>
+                  </a:schemeClr>
+                </a:solidFill>
+                <a:latin typeface="+mn-lt"/>
+                <a:ea typeface="+mn-ea"/>
+                <a:cs typeface="+mn-cs"/>
+              </a:defRPr>
+            </a:lvl7pPr>
+            <a:lvl8pPr marL="3200400" indent="0" algn="ctr" defTabSz="914400" rtl="0" eaLnBrk="1" latinLnBrk="0" hangingPunct="1">
+              <a:lnSpc>
+                <a:spcPct val="90000"/>
+              </a:lnSpc>
+              <a:spcBef>
+                <a:spcPts val="300"/>
+              </a:spcBef>
+              <a:spcAft>
+                <a:spcPts val="300"/>
+              </a:spcAft>
+              <a:buClr>
+                <a:schemeClr val="accent1"/>
+              </a:buClr>
+              <a:buFont typeface="Wingdings 2" pitchFamily="18" charset="2"/>
+              <a:buNone/>
+              <a:defRPr sz="2000" kern="1200">
+                <a:solidFill>
+                  <a:schemeClr val="tx1">
+                    <a:lumMod val="85000"/>
+                    <a:lumOff val="15000"/>
+                  </a:schemeClr>
+                </a:solidFill>
+                <a:latin typeface="+mn-lt"/>
+                <a:ea typeface="+mn-ea"/>
+                <a:cs typeface="+mn-cs"/>
+              </a:defRPr>
+            </a:lvl8pPr>
+            <a:lvl9pPr marL="3657600" indent="0" algn="ctr" defTabSz="914400" rtl="0" eaLnBrk="1" latinLnBrk="0" hangingPunct="1">
+              <a:lnSpc>
+                <a:spcPct val="90000"/>
+              </a:lnSpc>
+              <a:spcBef>
+                <a:spcPts val="300"/>
+              </a:spcBef>
+              <a:spcAft>
+                <a:spcPts val="300"/>
+              </a:spcAft>
+              <a:buClr>
+                <a:schemeClr val="accent1"/>
+              </a:buClr>
+              <a:buFont typeface="Wingdings 2" pitchFamily="18" charset="2"/>
+              <a:buNone/>
+              <a:defRPr sz="2000" kern="1200">
+                <a:solidFill>
+                  <a:schemeClr val="tx1">
+                    <a:lumMod val="85000"/>
+                    <a:lumOff val="15000"/>
+                  </a:schemeClr>
+                </a:solidFill>
+                <a:latin typeface="+mn-lt"/>
+                <a:ea typeface="+mn-ea"/>
+                <a:cs typeface="+mn-cs"/>
+              </a:defRPr>
+            </a:lvl9pPr>
+          </a:lstStyle>
+          <a:p>
+            <a:pPr algn="just"/>
+            <a:r>
+              <a:rPr lang="en-US" b="1" dirty="0">
+                <a:solidFill>
+                  <a:schemeClr val="tx1"/>
+                </a:solidFill>
+              </a:rPr>
+              <a:t>Imagine an old application that exchanges data using XML format, but a new application is designed to use JSON because it is lightweight and easier to parse. Direct communication between these systems is not possible due to their differing data formats. Instead of modifying the old application, which could be complex and risky, an Adapter can be introduced. This Adapter acts as a bridge, converting XML requests into JSON format and vice versa, allowing seamless communication between the two systems without altering their core implementations.</a:t>
+            </a:r>
+          </a:p>
+        </p:txBody>
+      </p:sp>
     </p:spTree>
     <p:extLst>
       <p:ext uri="{BB962C8B-B14F-4D97-AF65-F5344CB8AC3E}">
-        <p14:creationId xmlns:p14="http://schemas.microsoft.com/office/powerpoint/2010/main" val="3954714818"/>
+        <p14:creationId xmlns:p14="http://schemas.microsoft.com/office/powerpoint/2010/main" val="249223882"/>
       </p:ext>
     </p:extLst>
   </p:cSld>

--- a/Adapter Design Pattern.pptx
+++ b/Adapter Design Pattern.pptx
@@ -182,7 +182,7 @@
           </a:lstStyle>
           <a:p>
             <a:r>
-              <a:rPr lang="en-US" smtClean="0"/>
+              <a:rPr lang="en-US"/>
               <a:t>Click to edit Master title style</a:t>
             </a:r>
             <a:endParaRPr lang="en-US" dirty="0"/>
@@ -255,7 +255,7 @@
           </a:lstStyle>
           <a:p>
             <a:r>
-              <a:rPr lang="en-US" smtClean="0"/>
+              <a:rPr lang="en-US"/>
               <a:t>Click to edit Master subtitle style</a:t>
             </a:r>
             <a:endParaRPr lang="en-US" dirty="0"/>
@@ -289,7 +289,7 @@
           <a:p>
             <a:fld id="{1160EA64-D806-43AC-9DF2-F8C432F32B4C}" type="datetimeFigureOut">
               <a:rPr lang="en-US" smtClean="0"/>
-              <a:t>4/8/2025</a:t>
+              <a:t>4/9/2025</a:t>
             </a:fld>
             <a:endParaRPr lang="en-US" dirty="0"/>
           </a:p>
@@ -442,7 +442,7 @@
           <a:lstStyle/>
           <a:p>
             <a:r>
-              <a:rPr lang="en-US" smtClean="0"/>
+              <a:rPr lang="en-US"/>
               <a:t>Click to edit Master title style</a:t>
             </a:r>
             <a:endParaRPr lang="en-US" dirty="0"/>
@@ -466,35 +466,35 @@
           <a:p>
             <a:pPr lvl="0"/>
             <a:r>
-              <a:rPr lang="en-US" smtClean="0"/>
+              <a:rPr lang="en-US"/>
               <a:t>Edit Master text styles</a:t>
             </a:r>
           </a:p>
           <a:p>
             <a:pPr lvl="1"/>
             <a:r>
-              <a:rPr lang="en-US" smtClean="0"/>
+              <a:rPr lang="en-US"/>
               <a:t>Second level</a:t>
             </a:r>
           </a:p>
           <a:p>
             <a:pPr lvl="2"/>
             <a:r>
-              <a:rPr lang="en-US" smtClean="0"/>
+              <a:rPr lang="en-US"/>
               <a:t>Third level</a:t>
             </a:r>
           </a:p>
           <a:p>
             <a:pPr lvl="3"/>
             <a:r>
-              <a:rPr lang="en-US" smtClean="0"/>
+              <a:rPr lang="en-US"/>
               <a:t>Fourth level</a:t>
             </a:r>
           </a:p>
           <a:p>
             <a:pPr lvl="4"/>
             <a:r>
-              <a:rPr lang="en-US" smtClean="0"/>
+              <a:rPr lang="en-US"/>
               <a:t>Fifth level</a:t>
             </a:r>
             <a:endParaRPr lang="en-US" dirty="0"/>
@@ -518,7 +518,7 @@
           <a:p>
             <a:fld id="{E9F9C37B-1D36-470B-8223-D6C91242EC14}" type="datetimeFigureOut">
               <a:rPr lang="en-US" smtClean="0"/>
-              <a:t>4/8/2025</a:t>
+              <a:t>4/9/2025</a:t>
             </a:fld>
             <a:endParaRPr lang="en-US" dirty="0"/>
           </a:p>
@@ -617,7 +617,7 @@
           <a:lstStyle/>
           <a:p>
             <a:r>
-              <a:rPr lang="en-US" smtClean="0"/>
+              <a:rPr lang="en-US"/>
               <a:t>Click to edit Master title style</a:t>
             </a:r>
             <a:endParaRPr lang="en-US" dirty="0"/>
@@ -646,35 +646,35 @@
           <a:p>
             <a:pPr lvl="0"/>
             <a:r>
-              <a:rPr lang="en-US" smtClean="0"/>
+              <a:rPr lang="en-US"/>
               <a:t>Edit Master text styles</a:t>
             </a:r>
           </a:p>
           <a:p>
             <a:pPr lvl="1"/>
             <a:r>
-              <a:rPr lang="en-US" smtClean="0"/>
+              <a:rPr lang="en-US"/>
               <a:t>Second level</a:t>
             </a:r>
           </a:p>
           <a:p>
             <a:pPr lvl="2"/>
             <a:r>
-              <a:rPr lang="en-US" smtClean="0"/>
+              <a:rPr lang="en-US"/>
               <a:t>Third level</a:t>
             </a:r>
           </a:p>
           <a:p>
             <a:pPr lvl="3"/>
             <a:r>
-              <a:rPr lang="en-US" smtClean="0"/>
+              <a:rPr lang="en-US"/>
               <a:t>Fourth level</a:t>
             </a:r>
           </a:p>
           <a:p>
             <a:pPr lvl="4"/>
             <a:r>
-              <a:rPr lang="en-US" smtClean="0"/>
+              <a:rPr lang="en-US"/>
               <a:t>Fifth level</a:t>
             </a:r>
             <a:endParaRPr lang="en-US" dirty="0"/>
@@ -698,7 +698,7 @@
           <a:p>
             <a:fld id="{67C6F52A-A82B-47A2-A83A-8C4C91F2D59F}" type="datetimeFigureOut">
               <a:rPr lang="en-US" smtClean="0"/>
-              <a:t>4/8/2025</a:t>
+              <a:t>4/9/2025</a:t>
             </a:fld>
             <a:endParaRPr lang="en-US" dirty="0"/>
           </a:p>
@@ -792,7 +792,7 @@
           <a:lstStyle/>
           <a:p>
             <a:r>
-              <a:rPr lang="en-US" smtClean="0"/>
+              <a:rPr lang="en-US"/>
               <a:t>Click to edit Master title style</a:t>
             </a:r>
             <a:endParaRPr lang="en-US" dirty="0"/>
@@ -816,35 +816,35 @@
           <a:p>
             <a:pPr lvl="0"/>
             <a:r>
-              <a:rPr lang="en-US" smtClean="0"/>
+              <a:rPr lang="en-US"/>
               <a:t>Edit Master text styles</a:t>
             </a:r>
           </a:p>
           <a:p>
             <a:pPr lvl="1"/>
             <a:r>
-              <a:rPr lang="en-US" smtClean="0"/>
+              <a:rPr lang="en-US"/>
               <a:t>Second level</a:t>
             </a:r>
           </a:p>
           <a:p>
             <a:pPr lvl="2"/>
             <a:r>
-              <a:rPr lang="en-US" smtClean="0"/>
+              <a:rPr lang="en-US"/>
               <a:t>Third level</a:t>
             </a:r>
           </a:p>
           <a:p>
             <a:pPr lvl="3"/>
             <a:r>
-              <a:rPr lang="en-US" smtClean="0"/>
+              <a:rPr lang="en-US"/>
               <a:t>Fourth level</a:t>
             </a:r>
           </a:p>
           <a:p>
             <a:pPr lvl="4"/>
             <a:r>
-              <a:rPr lang="en-US" smtClean="0"/>
+              <a:rPr lang="en-US"/>
               <a:t>Fifth level</a:t>
             </a:r>
             <a:endParaRPr lang="en-US" dirty="0"/>
@@ -868,7 +868,7 @@
           <a:p>
             <a:fld id="{F070A7B3-6521-4DCA-87E5-044747A908C1}" type="datetimeFigureOut">
               <a:rPr lang="en-US" smtClean="0"/>
-              <a:t>4/8/2025</a:t>
+              <a:t>4/9/2025</a:t>
             </a:fld>
             <a:endParaRPr lang="en-US" dirty="0"/>
           </a:p>
@@ -977,7 +977,7 @@
           </a:lstStyle>
           <a:p>
             <a:r>
-              <a:rPr lang="en-US" smtClean="0"/>
+              <a:rPr lang="en-US"/>
               <a:t>Click to edit Master title style</a:t>
             </a:r>
             <a:endParaRPr lang="en-US" dirty="0"/>
@@ -1100,7 +1100,7 @@
           <a:p>
             <a:pPr lvl="0"/>
             <a:r>
-              <a:rPr lang="en-US" smtClean="0"/>
+              <a:rPr lang="en-US"/>
               <a:t>Edit Master text styles</a:t>
             </a:r>
           </a:p>
@@ -1123,7 +1123,7 @@
           <a:p>
             <a:fld id="{1160EA64-D806-43AC-9DF2-F8C432F32B4C}" type="datetimeFigureOut">
               <a:rPr lang="en-US" smtClean="0"/>
-              <a:t>4/8/2025</a:t>
+              <a:t>4/9/2025</a:t>
             </a:fld>
             <a:endParaRPr lang="en-US" dirty="0"/>
           </a:p>
@@ -1256,7 +1256,7 @@
           <a:lstStyle/>
           <a:p>
             <a:r>
-              <a:rPr lang="en-US" smtClean="0"/>
+              <a:rPr lang="en-US"/>
               <a:t>Click to edit Master title style</a:t>
             </a:r>
             <a:endParaRPr lang="en-US" dirty="0"/>
@@ -1313,35 +1313,35 @@
           <a:p>
             <a:pPr lvl="0"/>
             <a:r>
-              <a:rPr lang="en-US" smtClean="0"/>
+              <a:rPr lang="en-US"/>
               <a:t>Edit Master text styles</a:t>
             </a:r>
           </a:p>
           <a:p>
             <a:pPr lvl="1"/>
             <a:r>
-              <a:rPr lang="en-US" smtClean="0"/>
+              <a:rPr lang="en-US"/>
               <a:t>Second level</a:t>
             </a:r>
           </a:p>
           <a:p>
             <a:pPr lvl="2"/>
             <a:r>
-              <a:rPr lang="en-US" smtClean="0"/>
+              <a:rPr lang="en-US"/>
               <a:t>Third level</a:t>
             </a:r>
           </a:p>
           <a:p>
             <a:pPr lvl="3"/>
             <a:r>
-              <a:rPr lang="en-US" smtClean="0"/>
+              <a:rPr lang="en-US"/>
               <a:t>Fourth level</a:t>
             </a:r>
           </a:p>
           <a:p>
             <a:pPr lvl="4"/>
             <a:r>
-              <a:rPr lang="en-US" smtClean="0"/>
+              <a:rPr lang="en-US"/>
               <a:t>Fifth level</a:t>
             </a:r>
             <a:endParaRPr lang="en-US" dirty="0"/>
@@ -1398,35 +1398,35 @@
           <a:p>
             <a:pPr lvl="0"/>
             <a:r>
-              <a:rPr lang="en-US" smtClean="0"/>
+              <a:rPr lang="en-US"/>
               <a:t>Edit Master text styles</a:t>
             </a:r>
           </a:p>
           <a:p>
             <a:pPr lvl="1"/>
             <a:r>
-              <a:rPr lang="en-US" smtClean="0"/>
+              <a:rPr lang="en-US"/>
               <a:t>Second level</a:t>
             </a:r>
           </a:p>
           <a:p>
             <a:pPr lvl="2"/>
             <a:r>
-              <a:rPr lang="en-US" smtClean="0"/>
+              <a:rPr lang="en-US"/>
               <a:t>Third level</a:t>
             </a:r>
           </a:p>
           <a:p>
             <a:pPr lvl="3"/>
             <a:r>
-              <a:rPr lang="en-US" smtClean="0"/>
+              <a:rPr lang="en-US"/>
               <a:t>Fourth level</a:t>
             </a:r>
           </a:p>
           <a:p>
             <a:pPr lvl="4"/>
             <a:r>
-              <a:rPr lang="en-US" smtClean="0"/>
+              <a:rPr lang="en-US"/>
               <a:t>Fifth level</a:t>
             </a:r>
             <a:endParaRPr lang="en-US" dirty="0"/>
@@ -1450,7 +1450,7 @@
           <a:p>
             <a:fld id="{AB134690-1557-4C89-A502-4959FE7FAD70}" type="datetimeFigureOut">
               <a:rPr lang="en-US" smtClean="0"/>
-              <a:t>4/8/2025</a:t>
+              <a:t>4/9/2025</a:t>
             </a:fld>
             <a:endParaRPr lang="en-US" dirty="0"/>
           </a:p>
@@ -1544,7 +1544,7 @@
           <a:lstStyle/>
           <a:p>
             <a:r>
-              <a:rPr lang="en-US" smtClean="0"/>
+              <a:rPr lang="en-US"/>
               <a:t>Click to edit Master title style</a:t>
             </a:r>
             <a:endParaRPr lang="en-US" dirty="0"/>
@@ -1619,7 +1619,7 @@
           <a:p>
             <a:pPr lvl="0"/>
             <a:r>
-              <a:rPr lang="en-US" smtClean="0"/>
+              <a:rPr lang="en-US"/>
               <a:t>Edit Master text styles</a:t>
             </a:r>
           </a:p>
@@ -1675,35 +1675,35 @@
           <a:p>
             <a:pPr lvl="0"/>
             <a:r>
-              <a:rPr lang="en-US" smtClean="0"/>
+              <a:rPr lang="en-US"/>
               <a:t>Edit Master text styles</a:t>
             </a:r>
           </a:p>
           <a:p>
             <a:pPr lvl="1"/>
             <a:r>
-              <a:rPr lang="en-US" smtClean="0"/>
+              <a:rPr lang="en-US"/>
               <a:t>Second level</a:t>
             </a:r>
           </a:p>
           <a:p>
             <a:pPr lvl="2"/>
             <a:r>
-              <a:rPr lang="en-US" smtClean="0"/>
+              <a:rPr lang="en-US"/>
               <a:t>Third level</a:t>
             </a:r>
           </a:p>
           <a:p>
             <a:pPr lvl="3"/>
             <a:r>
-              <a:rPr lang="en-US" smtClean="0"/>
+              <a:rPr lang="en-US"/>
               <a:t>Fourth level</a:t>
             </a:r>
           </a:p>
           <a:p>
             <a:pPr lvl="4"/>
             <a:r>
-              <a:rPr lang="en-US" smtClean="0"/>
+              <a:rPr lang="en-US"/>
               <a:t>Fifth level</a:t>
             </a:r>
             <a:endParaRPr lang="en-US" dirty="0"/>
@@ -1793,7 +1793,7 @@
               <a:buNone/>
             </a:pPr>
             <a:r>
-              <a:rPr lang="en-US" smtClean="0"/>
+              <a:rPr lang="en-US"/>
               <a:t>Edit Master text styles</a:t>
             </a:r>
           </a:p>
@@ -1849,35 +1849,35 @@
           <a:p>
             <a:pPr lvl="0"/>
             <a:r>
-              <a:rPr lang="en-US" smtClean="0"/>
+              <a:rPr lang="en-US"/>
               <a:t>Edit Master text styles</a:t>
             </a:r>
           </a:p>
           <a:p>
             <a:pPr lvl="1"/>
             <a:r>
-              <a:rPr lang="en-US" smtClean="0"/>
+              <a:rPr lang="en-US"/>
               <a:t>Second level</a:t>
             </a:r>
           </a:p>
           <a:p>
             <a:pPr lvl="2"/>
             <a:r>
-              <a:rPr lang="en-US" smtClean="0"/>
+              <a:rPr lang="en-US"/>
               <a:t>Third level</a:t>
             </a:r>
           </a:p>
           <a:p>
             <a:pPr lvl="3"/>
             <a:r>
-              <a:rPr lang="en-US" smtClean="0"/>
+              <a:rPr lang="en-US"/>
               <a:t>Fourth level</a:t>
             </a:r>
           </a:p>
           <a:p>
             <a:pPr lvl="4"/>
             <a:r>
-              <a:rPr lang="en-US" smtClean="0"/>
+              <a:rPr lang="en-US"/>
               <a:t>Fifth level</a:t>
             </a:r>
             <a:endParaRPr lang="en-US" dirty="0"/>
@@ -1901,7 +1901,7 @@
           <a:p>
             <a:fld id="{4F7D4976-E339-4826-83B7-FBD03F55ECF8}" type="datetimeFigureOut">
               <a:rPr lang="en-US" smtClean="0"/>
-              <a:t>4/8/2025</a:t>
+              <a:t>4/9/2025</a:t>
             </a:fld>
             <a:endParaRPr lang="en-US" dirty="0"/>
           </a:p>
@@ -1995,7 +1995,7 @@
           <a:lstStyle/>
           <a:p>
             <a:r>
-              <a:rPr lang="en-US" smtClean="0"/>
+              <a:rPr lang="en-US"/>
               <a:t>Click to edit Master title style</a:t>
             </a:r>
             <a:endParaRPr lang="en-US" dirty="0"/>
@@ -2019,7 +2019,7 @@
           <a:p>
             <a:fld id="{E1037C31-9E7A-4F99-8774-A0E530DE1A42}" type="datetimeFigureOut">
               <a:rPr lang="en-US" smtClean="0"/>
-              <a:t>4/8/2025</a:t>
+              <a:t>4/9/2025</a:t>
             </a:fld>
             <a:endParaRPr lang="en-US" dirty="0"/>
           </a:p>
@@ -2114,7 +2114,7 @@
           <a:p>
             <a:fld id="{C278504F-A551-4DE0-9316-4DCD1D8CC752}" type="datetimeFigureOut">
               <a:rPr lang="en-US" smtClean="0"/>
-              <a:t>4/8/2025</a:t>
+              <a:t>4/9/2025</a:t>
             </a:fld>
             <a:endParaRPr lang="en-US" dirty="0"/>
           </a:p>
@@ -2219,7 +2219,7 @@
           </a:lstStyle>
           <a:p>
             <a:r>
-              <a:rPr lang="en-US" smtClean="0"/>
+              <a:rPr lang="en-US"/>
               <a:t>Click to edit Master title style</a:t>
             </a:r>
             <a:endParaRPr lang="en-US" dirty="0"/>
@@ -2276,35 +2276,35 @@
           <a:p>
             <a:pPr lvl="0"/>
             <a:r>
-              <a:rPr lang="en-US" smtClean="0"/>
+              <a:rPr lang="en-US"/>
               <a:t>Edit Master text styles</a:t>
             </a:r>
           </a:p>
           <a:p>
             <a:pPr lvl="1"/>
             <a:r>
-              <a:rPr lang="en-US" smtClean="0"/>
+              <a:rPr lang="en-US"/>
               <a:t>Second level</a:t>
             </a:r>
           </a:p>
           <a:p>
             <a:pPr lvl="2"/>
             <a:r>
-              <a:rPr lang="en-US" smtClean="0"/>
+              <a:rPr lang="en-US"/>
               <a:t>Third level</a:t>
             </a:r>
           </a:p>
           <a:p>
             <a:pPr lvl="3"/>
             <a:r>
-              <a:rPr lang="en-US" smtClean="0"/>
+              <a:rPr lang="en-US"/>
               <a:t>Fourth level</a:t>
             </a:r>
           </a:p>
           <a:p>
             <a:pPr lvl="4"/>
             <a:r>
-              <a:rPr lang="en-US" smtClean="0"/>
+              <a:rPr lang="en-US"/>
               <a:t>Fifth level</a:t>
             </a:r>
             <a:endParaRPr lang="en-US" dirty="0"/>
@@ -2378,7 +2378,7 @@
           <a:p>
             <a:pPr lvl="0"/>
             <a:r>
-              <a:rPr lang="en-US" smtClean="0"/>
+              <a:rPr lang="en-US"/>
               <a:t>Edit Master text styles</a:t>
             </a:r>
           </a:p>
@@ -2401,7 +2401,7 @@
           <a:p>
             <a:fld id="{D1BE4249-C0D0-4B06-8692-E8BB871AF643}" type="datetimeFigureOut">
               <a:rPr lang="en-US" smtClean="0"/>
-              <a:t>4/8/2025</a:t>
+              <a:t>4/9/2025</a:t>
             </a:fld>
             <a:endParaRPr lang="en-US" dirty="0"/>
           </a:p>
@@ -2548,7 +2548,7 @@
           </a:lstStyle>
           <a:p>
             <a:r>
-              <a:rPr lang="en-US" smtClean="0"/>
+              <a:rPr lang="en-US"/>
               <a:t>Click to edit Master title style</a:t>
             </a:r>
             <a:endParaRPr lang="en-US" dirty="0"/>
@@ -2620,7 +2620,7 @@
           </a:lstStyle>
           <a:p>
             <a:r>
-              <a:rPr lang="en-US" smtClean="0"/>
+              <a:rPr lang="en-US"/>
               <a:t>Click icon to add picture</a:t>
             </a:r>
             <a:endParaRPr lang="en-US" dirty="0"/>
@@ -2700,7 +2700,7 @@
           <a:p>
             <a:pPr lvl="0"/>
             <a:r>
-              <a:rPr lang="en-US" smtClean="0"/>
+              <a:rPr lang="en-US"/>
               <a:t>Edit Master text styles</a:t>
             </a:r>
           </a:p>
@@ -2723,7 +2723,7 @@
           <a:p>
             <a:fld id="{042B0DB6-F5C7-45FB-8CF3-31B45F9C2DAC}" type="datetimeFigureOut">
               <a:rPr lang="en-US" smtClean="0"/>
-              <a:t>4/8/2025</a:t>
+              <a:t>4/9/2025</a:t>
             </a:fld>
             <a:endParaRPr lang="en-US" dirty="0"/>
           </a:p>
@@ -2872,7 +2872,7 @@
           <a:lstStyle/>
           <a:p>
             <a:r>
-              <a:rPr lang="en-US" smtClean="0"/>
+              <a:rPr lang="en-US"/>
               <a:t>Click to edit Master title style</a:t>
             </a:r>
             <a:endParaRPr lang="en-US" dirty="0"/>
@@ -2906,35 +2906,35 @@
           <a:p>
             <a:pPr lvl="0"/>
             <a:r>
-              <a:rPr lang="en-US" smtClean="0"/>
+              <a:rPr lang="en-US"/>
               <a:t>Edit Master text styles</a:t>
             </a:r>
           </a:p>
           <a:p>
             <a:pPr lvl="1"/>
             <a:r>
-              <a:rPr lang="en-US" smtClean="0"/>
+              <a:rPr lang="en-US"/>
               <a:t>Second level</a:t>
             </a:r>
           </a:p>
           <a:p>
             <a:pPr lvl="2"/>
             <a:r>
-              <a:rPr lang="en-US" smtClean="0"/>
+              <a:rPr lang="en-US"/>
               <a:t>Third level</a:t>
             </a:r>
           </a:p>
           <a:p>
             <a:pPr lvl="3"/>
             <a:r>
-              <a:rPr lang="en-US" smtClean="0"/>
+              <a:rPr lang="en-US"/>
               <a:t>Fourth level</a:t>
             </a:r>
           </a:p>
           <a:p>
             <a:pPr lvl="4"/>
             <a:r>
-              <a:rPr lang="en-US" smtClean="0"/>
+              <a:rPr lang="en-US"/>
               <a:t>Fifth level</a:t>
             </a:r>
             <a:endParaRPr lang="en-US" dirty="0"/>
@@ -2977,7 +2977,7 @@
           <a:p>
             <a:fld id="{1160EA64-D806-43AC-9DF2-F8C432F32B4C}" type="datetimeFigureOut">
               <a:rPr lang="en-US" smtClean="0"/>
-              <a:t>4/8/2025</a:t>
+              <a:t>4/9/2025</a:t>
             </a:fld>
             <a:endParaRPr lang="en-US" dirty="0"/>
           </a:p>
@@ -3488,7 +3488,7 @@
           <a:lstStyle/>
           <a:p>
             <a:r>
-              <a:rPr lang="en-US" dirty="0" smtClean="0"/>
+              <a:rPr lang="en-US" dirty="0"/>
               <a:t>Adapter Design Pattern</a:t>
             </a:r>
             <a:endParaRPr lang="en-IN" dirty="0"/>
@@ -3519,7 +3519,7 @@
           <a:p>
             <a:pPr algn="l"/>
             <a:r>
-              <a:rPr lang="en-US" b="1" dirty="0" smtClean="0">
+              <a:rPr lang="en-US" b="1" dirty="0">
                 <a:solidFill>
                   <a:schemeClr val="tx1"/>
                 </a:solidFill>
@@ -3530,7 +3530,7 @@
           <a:p>
             <a:pPr algn="l"/>
             <a:r>
-              <a:rPr lang="en-US" b="1" dirty="0" smtClean="0">
+              <a:rPr lang="en-US" b="1" dirty="0">
                 <a:solidFill>
                   <a:schemeClr val="tx1"/>
                 </a:solidFill>
@@ -3541,7 +3541,7 @@
           <a:p>
             <a:pPr algn="l"/>
             <a:r>
-              <a:rPr lang="en-US" b="1" dirty="0" smtClean="0">
+              <a:rPr lang="en-US" b="1" dirty="0">
                 <a:solidFill>
                   <a:schemeClr val="tx1"/>
                 </a:solidFill>
@@ -3566,13 +3566,6 @@
   <p:clrMapOvr>
     <a:masterClrMapping/>
   </p:clrMapOvr>
-  <p:timing>
-    <p:tnLst>
-      <p:par>
-        <p:cTn id="1" dur="indefinite" restart="never" nodeType="tmRoot"/>
-      </p:par>
-    </p:tnLst>
-  </p:timing>
 </p:sld>
 </file>
 
@@ -3617,7 +3610,7 @@
           <a:p>
             <a:pPr algn="ctr"/>
             <a:r>
-              <a:rPr lang="en-IN" sz="4000" b="1" u="sng" dirty="0" smtClean="0"/>
+              <a:rPr lang="en-IN" sz="4000" b="1" u="sng" dirty="0"/>
               <a:t>Structure Diagram</a:t>
             </a:r>
             <a:endParaRPr lang="en-IN" sz="4800" b="1" u="sng" dirty="0"/>
@@ -3626,28 +3619,28 @@
       </p:sp>
       <p:pic>
         <p:nvPicPr>
-          <p:cNvPr id="3" name="Picture 2"/>
+          <p:cNvPr id="5" name="Picture 4">
+            <a:extLst>
+              <a:ext uri="{FF2B5EF4-FFF2-40B4-BE49-F238E27FC236}">
+                <a16:creationId xmlns:a16="http://schemas.microsoft.com/office/drawing/2014/main" id="{BC9434D0-A2E2-2B0E-9ECD-2F64BE532225}"/>
+              </a:ext>
+            </a:extLst>
+          </p:cNvPr>
           <p:cNvPicPr>
             <a:picLocks noChangeAspect="1"/>
           </p:cNvPicPr>
           <p:nvPr/>
         </p:nvPicPr>
         <p:blipFill>
-          <a:blip r:embed="rId2">
-            <a:extLst>
-              <a:ext uri="{28A0092B-C50C-407E-A947-70E740481C1C}">
-                <a14:useLocalDpi xmlns:a14="http://schemas.microsoft.com/office/drawing/2010/main" val="0"/>
-              </a:ext>
-            </a:extLst>
-          </a:blip>
+          <a:blip r:embed="rId2"/>
           <a:stretch>
             <a:fillRect/>
           </a:stretch>
         </p:blipFill>
         <p:spPr>
           <a:xfrm>
-            <a:off x="801189" y="1280160"/>
-            <a:ext cx="11059885" cy="5303520"/>
+            <a:off x="933061" y="1209869"/>
+            <a:ext cx="10776857" cy="5141169"/>
           </a:xfrm>
           <a:prstGeom prst="rect">
             <a:avLst/>
@@ -3664,13 +3657,6 @@
   <p:clrMapOvr>
     <a:masterClrMapping/>
   </p:clrMapOvr>
-  <p:timing>
-    <p:tnLst>
-      <p:par>
-        <p:cTn id="1" dur="indefinite" restart="never" nodeType="tmRoot"/>
-      </p:par>
-    </p:tnLst>
-  </p:timing>
 </p:sld>
 </file>
 
@@ -3715,7 +3701,7 @@
           <a:p>
             <a:pPr algn="ctr"/>
             <a:r>
-              <a:rPr lang="en-IN" sz="4000" b="1" u="sng" dirty="0" smtClean="0"/>
+              <a:rPr lang="en-IN" sz="4000" b="1" u="sng" dirty="0"/>
               <a:t>Class Diagram</a:t>
             </a:r>
             <a:endParaRPr lang="en-IN" sz="4800" b="1" u="sng" dirty="0"/>
@@ -3724,28 +3710,28 @@
       </p:sp>
       <p:pic>
         <p:nvPicPr>
-          <p:cNvPr id="3" name="Picture 2"/>
+          <p:cNvPr id="5" name="Picture 4">
+            <a:extLst>
+              <a:ext uri="{FF2B5EF4-FFF2-40B4-BE49-F238E27FC236}">
+                <a16:creationId xmlns:a16="http://schemas.microsoft.com/office/drawing/2014/main" id="{3363EAFD-F80B-C98D-F2AA-E4FBBE247B8C}"/>
+              </a:ext>
+            </a:extLst>
+          </p:cNvPr>
           <p:cNvPicPr>
             <a:picLocks noChangeAspect="1"/>
           </p:cNvPicPr>
           <p:nvPr/>
         </p:nvPicPr>
         <p:blipFill>
-          <a:blip r:embed="rId2">
-            <a:extLst>
-              <a:ext uri="{28A0092B-C50C-407E-A947-70E740481C1C}">
-                <a14:useLocalDpi xmlns:a14="http://schemas.microsoft.com/office/drawing/2010/main" val="0"/>
-              </a:ext>
-            </a:extLst>
-          </a:blip>
+          <a:blip r:embed="rId2"/>
           <a:stretch>
             <a:fillRect/>
           </a:stretch>
         </p:blipFill>
         <p:spPr>
           <a:xfrm>
-            <a:off x="862150" y="862151"/>
-            <a:ext cx="10877004" cy="5721529"/>
+            <a:off x="1348537" y="862151"/>
+            <a:ext cx="9494926" cy="5482665"/>
           </a:xfrm>
           <a:prstGeom prst="rect">
             <a:avLst/>
@@ -3762,13 +3748,6 @@
   <p:clrMapOvr>
     <a:masterClrMapping/>
   </p:clrMapOvr>
-  <p:timing>
-    <p:tnLst>
-      <p:par>
-        <p:cTn id="1" dur="indefinite" restart="never" nodeType="tmRoot"/>
-      </p:par>
-    </p:tnLst>
-  </p:timing>
 </p:sld>
 </file>
 
@@ -3813,7 +3792,7 @@
           <a:p>
             <a:pPr algn="ctr"/>
             <a:r>
-              <a:rPr lang="en-US" sz="4000" b="1" u="sng" dirty="0" smtClean="0"/>
+              <a:rPr lang="en-US" sz="4000" b="1" u="sng" dirty="0"/>
               <a:t>Participants and Their Role</a:t>
             </a:r>
             <a:endParaRPr lang="en-IN" sz="4800" b="1" u="sng" dirty="0"/>
@@ -3875,7 +3854,7 @@
                     <a:p>
                       <a:pPr algn="ctr"/>
                       <a:r>
-                        <a:rPr lang="en-IN" sz="2400" b="1" dirty="0" smtClean="0">
+                        <a:rPr lang="en-IN" sz="2400" b="1" dirty="0">
                           <a:solidFill>
                             <a:schemeClr val="tx1"/>
                           </a:solidFill>
@@ -3883,12 +3862,6 @@
                         </a:rPr>
                         <a:t>Participant</a:t>
                       </a:r>
-                      <a:endParaRPr lang="en-IN" sz="2400" b="1" dirty="0">
-                        <a:solidFill>
-                          <a:schemeClr val="tx1"/>
-                        </a:solidFill>
-                        <a:latin typeface="Candara" panose="020E0502030303020204" pitchFamily="34" charset="0"/>
-                      </a:endParaRPr>
                     </a:p>
                   </a:txBody>
                   <a:tcPr anchor="ctr"/>
@@ -3900,7 +3873,7 @@
                     <a:p>
                       <a:pPr algn="ctr"/>
                       <a:r>
-                        <a:rPr lang="en-IN" sz="2400" b="1" dirty="0" smtClean="0">
+                        <a:rPr lang="en-IN" sz="2400" b="1" dirty="0">
                           <a:solidFill>
                             <a:schemeClr val="tx1"/>
                           </a:solidFill>
@@ -3908,12 +3881,6 @@
                         </a:rPr>
                         <a:t>Class/Interface in Example</a:t>
                       </a:r>
-                      <a:endParaRPr lang="en-IN" sz="2400" b="1" dirty="0">
-                        <a:solidFill>
-                          <a:schemeClr val="tx1"/>
-                        </a:solidFill>
-                        <a:latin typeface="Candara" panose="020E0502030303020204" pitchFamily="34" charset="0"/>
-                      </a:endParaRPr>
                     </a:p>
                   </a:txBody>
                   <a:tcPr anchor="ctr"/>
@@ -3925,7 +3892,7 @@
                     <a:p>
                       <a:pPr algn="ctr"/>
                       <a:r>
-                        <a:rPr lang="en-IN" sz="2400" b="1" dirty="0" smtClean="0">
+                        <a:rPr lang="en-IN" sz="2400" b="1" dirty="0">
                           <a:solidFill>
                             <a:schemeClr val="tx1"/>
                           </a:solidFill>
@@ -3933,12 +3900,6 @@
                         </a:rPr>
                         <a:t>Role</a:t>
                       </a:r>
-                      <a:endParaRPr lang="en-IN" sz="2400" b="1" dirty="0">
-                        <a:solidFill>
-                          <a:schemeClr val="tx1"/>
-                        </a:solidFill>
-                        <a:latin typeface="Candara" panose="020E0502030303020204" pitchFamily="34" charset="0"/>
-                      </a:endParaRPr>
                     </a:p>
                   </a:txBody>
                   <a:tcPr anchor="ctr"/>
@@ -3957,14 +3918,11 @@
                     <a:p>
                       <a:pPr algn="l"/>
                       <a:r>
-                        <a:rPr lang="en-IN" b="1" dirty="0" smtClean="0">
+                        <a:rPr lang="en-IN" b="1" dirty="0">
                           <a:latin typeface="Candara" panose="020E0502030303020204" pitchFamily="34" charset="0"/>
                         </a:rPr>
                         <a:t>Target</a:t>
                       </a:r>
-                      <a:endParaRPr lang="en-IN" b="1" dirty="0">
-                        <a:latin typeface="Candara" panose="020E0502030303020204" pitchFamily="34" charset="0"/>
-                      </a:endParaRPr>
                     </a:p>
                   </a:txBody>
                   <a:tcPr anchor="ctr"/>
@@ -3976,14 +3934,11 @@
                     <a:p>
                       <a:pPr algn="l"/>
                       <a:r>
-                        <a:rPr lang="en-IN" b="1" dirty="0" smtClean="0">
+                        <a:rPr lang="en-IN" b="1" dirty="0">
                           <a:latin typeface="Candara" panose="020E0502030303020204" pitchFamily="34" charset="0"/>
                         </a:rPr>
                         <a:t>JSONData (Interface)</a:t>
                       </a:r>
-                      <a:endParaRPr lang="en-IN" b="1" dirty="0">
-                        <a:latin typeface="Candara" panose="020E0502030303020204" pitchFamily="34" charset="0"/>
-                      </a:endParaRPr>
                     </a:p>
                   </a:txBody>
                   <a:tcPr anchor="ctr"/>
@@ -3995,13 +3950,13 @@
                     <a:p>
                       <a:pPr algn="just"/>
                       <a:r>
-                        <a:rPr lang="en-US" b="1" dirty="0" smtClean="0">
+                        <a:rPr lang="en-US" b="1" dirty="0">
                           <a:latin typeface="Candara" panose="020E0502030303020204" pitchFamily="34" charset="0"/>
                         </a:rPr>
                         <a:t>The </a:t>
                       </a:r>
                       <a:r>
-                        <a:rPr lang="en-US" b="1" dirty="0" smtClean="0">
+                        <a:rPr lang="en-US" b="1" dirty="0">
                           <a:solidFill>
                             <a:srgbClr val="C00000"/>
                           </a:solidFill>
@@ -4010,13 +3965,13 @@
                         <a:t>interface</a:t>
                       </a:r>
                       <a:r>
-                        <a:rPr lang="en-US" b="1" dirty="0" smtClean="0">
+                        <a:rPr lang="en-US" b="1" dirty="0">
                           <a:latin typeface="Candara" panose="020E0502030303020204" pitchFamily="34" charset="0"/>
                         </a:rPr>
                         <a:t> sought by the client. It defines </a:t>
                       </a:r>
                       <a:r>
-                        <a:rPr lang="en-US" b="1" dirty="0" smtClean="0">
+                        <a:rPr lang="en-US" b="1" dirty="0">
                           <a:solidFill>
                             <a:schemeClr val="bg1"/>
                           </a:solidFill>
@@ -4025,7 +3980,7 @@
                         <a:t>readJSONData()</a:t>
                       </a:r>
                       <a:r>
-                        <a:rPr lang="en-US" b="1" dirty="0" smtClean="0">
+                        <a:rPr lang="en-US" b="1" dirty="0">
                           <a:solidFill>
                             <a:srgbClr val="C00000"/>
                           </a:solidFill>
@@ -4034,13 +3989,13 @@
                         <a:t> </a:t>
                       </a:r>
                       <a:r>
-                        <a:rPr lang="en-US" b="1" dirty="0" smtClean="0">
+                        <a:rPr lang="en-US" b="1" dirty="0">
                           <a:latin typeface="Candara" panose="020E0502030303020204" pitchFamily="34" charset="0"/>
                         </a:rPr>
                         <a:t>, which the </a:t>
                       </a:r>
                       <a:r>
-                        <a:rPr lang="en-US" b="1" dirty="0" smtClean="0">
+                        <a:rPr lang="en-US" b="1" dirty="0">
                           <a:solidFill>
                             <a:srgbClr val="C00000"/>
                           </a:solidFill>
@@ -4049,7 +4004,7 @@
                         <a:t>client expects to use</a:t>
                       </a:r>
                       <a:r>
-                        <a:rPr lang="en-US" b="1" dirty="0" smtClean="0">
+                        <a:rPr lang="en-US" b="1" dirty="0">
                           <a:latin typeface="Candara" panose="020E0502030303020204" pitchFamily="34" charset="0"/>
                         </a:rPr>
                         <a:t>.</a:t>
@@ -4075,14 +4030,11 @@
                     <a:p>
                       <a:pPr algn="l"/>
                       <a:r>
-                        <a:rPr lang="en-IN" b="1" dirty="0" smtClean="0">
+                        <a:rPr lang="en-IN" b="1" dirty="0">
                           <a:latin typeface="Candara" panose="020E0502030303020204" pitchFamily="34" charset="0"/>
                         </a:rPr>
                         <a:t>Concrete Target</a:t>
                       </a:r>
-                      <a:endParaRPr lang="en-IN" b="1" dirty="0">
-                        <a:latin typeface="Candara" panose="020E0502030303020204" pitchFamily="34" charset="0"/>
-                      </a:endParaRPr>
                     </a:p>
                   </a:txBody>
                   <a:tcPr anchor="ctr"/>
@@ -4094,14 +4046,11 @@
                     <a:p>
                       <a:pPr algn="l"/>
                       <a:r>
-                        <a:rPr lang="en-IN" b="1" dirty="0" smtClean="0">
+                        <a:rPr lang="en-IN" b="1" dirty="0">
                           <a:latin typeface="Candara" panose="020E0502030303020204" pitchFamily="34" charset="0"/>
                         </a:rPr>
                         <a:t>JSONSoftware (Class)</a:t>
                       </a:r>
-                      <a:endParaRPr lang="en-IN" b="1" dirty="0">
-                        <a:latin typeface="Candara" panose="020E0502030303020204" pitchFamily="34" charset="0"/>
-                      </a:endParaRPr>
                     </a:p>
                   </a:txBody>
                   <a:tcPr anchor="ctr"/>
@@ -4113,13 +4062,13 @@
                     <a:p>
                       <a:pPr algn="just"/>
                       <a:r>
-                        <a:rPr lang="en-US" b="1" dirty="0" smtClean="0">
+                        <a:rPr lang="en-US" b="1" dirty="0">
                           <a:latin typeface="Candara" panose="020E0502030303020204" pitchFamily="34" charset="0"/>
                         </a:rPr>
                         <a:t>A normal </a:t>
                       </a:r>
                       <a:r>
-                        <a:rPr lang="en-US" b="1" dirty="0" smtClean="0">
+                        <a:rPr lang="en-US" b="1" dirty="0">
                           <a:solidFill>
                             <a:srgbClr val="C00000"/>
                           </a:solidFill>
@@ -4128,7 +4077,7 @@
                         <a:t>implementation of JSONData</a:t>
                       </a:r>
                       <a:r>
-                        <a:rPr lang="en-US" b="1" dirty="0" smtClean="0">
+                        <a:rPr lang="en-US" b="1" dirty="0">
                           <a:latin typeface="Candara" panose="020E0502030303020204" pitchFamily="34" charset="0"/>
                         </a:rPr>
                         <a:t> that directly processes JSON data.</a:t>
@@ -4154,14 +4103,11 @@
                     <a:p>
                       <a:pPr algn="l"/>
                       <a:r>
-                        <a:rPr lang="en-IN" b="1" dirty="0" smtClean="0">
+                        <a:rPr lang="en-IN" b="1" dirty="0">
                           <a:latin typeface="Candara" panose="020E0502030303020204" pitchFamily="34" charset="0"/>
                         </a:rPr>
                         <a:t>Adaptee</a:t>
                       </a:r>
-                      <a:endParaRPr lang="en-IN" b="1" dirty="0">
-                        <a:latin typeface="Candara" panose="020E0502030303020204" pitchFamily="34" charset="0"/>
-                      </a:endParaRPr>
                     </a:p>
                   </a:txBody>
                   <a:tcPr anchor="ctr"/>
@@ -4173,14 +4119,11 @@
                     <a:p>
                       <a:pPr algn="l"/>
                       <a:r>
-                        <a:rPr lang="en-IN" b="1" dirty="0" smtClean="0">
+                        <a:rPr lang="en-IN" b="1" dirty="0">
                           <a:latin typeface="Candara" panose="020E0502030303020204" pitchFamily="34" charset="0"/>
                         </a:rPr>
                         <a:t>XMLData (Interface)</a:t>
                       </a:r>
-                      <a:endParaRPr lang="en-IN" b="1" dirty="0">
-                        <a:latin typeface="Candara" panose="020E0502030303020204" pitchFamily="34" charset="0"/>
-                      </a:endParaRPr>
                     </a:p>
                   </a:txBody>
                   <a:tcPr anchor="ctr"/>
@@ -4192,13 +4135,13 @@
                     <a:p>
                       <a:pPr algn="just"/>
                       <a:r>
-                        <a:rPr lang="en-US" b="1" dirty="0" smtClean="0">
+                        <a:rPr lang="en-US" b="1" dirty="0">
                           <a:latin typeface="Candara" panose="020E0502030303020204" pitchFamily="34" charset="0"/>
                         </a:rPr>
                         <a:t>The existing, </a:t>
                       </a:r>
                       <a:r>
-                        <a:rPr lang="en-US" b="1" dirty="0" smtClean="0">
+                        <a:rPr lang="en-US" b="1" dirty="0">
                           <a:solidFill>
                             <a:srgbClr val="C00000"/>
                           </a:solidFill>
@@ -4207,7 +4150,7 @@
                         <a:t>incompatible interface</a:t>
                       </a:r>
                       <a:r>
-                        <a:rPr lang="en-US" b="1" dirty="0" smtClean="0">
+                        <a:rPr lang="en-US" b="1" dirty="0">
                           <a:latin typeface="Candara" panose="020E0502030303020204" pitchFamily="34" charset="0"/>
                         </a:rPr>
                         <a:t> that defines readXMLData().</a:t>
@@ -4233,14 +4176,11 @@
                     <a:p>
                       <a:pPr algn="l"/>
                       <a:r>
-                        <a:rPr lang="en-IN" b="1" dirty="0" smtClean="0">
+                        <a:rPr lang="en-IN" b="1" dirty="0">
                           <a:latin typeface="Candara" panose="020E0502030303020204" pitchFamily="34" charset="0"/>
                         </a:rPr>
                         <a:t>Concrete Adaptee</a:t>
                       </a:r>
-                      <a:endParaRPr lang="en-IN" b="1" dirty="0">
-                        <a:latin typeface="Candara" panose="020E0502030303020204" pitchFamily="34" charset="0"/>
-                      </a:endParaRPr>
                     </a:p>
                   </a:txBody>
                   <a:tcPr anchor="ctr"/>
@@ -4252,14 +4192,11 @@
                     <a:p>
                       <a:pPr algn="l"/>
                       <a:r>
-                        <a:rPr lang="en-IN" b="1" dirty="0" smtClean="0">
+                        <a:rPr lang="en-IN" b="1" dirty="0">
                           <a:latin typeface="Candara" panose="020E0502030303020204" pitchFamily="34" charset="0"/>
                         </a:rPr>
                         <a:t>XMLSoftware (Class)</a:t>
                       </a:r>
-                      <a:endParaRPr lang="en-IN" b="1" dirty="0">
-                        <a:latin typeface="Candara" panose="020E0502030303020204" pitchFamily="34" charset="0"/>
-                      </a:endParaRPr>
                     </a:p>
                   </a:txBody>
                   <a:tcPr anchor="ctr"/>
@@ -4271,13 +4208,13 @@
                     <a:p>
                       <a:pPr algn="just"/>
                       <a:r>
-                        <a:rPr lang="en-US" b="1" dirty="0" smtClean="0">
+                        <a:rPr lang="en-US" b="1" dirty="0">
                           <a:latin typeface="Candara" panose="020E0502030303020204" pitchFamily="34" charset="0"/>
                         </a:rPr>
                         <a:t>The </a:t>
                       </a:r>
                       <a:r>
-                        <a:rPr lang="en-US" b="1" dirty="0" smtClean="0">
+                        <a:rPr lang="en-US" b="1" dirty="0">
                           <a:solidFill>
                             <a:srgbClr val="C00000"/>
                           </a:solidFill>
@@ -4286,7 +4223,7 @@
                         <a:t>actual class that implements XMLData</a:t>
                       </a:r>
                       <a:r>
-                        <a:rPr lang="en-US" b="1" dirty="0" smtClean="0">
+                        <a:rPr lang="en-US" b="1" dirty="0">
                           <a:latin typeface="Candara" panose="020E0502030303020204" pitchFamily="34" charset="0"/>
                         </a:rPr>
                         <a:t>, providing XML-specific functionality.</a:t>
@@ -4312,14 +4249,11 @@
                     <a:p>
                       <a:pPr algn="l"/>
                       <a:r>
-                        <a:rPr lang="en-IN" b="1" dirty="0" smtClean="0">
+                        <a:rPr lang="en-IN" b="1" dirty="0">
                           <a:latin typeface="Candara" panose="020E0502030303020204" pitchFamily="34" charset="0"/>
                         </a:rPr>
                         <a:t>Adapter</a:t>
                       </a:r>
-                      <a:endParaRPr lang="en-IN" b="1" dirty="0">
-                        <a:latin typeface="Candara" panose="020E0502030303020204" pitchFamily="34" charset="0"/>
-                      </a:endParaRPr>
                     </a:p>
                   </a:txBody>
                   <a:tcPr anchor="ctr"/>
@@ -4331,14 +4265,11 @@
                     <a:p>
                       <a:pPr algn="l"/>
                       <a:r>
-                        <a:rPr lang="en-IN" b="1" dirty="0" smtClean="0">
+                        <a:rPr lang="en-IN" b="1" dirty="0">
                           <a:latin typeface="Candara" panose="020E0502030303020204" pitchFamily="34" charset="0"/>
                         </a:rPr>
                         <a:t>XMLTOJSONDataAdapter (Class)</a:t>
                       </a:r>
-                      <a:endParaRPr lang="en-IN" b="1" dirty="0">
-                        <a:latin typeface="Candara" panose="020E0502030303020204" pitchFamily="34" charset="0"/>
-                      </a:endParaRPr>
                     </a:p>
                   </a:txBody>
                   <a:tcPr anchor="ctr"/>
@@ -4350,7 +4281,7 @@
                     <a:p>
                       <a:pPr algn="just"/>
                       <a:r>
-                        <a:rPr lang="en-US" b="1" dirty="0" smtClean="0">
+                        <a:rPr lang="en-US" b="1" dirty="0">
                           <a:solidFill>
                             <a:srgbClr val="C00000"/>
                           </a:solidFill>
@@ -4359,7 +4290,7 @@
                         <a:t>Bridges the gap between XMLData (Adaptee) and JSONData (Target)</a:t>
                       </a:r>
                       <a:r>
-                        <a:rPr lang="en-US" b="1" dirty="0" smtClean="0">
+                        <a:rPr lang="en-US" b="1" dirty="0">
                           <a:latin typeface="Candara" panose="020E0502030303020204" pitchFamily="34" charset="0"/>
                         </a:rPr>
                         <a:t>. It implements JSONData and internally uses XMLData.</a:t>
@@ -4385,14 +4316,11 @@
                     <a:p>
                       <a:pPr algn="l"/>
                       <a:r>
-                        <a:rPr lang="en-IN" b="1" dirty="0" smtClean="0">
+                        <a:rPr lang="en-IN" b="1" dirty="0">
                           <a:latin typeface="Candara" panose="020E0502030303020204" pitchFamily="34" charset="0"/>
                         </a:rPr>
                         <a:t>Client</a:t>
                       </a:r>
-                      <a:endParaRPr lang="en-IN" b="1" dirty="0">
-                        <a:latin typeface="Candara" panose="020E0502030303020204" pitchFamily="34" charset="0"/>
-                      </a:endParaRPr>
                     </a:p>
                   </a:txBody>
                   <a:tcPr anchor="ctr"/>
@@ -4404,14 +4332,11 @@
                     <a:p>
                       <a:pPr algn="l"/>
                       <a:r>
-                        <a:rPr lang="en-IN" b="1" dirty="0" smtClean="0">
+                        <a:rPr lang="en-IN" b="1" dirty="0">
                           <a:latin typeface="Candara" panose="020E0502030303020204" pitchFamily="34" charset="0"/>
                         </a:rPr>
                         <a:t>Main (Class)</a:t>
                       </a:r>
-                      <a:endParaRPr lang="en-IN" b="1" dirty="0">
-                        <a:latin typeface="Candara" panose="020E0502030303020204" pitchFamily="34" charset="0"/>
-                      </a:endParaRPr>
                     </a:p>
                   </a:txBody>
                   <a:tcPr anchor="ctr"/>
@@ -4423,7 +4348,7 @@
                     <a:p>
                       <a:pPr algn="just"/>
                       <a:r>
-                        <a:rPr lang="en-US" b="1" dirty="0" smtClean="0">
+                        <a:rPr lang="en-US" b="1" dirty="0">
                           <a:solidFill>
                             <a:srgbClr val="C00000"/>
                           </a:solidFill>
@@ -4432,7 +4357,7 @@
                         <a:t>Uses JSONData but interacts with XMLSoftware via the adapter</a:t>
                       </a:r>
                       <a:r>
-                        <a:rPr lang="en-US" b="1" dirty="0" smtClean="0">
+                        <a:rPr lang="en-US" b="1" dirty="0">
                           <a:latin typeface="Candara" panose="020E0502030303020204" pitchFamily="34" charset="0"/>
                         </a:rPr>
                         <a:t>, without directly using XMLData.</a:t>
@@ -4464,13 +4389,6 @@
   <p:clrMapOvr>
     <a:masterClrMapping/>
   </p:clrMapOvr>
-  <p:timing>
-    <p:tnLst>
-      <p:par>
-        <p:cTn id="1" dur="indefinite" restart="never" nodeType="tmRoot"/>
-      </p:par>
-    </p:tnLst>
-  </p:timing>
 </p:sld>
 </file>
 
@@ -4655,13 +4573,6 @@
   <p:clrMapOvr>
     <a:masterClrMapping/>
   </p:clrMapOvr>
-  <p:timing>
-    <p:tnLst>
-      <p:par>
-        <p:cTn id="1" dur="indefinite" restart="never" nodeType="tmRoot"/>
-      </p:par>
-    </p:tnLst>
-  </p:timing>
 </p:sld>
 </file>
 
@@ -4743,36 +4654,12 @@
               <a:buChar char="•"/>
             </a:pPr>
             <a:r>
-              <a:rPr lang="en-US" b="1" dirty="0" smtClean="0">
+              <a:rPr lang="en-US" b="1" dirty="0">
                 <a:solidFill>
                   <a:schemeClr val="tx1"/>
                 </a:solidFill>
               </a:rPr>
-              <a:t>Client </a:t>
-            </a:r>
-            <a:r>
-              <a:rPr lang="en-US" b="1" dirty="0">
-                <a:solidFill>
-                  <a:schemeClr val="tx1"/>
-                </a:solidFill>
-              </a:rPr>
-              <a:t>calls Adapter </a:t>
-            </a:r>
-            <a:r>
-              <a:rPr lang="en-US" b="1" dirty="0" smtClean="0">
-                <a:solidFill>
-                  <a:schemeClr val="tx1"/>
-                </a:solidFill>
-              </a:rPr>
-              <a:t>using </a:t>
-            </a:r>
-            <a:r>
-              <a:rPr lang="en-US" b="1" dirty="0">
-                <a:solidFill>
-                  <a:schemeClr val="tx1"/>
-                </a:solidFill>
-              </a:rPr>
-              <a:t>Target Interface.</a:t>
+              <a:t>Client calls Adapter using Target Interface.</a:t>
             </a:r>
           </a:p>
           <a:p>
@@ -4790,15 +4677,7 @@
                   <a:schemeClr val="tx1"/>
                 </a:solidFill>
               </a:rPr>
-              <a:t>Adapter class translates this request and delegates it to adaptee using one/multiple method calls using Adaptee </a:t>
-            </a:r>
-            <a:r>
-              <a:rPr lang="en-US" b="1" dirty="0" smtClean="0">
-                <a:solidFill>
-                  <a:schemeClr val="tx1"/>
-                </a:solidFill>
-              </a:rPr>
-              <a:t>Interface.</a:t>
+              <a:t>Adapter class translates this request and delegates it to adaptee using one/multiple method calls using Adaptee Interface.</a:t>
             </a:r>
           </a:p>
           <a:p>
@@ -4816,21 +4695,8 @@
                   <a:schemeClr val="tx1"/>
                 </a:solidFill>
               </a:rPr>
-              <a:t>Adaptee returns response to Adapter class as defined in Adaptee Interface and then Adapter transforms this response before returning it to Client as defined in Target Interface</a:t>
-            </a:r>
-            <a:r>
-              <a:rPr lang="en-US" b="1" dirty="0" smtClean="0">
-                <a:solidFill>
-                  <a:schemeClr val="tx1"/>
-                </a:solidFill>
-              </a:rPr>
-              <a:t>.</a:t>
-            </a:r>
-            <a:endParaRPr lang="en-US" b="1" dirty="0">
-              <a:solidFill>
-                <a:schemeClr val="tx1"/>
-              </a:solidFill>
-            </a:endParaRPr>
+              <a:t>Adaptee returns response to Adapter class as defined in Adaptee Interface and then Adapter transforms this response before returning it to Client as defined in Target Interface.</a:t>
+            </a:r>
           </a:p>
         </p:txBody>
       </p:sp>
@@ -5157,33 +5023,20 @@
                   <a:schemeClr val="tx1"/>
                 </a:solidFill>
               </a:rPr>
-              <a:t>Wrapper </a:t>
-            </a:r>
-            <a:r>
-              <a:rPr lang="en-US" b="1" dirty="0" smtClean="0">
-                <a:solidFill>
-                  <a:schemeClr val="tx1"/>
-                </a:solidFill>
-              </a:rPr>
-              <a:t>(</a:t>
+              <a:t>Wrapper (</a:t>
             </a:r>
             <a:r>
               <a:rPr lang="en-US" dirty="0"/>
               <a:t>since it wraps one interface and makes it compatible with another</a:t>
             </a:r>
             <a:r>
-              <a:rPr lang="en-US" b="1" dirty="0" smtClean="0">
+              <a:rPr lang="en-US" b="1" dirty="0">
                 <a:solidFill>
                   <a:schemeClr val="tx1"/>
                 </a:solidFill>
               </a:rPr>
               <a:t>).</a:t>
             </a:r>
-            <a:endParaRPr lang="en-US" b="1" dirty="0">
-              <a:solidFill>
-                <a:schemeClr val="tx1"/>
-              </a:solidFill>
-            </a:endParaRPr>
           </a:p>
         </p:txBody>
       </p:sp>
@@ -5197,13 +5050,6 @@
   <p:clrMapOvr>
     <a:masterClrMapping/>
   </p:clrMapOvr>
-  <p:timing>
-    <p:tnLst>
-      <p:par>
-        <p:cTn id="1" dur="indefinite" restart="never" nodeType="tmRoot"/>
-      </p:par>
-    </p:tnLst>
-  </p:timing>
 </p:sld>
 </file>
 
@@ -5247,7 +5093,7 @@
           <a:lstStyle/>
           <a:p>
             <a:r>
-              <a:rPr lang="en-IN" sz="5300" u="sng" dirty="0" smtClean="0"/>
+              <a:rPr lang="en-IN" sz="5300" u="sng" dirty="0"/>
               <a:t>Advantages</a:t>
             </a:r>
             <a:endParaRPr lang="en-IN" sz="4800" u="sng" dirty="0"/>
@@ -5290,15 +5136,7 @@
                   <a:schemeClr val="tx1"/>
                 </a:solidFill>
               </a:rPr>
-              <a:t>Allows reuse of existing code with different interfaces</a:t>
-            </a:r>
-            <a:r>
-              <a:rPr lang="en-US" b="1" dirty="0" smtClean="0">
-                <a:solidFill>
-                  <a:schemeClr val="tx1"/>
-                </a:solidFill>
-              </a:rPr>
-              <a:t>.</a:t>
+              <a:t>Allows reuse of existing code with different interfaces.</a:t>
             </a:r>
           </a:p>
           <a:p>
@@ -5316,15 +5154,7 @@
                   <a:schemeClr val="tx1"/>
                 </a:solidFill>
               </a:rPr>
-              <a:t>Improves code flexibility by enabling communication between incompatible components</a:t>
-            </a:r>
-            <a:r>
-              <a:rPr lang="en-US" b="1" dirty="0" smtClean="0">
-                <a:solidFill>
-                  <a:schemeClr val="tx1"/>
-                </a:solidFill>
-              </a:rPr>
-              <a:t>.</a:t>
+              <a:t>Improves code flexibility by enabling communication between incompatible components.</a:t>
             </a:r>
           </a:p>
           <a:p>
@@ -5394,7 +5224,7 @@
           </a:lstStyle>
           <a:p>
             <a:r>
-              <a:rPr lang="en-IN" sz="5300" u="sng" dirty="0" smtClean="0"/>
+              <a:rPr lang="en-IN" sz="5300" u="sng" dirty="0"/>
               <a:t>Disadvantages</a:t>
             </a:r>
             <a:endParaRPr lang="en-IN" sz="4800" u="sng" dirty="0"/>
@@ -5682,15 +5512,7 @@
                   <a:schemeClr val="tx1"/>
                 </a:solidFill>
               </a:rPr>
-              <a:t>Introduces extra layers of abstraction, which can make debugging </a:t>
-            </a:r>
-            <a:r>
-              <a:rPr lang="en-US" b="1" dirty="0" smtClean="0">
-                <a:solidFill>
-                  <a:schemeClr val="tx1"/>
-                </a:solidFill>
-              </a:rPr>
-              <a:t>harder.</a:t>
+              <a:t>Introduces extra layers of abstraction, which can make debugging harder.</a:t>
             </a:r>
           </a:p>
           <a:p>
@@ -5703,28 +5525,12 @@
               <a:buChar char="•"/>
             </a:pPr>
             <a:r>
-              <a:rPr lang="en-US" b="1" dirty="0" smtClean="0">
+              <a:rPr lang="en-US" b="1" dirty="0">
                 <a:solidFill>
                   <a:schemeClr val="tx1"/>
                 </a:solidFill>
               </a:rPr>
-              <a:t>If </a:t>
-            </a:r>
-            <a:r>
-              <a:rPr lang="en-US" b="1" dirty="0">
-                <a:solidFill>
-                  <a:schemeClr val="tx1"/>
-                </a:solidFill>
-              </a:rPr>
-              <a:t>overused, it might lead to unnecessary complexity in the code structure</a:t>
-            </a:r>
-            <a:r>
-              <a:rPr lang="en-US" b="1" dirty="0" smtClean="0">
-                <a:solidFill>
-                  <a:schemeClr val="tx1"/>
-                </a:solidFill>
-              </a:rPr>
-              <a:t>.</a:t>
+              <a:t>If overused, it might lead to unnecessary complexity in the code structure.</a:t>
             </a:r>
           </a:p>
         </p:txBody>
@@ -5739,13 +5545,6 @@
   <p:clrMapOvr>
     <a:masterClrMapping/>
   </p:clrMapOvr>
-  <p:timing>
-    <p:tnLst>
-      <p:par>
-        <p:cTn id="1" dur="indefinite" restart="never" nodeType="tmRoot"/>
-      </p:par>
-    </p:tnLst>
-  </p:timing>
 </p:sld>
 </file>
 
@@ -5789,7 +5588,7 @@
           <a:lstStyle/>
           <a:p>
             <a:r>
-              <a:rPr lang="en-IN" sz="4000" u="sng" dirty="0" smtClean="0"/>
+              <a:rPr lang="en-IN" sz="4000" u="sng" dirty="0"/>
               <a:t>Applicability</a:t>
             </a:r>
             <a:endParaRPr lang="en-IN" sz="4400" u="sng" dirty="0"/>
@@ -5832,15 +5631,7 @@
                   <a:schemeClr val="tx1"/>
                 </a:solidFill>
               </a:rPr>
-              <a:t>Use the Adapter class when you want to use some existing class, but its interface isn’t compatible with the rest of your </a:t>
-            </a:r>
-            <a:r>
-              <a:rPr lang="en-US" b="1" dirty="0" smtClean="0">
-                <a:solidFill>
-                  <a:schemeClr val="tx1"/>
-                </a:solidFill>
-              </a:rPr>
-              <a:t>code.</a:t>
+              <a:t>Use the Adapter class when you want to use some existing class, but its interface isn’t compatible with the rest of your code.</a:t>
             </a:r>
           </a:p>
           <a:p>
@@ -5853,28 +5644,12 @@
               <a:buChar char="•"/>
             </a:pPr>
             <a:r>
-              <a:rPr lang="en-US" b="1" dirty="0" smtClean="0">
+              <a:rPr lang="en-US" b="1" dirty="0">
                 <a:solidFill>
                   <a:schemeClr val="tx1"/>
                 </a:solidFill>
               </a:rPr>
-              <a:t>When </a:t>
-            </a:r>
-            <a:r>
-              <a:rPr lang="en-US" b="1" dirty="0">
-                <a:solidFill>
-                  <a:schemeClr val="tx1"/>
-                </a:solidFill>
-              </a:rPr>
-              <a:t>a new system wants to interact with legacy(old) system using new interface which is not compatible with interface of legacy system</a:t>
-            </a:r>
-            <a:r>
-              <a:rPr lang="en-US" b="1" dirty="0" smtClean="0">
-                <a:solidFill>
-                  <a:schemeClr val="tx1"/>
-                </a:solidFill>
-              </a:rPr>
-              <a:t>.</a:t>
+              <a:t>When a new system wants to interact with legacy(old) system using new interface which is not compatible with interface of legacy system.</a:t>
             </a:r>
           </a:p>
           <a:p>
@@ -5954,7 +5729,7 @@
           </a:lstStyle>
           <a:p>
             <a:r>
-              <a:rPr lang="en-IN" sz="3600" u="sng" dirty="0" smtClean="0"/>
+              <a:rPr lang="en-IN" sz="3600" u="sng" dirty="0"/>
               <a:t>When to not use it</a:t>
             </a:r>
             <a:endParaRPr lang="en-IN" sz="4800" u="sng" dirty="0"/>
@@ -6242,15 +6017,7 @@
                   <a:schemeClr val="tx1"/>
                 </a:solidFill>
               </a:rPr>
-              <a:t>You can modify the original code to match the required interface. Instead of adding an adapter, refactoring might be a cleaner solution</a:t>
-            </a:r>
-            <a:r>
-              <a:rPr lang="en-US" sz="2000" b="1" dirty="0" smtClean="0">
-                <a:solidFill>
-                  <a:schemeClr val="tx1"/>
-                </a:solidFill>
-              </a:rPr>
-              <a:t>.</a:t>
+              <a:t>You can modify the original code to match the required interface. Instead of adding an adapter, refactoring might be a cleaner solution.</a:t>
             </a:r>
           </a:p>
           <a:p>
@@ -6270,11 +6037,6 @@
               </a:rPr>
               <a:t>A simple method override or extension is enough. If you can just extend a class and override a method to achieve the same result, an adapter is overkill.</a:t>
             </a:r>
-            <a:endParaRPr lang="en-US" sz="2000" b="1" dirty="0" smtClean="0">
-              <a:solidFill>
-                <a:schemeClr val="tx1"/>
-              </a:solidFill>
-            </a:endParaRPr>
           </a:p>
         </p:txBody>
       </p:sp>
@@ -6288,13 +6050,6 @@
   <p:clrMapOvr>
     <a:masterClrMapping/>
   </p:clrMapOvr>
-  <p:timing>
-    <p:tnLst>
-      <p:par>
-        <p:cTn id="1" dur="indefinite" restart="never" nodeType="tmRoot"/>
-      </p:par>
-    </p:tnLst>
-  </p:timing>
 </p:sld>
 </file>
 
@@ -6338,7 +6093,7 @@
           <a:lstStyle/>
           <a:p>
             <a:r>
-              <a:rPr lang="en-US" sz="4400" u="sng" dirty="0" smtClean="0"/>
+              <a:rPr lang="en-US" sz="4400" u="sng" dirty="0"/>
               <a:t>Related Patterns</a:t>
             </a:r>
             <a:endParaRPr lang="en-IN" sz="4800" u="sng" dirty="0"/>
@@ -6376,20 +6131,12 @@
               <a:buChar char="•"/>
             </a:pPr>
             <a:r>
-              <a:rPr lang="en-US" b="1" dirty="0" smtClean="0">
+              <a:rPr lang="en-US" b="1" dirty="0">
                 <a:solidFill>
                   <a:schemeClr val="tx1"/>
                 </a:solidFill>
               </a:rPr>
-              <a:t>Facade </a:t>
-            </a:r>
-            <a:r>
-              <a:rPr lang="en-US" b="1" dirty="0">
-                <a:solidFill>
-                  <a:schemeClr val="tx1"/>
-                </a:solidFill>
-              </a:rPr>
-              <a:t>Pattern (Provides a simplified interface, often using adapters internally).</a:t>
+              <a:t>Facade Pattern (Provides a simplified interface, often using adapters internally).</a:t>
             </a:r>
           </a:p>
           <a:p>
@@ -6407,15 +6154,7 @@
                   <a:schemeClr val="tx1"/>
                 </a:solidFill>
               </a:rPr>
-              <a:t>Decorator Pattern (adds behavior dynamically without modifying the object</a:t>
-            </a:r>
-            <a:r>
-              <a:rPr lang="en-US" b="1" dirty="0" smtClean="0">
-                <a:solidFill>
-                  <a:schemeClr val="tx1"/>
-                </a:solidFill>
-              </a:rPr>
-              <a:t>).</a:t>
+              <a:t>Decorator Pattern (adds behavior dynamically without modifying the object).</a:t>
             </a:r>
           </a:p>
           <a:p>
@@ -6480,7 +6219,7 @@
           </a:lstStyle>
           <a:p>
             <a:r>
-              <a:rPr lang="en-US" sz="4400" u="sng" dirty="0" smtClean="0"/>
+              <a:rPr lang="en-US" sz="4400" u="sng" dirty="0"/>
               <a:t>Design Principle</a:t>
             </a:r>
             <a:endParaRPr lang="en-IN" sz="4800" u="sng" dirty="0"/>
@@ -6768,15 +6507,7 @@
                   <a:schemeClr val="tx1"/>
                 </a:solidFill>
               </a:rPr>
-              <a:t>Single Responsibility Principle (SRP): The Adapter class has one responsibility: adapting the interface</a:t>
-            </a:r>
-            <a:r>
-              <a:rPr lang="en-US" b="1" dirty="0" smtClean="0">
-                <a:solidFill>
-                  <a:schemeClr val="tx1"/>
-                </a:solidFill>
-              </a:rPr>
-              <a:t>.</a:t>
+              <a:t>Single Responsibility Principle (SRP): The Adapter class has one responsibility: adapting the interface.</a:t>
             </a:r>
           </a:p>
           <a:p>
@@ -6809,13 +6540,6 @@
   <p:clrMapOvr>
     <a:masterClrMapping/>
   </p:clrMapOvr>
-  <p:timing>
-    <p:tnLst>
-      <p:par>
-        <p:cTn id="1" dur="indefinite" restart="never" nodeType="tmRoot"/>
-      </p:par>
-    </p:tnLst>
-  </p:timing>
 </p:sld>
 </file>
 
@@ -6971,13 +6695,6 @@
   <p:clrMapOvr>
     <a:masterClrMapping/>
   </p:clrMapOvr>
-  <p:timing>
-    <p:tnLst>
-      <p:par>
-        <p:cTn id="1" dur="indefinite" restart="never" nodeType="tmRoot"/>
-      </p:par>
-    </p:tnLst>
-  </p:timing>
 </p:sld>
 </file>
 
@@ -7022,11 +6739,7 @@
           <a:p>
             <a:r>
               <a:rPr lang="en-US" sz="4400" u="sng" dirty="0"/>
-              <a:t>Real-Time </a:t>
-            </a:r>
-            <a:r>
-              <a:rPr lang="en-US" sz="4400" u="sng" dirty="0" smtClean="0"/>
-              <a:t>Use</a:t>
+              <a:t>Real-Time Use</a:t>
             </a:r>
             <a:endParaRPr lang="en-IN" sz="4800" u="sng" dirty="0"/>
           </a:p>
@@ -7068,15 +6781,7 @@
                   <a:schemeClr val="tx1"/>
                 </a:solidFill>
               </a:rPr>
-              <a:t>Java InputStreamReader &amp; OutputStreamWriter: Converts byte streams to character streams</a:t>
-            </a:r>
-            <a:r>
-              <a:rPr lang="en-US" b="1" dirty="0" smtClean="0">
-                <a:solidFill>
-                  <a:schemeClr val="tx1"/>
-                </a:solidFill>
-              </a:rPr>
-              <a:t>.</a:t>
+              <a:t>Java InputStreamReader &amp; OutputStreamWriter: Converts byte streams to character streams.</a:t>
             </a:r>
           </a:p>
           <a:p>
@@ -7087,42 +6792,13 @@
               <a:buSzPct val="119000"/>
             </a:pPr>
             <a:r>
-              <a:rPr lang="en-US" sz="2000" b="1" dirty="0" smtClean="0">
+              <a:rPr lang="en-US" sz="2000" b="1" dirty="0">
                 <a:solidFill>
                   <a:schemeClr val="tx1"/>
                 </a:solidFill>
               </a:rPr>
-              <a:t>The </a:t>
-            </a:r>
-            <a:r>
-              <a:rPr lang="en-US" sz="2000" b="1" dirty="0">
-                <a:solidFill>
-                  <a:schemeClr val="tx1"/>
-                </a:solidFill>
-              </a:rPr>
-              <a:t>InputStream class works with byte streams, but sometimes we need </a:t>
-            </a:r>
-            <a:r>
-              <a:rPr lang="en-US" sz="2000" b="1" dirty="0" smtClean="0">
-                <a:solidFill>
-                  <a:schemeClr val="tx1"/>
-                </a:solidFill>
-              </a:rPr>
-              <a:t>to </a:t>
-            </a:r>
-            <a:r>
-              <a:rPr lang="en-US" sz="2000" b="1" dirty="0">
-                <a:solidFill>
-                  <a:schemeClr val="tx1"/>
-                </a:solidFill>
-              </a:rPr>
-              <a:t>work with character streams. Java provides InputStreamReader, which acts as an adapter that converts an InputStream (bytes) into a Reader (characters).</a:t>
-            </a:r>
-            <a:endParaRPr lang="en-US" sz="2000" b="1" dirty="0" smtClean="0">
-              <a:solidFill>
-                <a:schemeClr val="tx1"/>
-              </a:solidFill>
-            </a:endParaRPr>
+              <a:t>The InputStream class works with byte streams, but sometimes we need to work with character streams. Java provides InputStreamReader, which acts as an adapter that converts an InputStream (bytes) into a Reader (characters).</a:t>
+            </a:r>
           </a:p>
           <a:p>
             <a:pPr marL="342900" indent="-342900" algn="just">
@@ -7139,15 +6815,7 @@
                   <a:schemeClr val="tx1"/>
                 </a:solidFill>
               </a:rPr>
-              <a:t>JDBC Drivers: Adapt different database protocols to the common JDBC interface</a:t>
-            </a:r>
-            <a:r>
-              <a:rPr lang="en-US" b="1" dirty="0" smtClean="0">
-                <a:solidFill>
-                  <a:schemeClr val="tx1"/>
-                </a:solidFill>
-              </a:rPr>
-              <a:t>.</a:t>
+              <a:t>JDBC Drivers: Adapt different database protocols to the common JDBC interface.</a:t>
             </a:r>
           </a:p>
           <a:p>
@@ -7163,29 +6831,8 @@
                   <a:schemeClr val="tx1"/>
                 </a:solidFill>
               </a:rPr>
-              <a:t>Java provides a common interface (java.sql.Connection) for connecting to databases. Different databases (MySQL, PostgreSQL, etc.) have their own incompatible </a:t>
-            </a:r>
-            <a:r>
-              <a:rPr lang="en-US" sz="2000" b="1" dirty="0" smtClean="0">
-                <a:solidFill>
-                  <a:schemeClr val="tx1"/>
-                </a:solidFill>
-              </a:rPr>
-              <a:t>implementations. To </a:t>
-            </a:r>
-            <a:r>
-              <a:rPr lang="en-US" sz="2000" b="1" dirty="0">
-                <a:solidFill>
-                  <a:schemeClr val="tx1"/>
-                </a:solidFill>
-              </a:rPr>
-              <a:t>make them work with the JDBC API, database vendors provide JDBC Drivers as Adapters.</a:t>
-            </a:r>
-            <a:endParaRPr lang="en-US" sz="2000" b="1" dirty="0" smtClean="0">
-              <a:solidFill>
-                <a:schemeClr val="tx1"/>
-              </a:solidFill>
-            </a:endParaRPr>
+              <a:t>Java provides a common interface (java.sql.Connection) for connecting to databases. Different databases (MySQL, PostgreSQL, etc.) have their own incompatible implementations. To make them work with the JDBC API, database vendors provide JDBC Drivers as Adapters.</a:t>
+            </a:r>
           </a:p>
           <a:p>
             <a:pPr marL="342900" indent="-342900" algn="just">
@@ -7202,15 +6849,7 @@
                   <a:schemeClr val="tx1"/>
                 </a:solidFill>
               </a:rPr>
-              <a:t>Convert Array to List in </a:t>
-            </a:r>
-            <a:r>
-              <a:rPr lang="en-US" b="1" dirty="0" smtClean="0">
-                <a:solidFill>
-                  <a:schemeClr val="tx1"/>
-                </a:solidFill>
-              </a:rPr>
-              <a:t>Java</a:t>
+              <a:t>Convert Array to List in Java</a:t>
             </a:r>
           </a:p>
           <a:p>
@@ -7257,13 +6896,6 @@
   <p:clrMapOvr>
     <a:masterClrMapping/>
   </p:clrMapOvr>
-  <p:timing>
-    <p:tnLst>
-      <p:par>
-        <p:cTn id="1" dur="indefinite" restart="never" nodeType="tmRoot"/>
-      </p:par>
-    </p:tnLst>
-  </p:timing>
 </p:sld>
 </file>
 
@@ -7444,13 +7076,6 @@
   <p:clrMapOvr>
     <a:masterClrMapping/>
   </p:clrMapOvr>
-  <p:timing>
-    <p:tnLst>
-      <p:par>
-        <p:cTn id="1" dur="indefinite" restart="never" nodeType="tmRoot"/>
-      </p:par>
-    </p:tnLst>
-  </p:timing>
 </p:sld>
 </file>
 
@@ -7494,7 +7119,7 @@
           <a:lstStyle/>
           <a:p>
             <a:r>
-              <a:rPr lang="fr-FR" sz="11500" dirty="0" smtClean="0">
+              <a:rPr lang="fr-FR" sz="11500" dirty="0">
                 <a:ln>
                   <a:solidFill>
                     <a:srgbClr val="C00000"/>
@@ -7525,21 +7150,6 @@
   <p:clrMapOvr>
     <a:masterClrMapping/>
   </p:clrMapOvr>
-  <mc:AlternateContent xmlns:mc="http://schemas.openxmlformats.org/markup-compatibility/2006" xmlns:p14="http://schemas.microsoft.com/office/powerpoint/2010/main">
-    <mc:Choice Requires="p14">
-      <p:transition p14:dur="0"/>
-    </mc:Choice>
-    <mc:Fallback xmlns="">
-      <p:transition/>
-    </mc:Fallback>
-  </mc:AlternateContent>
-  <p:timing>
-    <p:tnLst>
-      <p:par>
-        <p:cTn id="1" dur="indefinite" restart="never" nodeType="tmRoot"/>
-      </p:par>
-    </p:tnLst>
-  </p:timing>
 </p:sld>
 </file>
 
@@ -7667,13 +7277,6 @@
   <p:clrMapOvr>
     <a:masterClrMapping/>
   </p:clrMapOvr>
-  <p:timing>
-    <p:tnLst>
-      <p:par>
-        <p:cTn id="1" dur="indefinite" restart="never" nodeType="tmRoot"/>
-      </p:par>
-    </p:tnLst>
-  </p:timing>
 </p:sld>
 </file>
 
@@ -8003,7 +7606,7 @@
               </a:rPr>
               <a:t>Violation of Open/Closed Principle: You’d need to modify existing classes (e.g., Main or JSONSoftware) instead of extending them.</a:t>
             </a:r>
-            <a:endParaRPr kumimoji="0" lang="en-US" altLang="en-US" sz="1800" b="0" i="0" u="none" strike="noStrike" cap="none" normalizeH="0" baseline="0" dirty="0" smtClean="0">
+            <a:endParaRPr kumimoji="0" lang="en-US" altLang="en-US" sz="1800" b="0" i="0" u="none" strike="noStrike" cap="none" normalizeH="0" baseline="0" dirty="0">
               <a:ln>
                 <a:noFill/>
               </a:ln>
@@ -8026,13 +7629,6 @@
   <p:clrMapOvr>
     <a:masterClrMapping/>
   </p:clrMapOvr>
-  <p:timing>
-    <p:tnLst>
-      <p:par>
-        <p:cTn id="1" dur="indefinite" restart="never" nodeType="tmRoot"/>
-      </p:par>
-    </p:tnLst>
-  </p:timing>
 </p:sld>
 </file>
 
@@ -8376,21 +7972,8 @@
                   <a:schemeClr val="tx1"/>
                 </a:solidFill>
               </a:rPr>
-              <a:t>The OTG (On-The-Go) adapter serves as the adapter, enabling the mobile phone to connect to the pendrive by converting the USB-C or Micro-USB port to a USB-A port, making them </a:t>
-            </a:r>
-            <a:r>
-              <a:rPr lang="en-US" b="1" dirty="0" smtClean="0">
-                <a:solidFill>
-                  <a:schemeClr val="tx1"/>
-                </a:solidFill>
-              </a:rPr>
-              <a:t>compatible.</a:t>
-            </a:r>
-            <a:endParaRPr lang="en-US" b="1" dirty="0">
-              <a:solidFill>
-                <a:schemeClr val="tx1"/>
-              </a:solidFill>
-            </a:endParaRPr>
+              <a:t>The OTG (On-The-Go) adapter serves as the adapter, enabling the mobile phone to connect to the pendrive by converting the USB-C or Micro-USB port to a USB-A port, making them compatible.</a:t>
+            </a:r>
           </a:p>
         </p:txBody>
       </p:sp>
@@ -8525,13 +8108,6 @@
   <p:clrMapOvr>
     <a:masterClrMapping/>
   </p:clrMapOvr>
-  <p:timing>
-    <p:tnLst>
-      <p:par>
-        <p:cTn id="1" dur="indefinite" restart="never" nodeType="tmRoot"/>
-      </p:par>
-    </p:tnLst>
-  </p:timing>
 </p:sld>
 </file>
 
@@ -8875,21 +8451,8 @@
                   <a:schemeClr val="tx1"/>
                 </a:solidFill>
               </a:rPr>
-              <a:t>The OTG (On-The-Go) adapter serves as the adapter, enabling the mobile phone to connect to the pendrive by converting the USB-C or Micro-USB port to a USB-A port, making them </a:t>
-            </a:r>
-            <a:r>
-              <a:rPr lang="en-US" b="1" dirty="0" smtClean="0">
-                <a:solidFill>
-                  <a:schemeClr val="tx1"/>
-                </a:solidFill>
-              </a:rPr>
-              <a:t>compatible.</a:t>
-            </a:r>
-            <a:endParaRPr lang="en-US" b="1" dirty="0">
-              <a:solidFill>
-                <a:schemeClr val="tx1"/>
-              </a:solidFill>
-            </a:endParaRPr>
+              <a:t>The OTG (On-The-Go) adapter serves as the adapter, enabling the mobile phone to connect to the pendrive by converting the USB-C or Micro-USB port to a USB-A port, making them compatible.</a:t>
+            </a:r>
           </a:p>
         </p:txBody>
       </p:sp>
@@ -8933,13 +8496,6 @@
   <p:clrMapOvr>
     <a:masterClrMapping/>
   </p:clrMapOvr>
-  <p:timing>
-    <p:tnLst>
-      <p:par>
-        <p:cTn id="1" dur="indefinite" restart="never" nodeType="tmRoot"/>
-      </p:par>
-    </p:tnLst>
-  </p:timing>
 </p:sld>
 </file>
 
@@ -8984,7 +8540,7 @@
           <a:p>
             <a:pPr algn="ctr"/>
             <a:r>
-              <a:rPr lang="en-IN" sz="4800" b="1" u="sng" dirty="0" smtClean="0"/>
+              <a:rPr lang="en-IN" sz="4800" b="1" u="sng" dirty="0"/>
               <a:t>Adapter Design Pattern</a:t>
             </a:r>
             <a:endParaRPr lang="en-IN" sz="6000" b="1" u="sng" dirty="0"/>
@@ -9272,15 +8828,7 @@
                   <a:schemeClr val="tx1"/>
                 </a:solidFill>
               </a:rPr>
-              <a:t>The Adapter design pattern is a structural </a:t>
-            </a:r>
-            <a:r>
-              <a:rPr lang="en-US" sz="2400" b="1" dirty="0" smtClean="0">
-                <a:solidFill>
-                  <a:schemeClr val="tx1"/>
-                </a:solidFill>
-              </a:rPr>
-              <a:t>pattern.</a:t>
+              <a:t>The Adapter design pattern is a structural pattern.</a:t>
             </a:r>
           </a:p>
           <a:p>
@@ -9293,26 +8841,13 @@
               <a:buChar char="•"/>
             </a:pPr>
             <a:r>
-              <a:rPr lang="en-US" sz="2400" b="1" dirty="0" smtClean="0">
+              <a:rPr lang="en-US" sz="2400" b="1" dirty="0">
                 <a:solidFill>
                   <a:schemeClr val="tx1"/>
                 </a:solidFill>
               </a:rPr>
-              <a:t>It allows </a:t>
-            </a:r>
-            <a:r>
-              <a:rPr lang="en-US" sz="2400" b="1" dirty="0">
-                <a:solidFill>
-                  <a:schemeClr val="tx1"/>
-                </a:solidFill>
-              </a:rPr>
-              <a:t>incompatible interfaces to work together by converting the interface of one class (the "adaptee") into another interface that clients expect (the "target"). </a:t>
-            </a:r>
-            <a:endParaRPr lang="en-US" sz="2400" b="1" dirty="0" smtClean="0">
-              <a:solidFill>
-                <a:schemeClr val="tx1"/>
-              </a:solidFill>
-            </a:endParaRPr>
+              <a:t>It allows incompatible interfaces to work together by converting the interface of one class (the "adaptee") into another interface that clients expect (the "target"). </a:t>
+            </a:r>
           </a:p>
           <a:p>
             <a:pPr marL="342900" indent="-342900" algn="just">
@@ -9324,20 +8859,12 @@
               <a:buChar char="•"/>
             </a:pPr>
             <a:r>
-              <a:rPr lang="en-US" sz="2400" b="1" dirty="0" smtClean="0">
+              <a:rPr lang="en-US" sz="2400" b="1" dirty="0">
                 <a:solidFill>
                   <a:schemeClr val="tx1"/>
                 </a:solidFill>
               </a:rPr>
-              <a:t>It </a:t>
-            </a:r>
-            <a:r>
-              <a:rPr lang="en-US" sz="2400" b="1" dirty="0">
-                <a:solidFill>
-                  <a:schemeClr val="tx1"/>
-                </a:solidFill>
-              </a:rPr>
-              <a:t>essentially acts as a bridge, enabling classes with different interfaces to collaborate. </a:t>
+              <a:t>It essentially acts as a bridge, enabling classes with different interfaces to collaborate. </a:t>
             </a:r>
           </a:p>
         </p:txBody>
@@ -9352,13 +8879,6 @@
   <p:clrMapOvr>
     <a:masterClrMapping/>
   </p:clrMapOvr>
-  <p:timing>
-    <p:tnLst>
-      <p:par>
-        <p:cTn id="1" dur="indefinite" restart="never" nodeType="tmRoot"/>
-      </p:par>
-    </p:tnLst>
-  </p:timing>
 </p:sld>
 </file>
 
@@ -9403,12 +8923,8 @@
           <a:p>
             <a:pPr algn="ctr"/>
             <a:r>
-              <a:rPr lang="en-US" sz="3600" b="1" u="sng" dirty="0" smtClean="0"/>
-              <a:t>Why </a:t>
-            </a:r>
-            <a:r>
               <a:rPr lang="en-US" sz="3600" b="1" u="sng" dirty="0"/>
-              <a:t>the Adapter Design Pattern a Structural Pattern?</a:t>
+              <a:t>Why the Adapter Design Pattern a Structural Pattern?</a:t>
             </a:r>
             <a:endParaRPr lang="en-IN" sz="4400" b="1" u="sng" dirty="0"/>
           </a:p>
@@ -9695,15 +9211,7 @@
                   <a:schemeClr val="tx1"/>
                 </a:solidFill>
               </a:rPr>
-              <a:t>The Adapter Design Pattern is a structural pattern because it focuses on the structure of the system by connecting two incompatible interfaces without modifying their existing code</a:t>
-            </a:r>
-            <a:r>
-              <a:rPr lang="en-US" sz="2400" b="1" dirty="0" smtClean="0">
-                <a:solidFill>
-                  <a:schemeClr val="tx1"/>
-                </a:solidFill>
-              </a:rPr>
-              <a:t>.</a:t>
+              <a:t>The Adapter Design Pattern is a structural pattern because it focuses on the structure of the system by connecting two incompatible interfaces without modifying their existing code.</a:t>
             </a:r>
           </a:p>
           <a:p>
@@ -9721,21 +9229,8 @@
                   <a:schemeClr val="tx1"/>
                 </a:solidFill>
               </a:rPr>
-              <a:t>Key Reasons</a:t>
-            </a:r>
-            <a:r>
-              <a:rPr lang="en-IN" sz="2400" b="1" dirty="0" smtClean="0">
-                <a:solidFill>
-                  <a:schemeClr val="tx1"/>
-                </a:solidFill>
-              </a:rPr>
-              <a:t>:</a:t>
-            </a:r>
-            <a:endParaRPr lang="en-IN" sz="2400" b="1" dirty="0">
-              <a:solidFill>
-                <a:schemeClr val="tx1"/>
-              </a:solidFill>
-            </a:endParaRPr>
+              <a:t>Key Reasons:</a:t>
+            </a:r>
           </a:p>
           <a:p>
             <a:pPr marL="1257300" lvl="2" indent="-342900" algn="just">
@@ -9752,15 +9247,7 @@
                   <a:schemeClr val="tx1"/>
                 </a:solidFill>
               </a:rPr>
-              <a:t>Connects Different </a:t>
-            </a:r>
-            <a:r>
-              <a:rPr lang="en-IN" sz="2000" b="1" dirty="0" smtClean="0">
-                <a:solidFill>
-                  <a:schemeClr val="tx1"/>
-                </a:solidFill>
-              </a:rPr>
-              <a:t>Structures</a:t>
+              <a:t>Connects Different Structures</a:t>
             </a:r>
           </a:p>
           <a:p>
@@ -9778,15 +9265,7 @@
                   <a:schemeClr val="tx1"/>
                 </a:solidFill>
               </a:rPr>
-              <a:t>Does Not Change Original </a:t>
-            </a:r>
-            <a:r>
-              <a:rPr lang="en-US" sz="2000" b="1" dirty="0" smtClean="0">
-                <a:solidFill>
-                  <a:schemeClr val="tx1"/>
-                </a:solidFill>
-              </a:rPr>
-              <a:t>Classes</a:t>
+              <a:t>Does Not Change Original Classes</a:t>
             </a:r>
           </a:p>
           <a:p>
@@ -9824,13 +9303,6 @@
   <p:clrMapOvr>
     <a:masterClrMapping/>
   </p:clrMapOvr>
-  <p:timing>
-    <p:tnLst>
-      <p:par>
-        <p:cTn id="1" dur="indefinite" restart="never" nodeType="tmRoot"/>
-      </p:par>
-    </p:tnLst>
-  </p:timing>
 </p:sld>
 </file>
 
@@ -10256,13 +9728,6 @@
   <p:clrMapOvr>
     <a:masterClrMapping/>
   </p:clrMapOvr>
-  <p:timing>
-    <p:tnLst>
-      <p:par>
-        <p:cTn id="1" dur="indefinite" restart="never" nodeType="tmRoot"/>
-      </p:par>
-    </p:tnLst>
-  </p:timing>
 </p:sld>
 </file>
 
